--- a/trabalho-vicio-em-bets/vicio-em-bets.pptx
+++ b/trabalho-vicio-em-bets/vicio-em-bets.pptx
@@ -13,9 +13,12 @@
     <p:sldId id="261" r:id="rId7"/>
     <p:sldId id="262" r:id="rId8"/>
     <p:sldId id="263" r:id="rId9"/>
+    <p:sldId id="264" r:id="rId10"/>
+    <p:sldId id="265" r:id="rId11"/>
+    <p:sldId id="266" r:id="rId12"/>
   </p:sldIdLst>
   <p:notesMasterIdLst>
-    <p:notesMasterId r:id="rId10"/>
+    <p:notesMasterId r:id="rId13"/>
   </p:notesMasterIdLst>
   <p:sldSz cx="9144000" cy="5143500"/>
   <p:notesSz cx="5143500" cy="9144000"/>
@@ -112,6 +115,834 @@
     </a:lvl9pPr>
   </p:defaultTextStyle>
 </p:presentation>
+</file>
+
+<file path=ppt/charts/chart1.xml><?xml version="1.0" encoding="utf-8"?>
+<c:chartSpace xmlns:c="http://schemas.openxmlformats.org/drawingml/2006/chart" xmlns:a="http://schemas.openxmlformats.org/drawingml/2006/main" xmlns:r="http://schemas.openxmlformats.org/officeDocument/2006/relationships">
+  <c:date1904 val="0"/>
+  <c:roundedCorners val="1"/>
+  <c:chart>
+    <c:title>
+      <c:tx>
+        <c:rich>
+          <a:bodyPr/>
+          <a:lstStyle/>
+          <a:p>
+            <a:pPr>
+              <a:defRPr sz="1100" b="0" i="0" u="none" strike="noStrike">
+                <a:solidFill>
+                  <a:srgbClr val="9BA7B4"/>
+                </a:solidFill>
+                <a:latin typeface="Calibri"/>
+              </a:defRPr>
+            </a:pPr>
+            <a:r>
+              <a:rPr sz="1100" b="0" i="0" u="none" strike="noStrike">
+                <a:solidFill>
+                  <a:srgbClr val="9BA7B4"/>
+                </a:solidFill>
+                <a:latin typeface="Calibri"/>
+              </a:rPr>
+              <a:t>R$ 100 reapostados: quanto sobra após n rodadas</a:t>
+            </a:r>
+          </a:p>
+        </c:rich>
+      </c:tx>
+      <c:layout/>
+      <c:overlay val="0"/>
+    </c:title>
+    <c:autoTitleDeleted val="0"/>
+    <c:plotArea>
+      <c:layout/>
+      <c:lineChart>
+        <c:varyColors val="0"/>
+        <c:ser>
+          <c:idx val="0"/>
+          <c:order val="0"/>
+          <c:tx>
+            <c:strRef>
+              <c:f>Sheet1!$B$1</c:f>
+              <c:strCache>
+                <c:ptCount val="1"/>
+                <c:pt idx="0">
+                  <c:v>Dinheiro esperado (R$)</c:v>
+                </c:pt>
+              </c:strCache>
+            </c:strRef>
+          </c:tx>
+          <c:spPr>
+            <a:solidFill>
+              <a:srgbClr val="F85149"/>
+            </a:solidFill>
+            <a:ln w="31750" cap="flat">
+              <a:solidFill>
+                <a:srgbClr val="F85149"/>
+              </a:solidFill>
+              <a:prstDash val="solid"/>
+              <a:round/>
+            </a:ln>
+            <a:effectLst/>
+          </c:spPr>
+          <c:invertIfNegative val="0"/>
+          <c:dLbls>
+            <c:numFmt formatCode="#,##0" sourceLinked="0"/>
+            <c:txPr>
+              <a:bodyPr/>
+              <a:lstStyle/>
+              <a:p>
+                <a:pPr>
+                  <a:defRPr b="0" i="0" strike="noStrike" sz="1200" u="none">
+                    <a:solidFill>
+                      <a:srgbClr val="000000"/>
+                    </a:solidFill>
+                    <a:latin typeface="Arial"/>
+                  </a:defRPr>
+                </a:pPr>
+              </a:p>
+            </c:txPr>
+            <c:showLegendKey val="0"/>
+            <c:showVal val="0"/>
+            <c:showCatName val="0"/>
+            <c:showSerName val="0"/>
+            <c:showPercent val="0"/>
+            <c:showBubbleSize val="0"/>
+            <c:showLeaderLines val="0"/>
+          </c:dLbls>
+          <c:marker>
+            <c:symbol val="circle"/>
+            <c:size val="5"/>
+            <c:spPr>
+              <a:solidFill>
+                <a:srgbClr val="F85149"/>
+              </a:solidFill>
+              <a:ln w="9525" cap="flat">
+                <a:solidFill>
+                  <a:srgbClr val="F85149"/>
+                </a:solidFill>
+                <a:prstDash val="solid"/>
+                <a:round/>
+              </a:ln>
+              <a:effectLst/>
+            </c:spPr>
+          </c:marker>
+          <c:cat>
+            <c:multiLvlStrRef>
+              <c:f>Sheet1!$A$2:$A$14</c:f>
+              <c:multiLvlStrCache>
+                <c:ptCount val="13"/>
+                <c:lvl>
+                  <c:pt idx="0">
+                    <c:v>0</c:v>
+                  </c:pt>
+                  <c:pt idx="1">
+                    <c:v>5</c:v>
+                  </c:pt>
+                  <c:pt idx="2">
+                    <c:v>10</c:v>
+                  </c:pt>
+                  <c:pt idx="3">
+                    <c:v>15</c:v>
+                  </c:pt>
+                  <c:pt idx="4">
+                    <c:v>20</c:v>
+                  </c:pt>
+                  <c:pt idx="5">
+                    <c:v>25</c:v>
+                  </c:pt>
+                  <c:pt idx="6">
+                    <c:v>30</c:v>
+                  </c:pt>
+                  <c:pt idx="7">
+                    <c:v>35</c:v>
+                  </c:pt>
+                  <c:pt idx="8">
+                    <c:v>40</c:v>
+                  </c:pt>
+                  <c:pt idx="9">
+                    <c:v>45</c:v>
+                  </c:pt>
+                  <c:pt idx="10">
+                    <c:v>50</c:v>
+                  </c:pt>
+                  <c:pt idx="11">
+                    <c:v>55</c:v>
+                  </c:pt>
+                  <c:pt idx="12">
+                    <c:v>60</c:v>
+                  </c:pt>
+                </c:lvl>
+              </c:multiLvlStrCache>
+            </c:multiLvlStrRef>
+          </c:cat>
+          <c:val>
+            <c:numRef>
+              <c:f>Sheet1!$B$2:$B$14</c:f>
+              <c:numCache>
+                <c:formatCode>General</c:formatCode>
+                <c:ptCount val="13"/>
+                <c:pt idx="0">
+                  <c:v>100</c:v>
+                </c:pt>
+                <c:pt idx="1">
+                  <c:v>85</c:v>
+                </c:pt>
+                <c:pt idx="2">
+                  <c:v>72.3</c:v>
+                </c:pt>
+                <c:pt idx="3">
+                  <c:v>61.5</c:v>
+                </c:pt>
+                <c:pt idx="4">
+                  <c:v>52.3</c:v>
+                </c:pt>
+                <c:pt idx="5">
+                  <c:v>44.5</c:v>
+                </c:pt>
+                <c:pt idx="6">
+                  <c:v>37.8</c:v>
+                </c:pt>
+                <c:pt idx="7">
+                  <c:v>32.2</c:v>
+                </c:pt>
+                <c:pt idx="8">
+                  <c:v>27.3</c:v>
+                </c:pt>
+                <c:pt idx="9">
+                  <c:v>23.2</c:v>
+                </c:pt>
+                <c:pt idx="10">
+                  <c:v>19.8</c:v>
+                </c:pt>
+                <c:pt idx="11">
+                  <c:v>16.8</c:v>
+                </c:pt>
+                <c:pt idx="12">
+                  <c:v>14.3</c:v>
+                </c:pt>
+              </c:numCache>
+            </c:numRef>
+          </c:val>
+          <c:smooth val="0"/>
+        </c:ser>
+        <c:dLbls>
+          <c:numFmt formatCode="#,##0" sourceLinked="0"/>
+          <c:txPr>
+            <a:bodyPr/>
+            <a:lstStyle/>
+            <a:p>
+              <a:pPr>
+                <a:defRPr b="0" i="0" strike="noStrike" sz="1200" u="none">
+                  <a:solidFill>
+                    <a:srgbClr val="000000"/>
+                  </a:solidFill>
+                  <a:latin typeface="Arial"/>
+                </a:defRPr>
+              </a:pPr>
+            </a:p>
+          </c:txPr>
+          <c:showLegendKey val="0"/>
+          <c:showVal val="0"/>
+          <c:showCatName val="0"/>
+          <c:showSerName val="0"/>
+          <c:showPercent val="0"/>
+          <c:showBubbleSize val="0"/>
+          <c:showLeaderLines val="0"/>
+        </c:dLbls>
+        <c:marker val="1"/>
+        <c:axId val="2094734554"/>
+        <c:axId val="2094734552"/>
+        <c:axId val="2094734556"/>
+      </c:lineChart>
+      <c:catAx>
+        <c:axId val="2094734554"/>
+        <c:scaling>
+          <c:orientation val="minMax"/>
+        </c:scaling>
+        <c:delete val="0"/>
+        <c:axPos val="b"/>
+        <c:title>
+          <c:tx>
+            <c:rich>
+              <a:bodyPr/>
+              <a:lstStyle/>
+              <a:p>
+                <a:pPr>
+                  <a:defRPr sz="1000" b="0" i="0" u="none" strike="noStrike">
+                    <a:solidFill>
+                      <a:srgbClr val="9BA7B4"/>
+                    </a:solidFill>
+                    <a:latin typeface="Arial"/>
+                  </a:defRPr>
+                </a:pPr>
+                <a:r>
+                  <a:rPr sz="1000" b="0" i="0" u="none" strike="noStrike">
+                    <a:solidFill>
+                      <a:srgbClr val="9BA7B4"/>
+                    </a:solidFill>
+                    <a:latin typeface="Arial"/>
+                  </a:rPr>
+                  <a:t>rodadas</a:t>
+                </a:r>
+              </a:p>
+            </c:rich>
+          </c:tx>
+          <c:layout/>
+          <c:overlay val="0"/>
+        </c:title>
+        <c:numFmt formatCode="General" sourceLinked="1"/>
+        <c:majorTickMark val="out"/>
+        <c:minorTickMark val="none"/>
+        <c:tickLblPos val="low"/>
+        <c:spPr>
+          <a:ln w="12700" cap="flat">
+            <a:solidFill>
+              <a:srgbClr val="888888"/>
+            </a:solidFill>
+            <a:prstDash val="solid"/>
+            <a:round/>
+          </a:ln>
+        </c:spPr>
+        <c:txPr>
+          <a:bodyPr/>
+          <a:lstStyle/>
+          <a:p>
+            <a:pPr>
+              <a:defRPr sz="1000" b="0" i="0" u="none" strike="noStrike">
+                <a:solidFill>
+                  <a:srgbClr val="9BA7B4"/>
+                </a:solidFill>
+                <a:latin typeface="Arial"/>
+              </a:defRPr>
+            </a:pPr>
+            <a:endParaRPr lang="en-US"/>
+          </a:p>
+        </c:txPr>
+        <c:crossAx val="2094734552"/>
+        <c:crosses val="autoZero"/>
+        <c:auto val="1"/>
+        <c:lblAlgn val="ctr"/>
+        <c:noMultiLvlLbl val="1"/>
+      </c:catAx>
+      <c:valAx>
+        <c:axId val="2094734552"/>
+        <c:scaling>
+          <c:orientation val="minMax"/>
+          <c:max val="100"/>
+          <c:min val="0"/>
+        </c:scaling>
+        <c:delete val="0"/>
+        <c:axPos val="l"/>
+        <c:majorGridlines>
+          <c:spPr>
+            <a:ln w="6350" cap="flat">
+              <a:solidFill>
+                <a:srgbClr val="2A3240"/>
+              </a:solidFill>
+              <a:prstDash val="solid"/>
+              <a:round/>
+            </a:ln>
+          </c:spPr>
+        </c:majorGridlines>
+        <c:numFmt formatCode="General" sourceLinked="0"/>
+        <c:majorTickMark val="out"/>
+        <c:minorTickMark val="none"/>
+        <c:tickLblPos val="nextTo"/>
+        <c:spPr>
+          <a:ln w="12700" cap="flat">
+            <a:solidFill>
+              <a:srgbClr val="888888"/>
+            </a:solidFill>
+            <a:prstDash val="solid"/>
+            <a:round/>
+          </a:ln>
+        </c:spPr>
+        <c:txPr>
+          <a:bodyPr/>
+          <a:lstStyle/>
+          <a:p>
+            <a:pPr>
+              <a:defRPr sz="1000" b="0" i="0" u="none" strike="noStrike">
+                <a:solidFill>
+                  <a:srgbClr val="9BA7B4"/>
+                </a:solidFill>
+                <a:latin typeface="Arial"/>
+              </a:defRPr>
+            </a:pPr>
+            <a:endParaRPr lang="en-US"/>
+          </a:p>
+        </c:txPr>
+        <c:crossAx val="2094734554"/>
+        <c:crosses val="autoZero"/>
+        <c:crossBetween val="between"/>
+      </c:valAx>
+      <c:spPr>
+        <a:noFill/>
+        <a:ln>
+          <a:noFill/>
+        </a:ln>
+        <a:effectLst/>
+      </c:spPr>
+    </c:plotArea>
+    <c:plotVisOnly val="1"/>
+    <c:dispBlanksAs val="span"/>
+  </c:chart>
+  <c:spPr>
+    <a:noFill/>
+    <a:ln>
+      <a:noFill/>
+    </a:ln>
+    <a:effectLst/>
+  </c:spPr>
+  <c:externalData r:id="rId1">
+    <c:autoUpdate val="0"/>
+  </c:externalData>
+</c:chartSpace>
+</file>
+
+<file path=ppt/charts/chart2.xml><?xml version="1.0" encoding="utf-8"?>
+<c:chartSpace xmlns:c="http://schemas.openxmlformats.org/drawingml/2006/chart" xmlns:a="http://schemas.openxmlformats.org/drawingml/2006/main" xmlns:r="http://schemas.openxmlformats.org/officeDocument/2006/relationships">
+  <c:date1904 val="0"/>
+  <c:roundedCorners val="1"/>
+  <c:chart>
+    <c:title>
+      <c:tx>
+        <c:rich>
+          <a:bodyPr/>
+          <a:lstStyle/>
+          <a:p>
+            <a:pPr>
+              <a:defRPr sz="1100" b="0" i="0" u="none" strike="noStrike">
+                <a:solidFill>
+                  <a:srgbClr val="9BA7B4"/>
+                </a:solidFill>
+                <a:latin typeface="Calibri"/>
+              </a:defRPr>
+            </a:pPr>
+            <a:r>
+              <a:rPr sz="1100" b="0" i="0" u="none" strike="noStrike">
+                <a:solidFill>
+                  <a:srgbClr val="9BA7B4"/>
+                </a:solidFill>
+                <a:latin typeface="Calibri"/>
+              </a:rPr>
+              <a:t>Perfil dos apostadores brasileiros (%)</a:t>
+            </a:r>
+          </a:p>
+        </c:rich>
+      </c:tx>
+      <c:layout/>
+      <c:overlay val="0"/>
+    </c:title>
+    <c:autoTitleDeleted val="0"/>
+    <c:plotArea>
+      <c:layout/>
+      <c:barChart>
+        <c:barDir val="bar"/>
+        <c:grouping val="clustered"/>
+        <c:varyColors val="0"/>
+        <c:ser>
+          <c:idx val="0"/>
+          <c:order val="0"/>
+          <c:tx>
+            <c:strRef>
+              <c:f>Sheet1!$B$1</c:f>
+              <c:strCache>
+                <c:ptCount val="1"/>
+                <c:pt idx="0">
+                  <c:v>% dos apostadores</c:v>
+                </c:pt>
+              </c:strCache>
+            </c:strRef>
+          </c:tx>
+          <c:spPr>
+            <a:solidFill>
+              <a:srgbClr val="E3B341"/>
+            </a:solidFill>
+            <a:effectLst/>
+          </c:spPr>
+          <c:invertIfNegative val="0"/>
+          <c:dLbls>
+            <c:numFmt formatCode="0.0&quot;%&quot;" sourceLinked="0"/>
+            <c:txPr>
+              <a:bodyPr/>
+              <a:lstStyle/>
+              <a:p>
+                <a:pPr>
+                  <a:defRPr b="0" i="0" strike="noStrike" sz="1100" u="none">
+                    <a:solidFill>
+                      <a:srgbClr val="F0F6FC"/>
+                    </a:solidFill>
+                    <a:latin typeface="Calibri"/>
+                  </a:defRPr>
+                </a:pPr>
+              </a:p>
+            </c:txPr>
+            <c:showLegendKey val="0"/>
+            <c:showVal val="1"/>
+            <c:showCatName val="0"/>
+            <c:showSerName val="0"/>
+            <c:showPercent val="0"/>
+            <c:showBubbleSize val="0"/>
+            <c:showLeaderLines val="0"/>
+          </c:dLbls>
+          <c:cat>
+            <c:multiLvlStrRef>
+              <c:f>Sheet1!$A$2:$A$4</c:f>
+              <c:multiLvlStrCache>
+                <c:ptCount val="3"/>
+                <c:lvl>
+                  <c:pt idx="0">
+                    <c:v>Gastam mais de R$ 1 mil por mês</c:v>
+                  </c:pt>
+                  <c:pt idx="1">
+                    <c:v>Ganham até 2 salários mínimos</c:v>
+                  </c:pt>
+                  <c:pt idx="2">
+                    <c:v>Se endividaram após começar a apostar</c:v>
+                  </c:pt>
+                </c:lvl>
+              </c:multiLvlStrCache>
+            </c:multiLvlStrRef>
+          </c:cat>
+          <c:val>
+            <c:numRef>
+              <c:f>Sheet1!$B$2:$B$4</c:f>
+              <c:numCache>
+                <c:formatCode>General</c:formatCode>
+                <c:ptCount val="3"/>
+                <c:pt idx="0">
+                  <c:v>30</c:v>
+                </c:pt>
+                <c:pt idx="1">
+                  <c:v>38.6</c:v>
+                </c:pt>
+                <c:pt idx="2">
+                  <c:v>39.7</c:v>
+                </c:pt>
+              </c:numCache>
+            </c:numRef>
+          </c:val>
+        </c:ser>
+        <c:dLbls>
+          <c:numFmt formatCode="0.0&quot;%&quot;" sourceLinked="0"/>
+          <c:txPr>
+            <a:bodyPr/>
+            <a:lstStyle/>
+            <a:p>
+              <a:pPr>
+                <a:defRPr b="0" i="0" strike="noStrike" sz="1100" u="none">
+                  <a:solidFill>
+                    <a:srgbClr val="F0F6FC"/>
+                  </a:solidFill>
+                  <a:latin typeface="Calibri"/>
+                </a:defRPr>
+              </a:pPr>
+            </a:p>
+          </c:txPr>
+          <c:showLegendKey val="0"/>
+          <c:showVal val="1"/>
+          <c:showCatName val="0"/>
+          <c:showSerName val="0"/>
+          <c:showPercent val="0"/>
+          <c:showBubbleSize val="0"/>
+          <c:showLeaderLines val="0"/>
+        </c:dLbls>
+        <c:gapWidth val="60"/>
+        <c:overlap val="0"/>
+        <c:axId val="2094734554"/>
+        <c:axId val="2094734552"/>
+        <c:axId val="2094734556"/>
+      </c:barChart>
+      <c:catAx>
+        <c:axId val="2094734554"/>
+        <c:scaling>
+          <c:orientation val="minMax"/>
+        </c:scaling>
+        <c:delete val="0"/>
+        <c:axPos val="l"/>
+        <c:numFmt formatCode="General" sourceLinked="1"/>
+        <c:majorTickMark val="out"/>
+        <c:minorTickMark val="none"/>
+        <c:tickLblPos val="nextTo"/>
+        <c:spPr>
+          <a:ln w="12700" cap="flat">
+            <a:solidFill>
+              <a:srgbClr val="888888"/>
+            </a:solidFill>
+            <a:prstDash val="solid"/>
+            <a:round/>
+          </a:ln>
+        </c:spPr>
+        <c:txPr>
+          <a:bodyPr/>
+          <a:lstStyle/>
+          <a:p>
+            <a:pPr>
+              <a:defRPr sz="1050" b="0" i="0" u="none" strike="noStrike">
+                <a:solidFill>
+                  <a:srgbClr val="F0F6FC"/>
+                </a:solidFill>
+                <a:latin typeface="Arial"/>
+              </a:defRPr>
+            </a:pPr>
+            <a:endParaRPr lang="en-US"/>
+          </a:p>
+        </c:txPr>
+        <c:crossAx val="2094734552"/>
+        <c:crosses val="autoZero"/>
+        <c:auto val="1"/>
+        <c:lblAlgn val="ctr"/>
+        <c:noMultiLvlLbl val="1"/>
+      </c:catAx>
+      <c:valAx>
+        <c:axId val="2094734552"/>
+        <c:scaling>
+          <c:orientation val="minMax"/>
+          <c:max val="50"/>
+        </c:scaling>
+        <c:delete val="1"/>
+        <c:axPos val="b"/>
+        <c:numFmt formatCode="General" sourceLinked="0"/>
+        <c:majorTickMark val="out"/>
+        <c:minorTickMark val="none"/>
+        <c:tickLblPos val="low"/>
+        <c:spPr>
+          <a:ln w="12700" cap="flat">
+            <a:solidFill>
+              <a:srgbClr val="888888"/>
+            </a:solidFill>
+            <a:prstDash val="solid"/>
+            <a:round/>
+          </a:ln>
+        </c:spPr>
+        <c:txPr>
+          <a:bodyPr/>
+          <a:lstStyle/>
+          <a:p>
+            <a:pPr>
+              <a:defRPr sz="1200" b="0" i="0" u="none" strike="noStrike">
+                <a:solidFill>
+                  <a:srgbClr val="000000"/>
+                </a:solidFill>
+                <a:latin typeface="Arial"/>
+              </a:defRPr>
+            </a:pPr>
+            <a:endParaRPr lang="en-US"/>
+          </a:p>
+        </c:txPr>
+        <c:crossAx val="2094734554"/>
+        <c:crosses val="autoZero"/>
+        <c:crossBetween val="between"/>
+      </c:valAx>
+      <c:spPr>
+        <a:noFill/>
+        <a:ln>
+          <a:noFill/>
+        </a:ln>
+        <a:effectLst/>
+      </c:spPr>
+    </c:plotArea>
+    <c:plotVisOnly val="1"/>
+    <c:dispBlanksAs val="span"/>
+  </c:chart>
+  <c:spPr>
+    <a:noFill/>
+    <a:ln>
+      <a:noFill/>
+    </a:ln>
+    <a:effectLst/>
+  </c:spPr>
+  <c:externalData r:id="rId1">
+    <c:autoUpdate val="0"/>
+  </c:externalData>
+</c:chartSpace>
+</file>
+
+<file path=ppt/charts/chart3.xml><?xml version="1.0" encoding="utf-8"?>
+<c:chartSpace xmlns:c="http://schemas.openxmlformats.org/drawingml/2006/chart" xmlns:a="http://schemas.openxmlformats.org/drawingml/2006/main" xmlns:r="http://schemas.openxmlformats.org/officeDocument/2006/relationships">
+  <c:date1904 val="0"/>
+  <c:roundedCorners val="1"/>
+  <c:chart>
+    <c:autoTitleDeleted val="1"/>
+    <c:plotArea>
+      <c:layout/>
+      <c:doughnutChart>
+        <c:varyColors val="1"/>
+        <c:ser>
+          <c:idx val="0"/>
+          <c:order val="0"/>
+          <c:tx>
+            <c:strRef>
+              <c:f>Sheet1!$B$1</c:f>
+              <c:strCache>
+                <c:ptCount val="1"/>
+                <c:pt idx="0">
+                  <c:v>Adolescentes</c:v>
+                </c:pt>
+              </c:strCache>
+            </c:strRef>
+          </c:tx>
+          <c:spPr>
+            <a:solidFill>
+              <a:schemeClr val="accent1"/>
+            </a:solidFill>
+            <a:ln w="9525" cap="flat">
+              <a:solidFill>
+                <a:srgbClr val="F9F9F9"/>
+              </a:solidFill>
+              <a:prstDash val="solid"/>
+              <a:round/>
+            </a:ln>
+            <a:effectLst/>
+          </c:spPr>
+          <c:dPt>
+            <c:idx val="0"/>
+            <c:bubble3D val="0"/>
+            <c:spPr>
+              <a:solidFill>
+                <a:srgbClr val="F85149"/>
+              </a:solidFill>
+              <a:effectLst/>
+            </c:spPr>
+          </c:dPt>
+          <c:dPt>
+            <c:idx val="1"/>
+            <c:bubble3D val="0"/>
+            <c:spPr>
+              <a:solidFill>
+                <a:srgbClr val="2A3240"/>
+              </a:solidFill>
+              <a:effectLst/>
+            </c:spPr>
+          </c:dPt>
+          <c:dLbls>
+            <c:dLbl>
+              <c:idx val="0"/>
+              <c:numFmt formatCode="General" sourceLinked="0"/>
+              <c:spPr/>
+              <c:txPr>
+                <a:bodyPr/>
+                <a:lstStyle/>
+                <a:p>
+                  <a:pPr>
+                    <a:defRPr sz="1200" b="0" i="0" u="none" strike="noStrike">
+                      <a:solidFill>
+                        <a:srgbClr val="000000"/>
+                      </a:solidFill>
+                      <a:latin typeface="Arial"/>
+                    </a:defRPr>
+                  </a:pPr>
+                </a:p>
+              </c:txPr>
+              <c:showLegendKey val="0"/>
+              <c:showVal val="0"/>
+              <c:showCatName val="0"/>
+              <c:showSerName val="0"/>
+              <c:showPercent val="0"/>
+              <c:showBubbleSize val="0"/>
+            </c:dLbl>
+            <c:dLbl>
+              <c:idx val="1"/>
+              <c:numFmt formatCode="General" sourceLinked="0"/>
+              <c:spPr/>
+              <c:txPr>
+                <a:bodyPr/>
+                <a:lstStyle/>
+                <a:p>
+                  <a:pPr>
+                    <a:defRPr sz="1200" b="0" i="0" u="none" strike="noStrike">
+                      <a:solidFill>
+                        <a:srgbClr val="000000"/>
+                      </a:solidFill>
+                      <a:latin typeface="Arial"/>
+                    </a:defRPr>
+                  </a:pPr>
+                </a:p>
+              </c:txPr>
+              <c:showLegendKey val="0"/>
+              <c:showVal val="0"/>
+              <c:showCatName val="0"/>
+              <c:showSerName val="0"/>
+              <c:showPercent val="0"/>
+              <c:showBubbleSize val="0"/>
+            </c:dLbl>
+            <c:numFmt formatCode="General" sourceLinked="0"/>
+            <c:txPr>
+              <a:bodyPr/>
+              <a:lstStyle/>
+              <a:p>
+                <a:pPr>
+                  <a:defRPr sz="1800" b="0" i="0" u="none" strike="noStrike">
+                    <a:solidFill>
+                      <a:srgbClr val="000000"/>
+                    </a:solidFill>
+                    <a:latin typeface="Arial"/>
+                  </a:defRPr>
+                </a:pPr>
+              </a:p>
+            </c:txPr>
+            <c:showLegendKey val="0"/>
+            <c:showVal val="0"/>
+            <c:showCatName val="1"/>
+            <c:showSerName val="0"/>
+            <c:showPercent val="1"/>
+            <c:showBubbleSize val="0"/>
+            <c:showLeaderLines val="0"/>
+          </c:dLbls>
+          <c:cat>
+            <c:strRef>
+              <c:f>Sheet1!$A$2:$A$3</c:f>
+              <c:strCache>
+                <c:ptCount val="2"/>
+                <c:pt idx="0">
+                  <c:v>Já apostaram</c:v>
+                </c:pt>
+                <c:pt idx="1">
+                  <c:v>Não apostaram</c:v>
+                </c:pt>
+              </c:strCache>
+            </c:strRef>
+          </c:cat>
+          <c:val>
+            <c:numRef>
+              <c:f>Sheet1!$B$2:$B$3</c:f>
+              <c:numCache>
+                <c:ptCount val="2"/>
+                <c:pt idx="0">
+                  <c:v>10.5</c:v>
+                </c:pt>
+                <c:pt idx="1">
+                  <c:v>89.5</c:v>
+                </c:pt>
+              </c:numCache>
+            </c:numRef>
+          </c:val>
+        </c:ser>
+        <c:firstSliceAng val="0"/>
+        <c:holeSize val="62"/>
+      </c:doughnutChart>
+      <c:spPr>
+        <a:noFill/>
+        <a:ln>
+          <a:noFill/>
+        </a:ln>
+        <a:effectLst/>
+      </c:spPr>
+    </c:plotArea>
+    <c:plotVisOnly val="1"/>
+    <c:dispBlanksAs val="span"/>
+  </c:chart>
+  <c:spPr>
+    <a:noFill/>
+    <a:ln>
+      <a:noFill/>
+    </a:ln>
+    <a:effectLst/>
+  </c:spPr>
+  <c:externalData r:id="rId1">
+    <c:autoUpdate val="0"/>
+  </c:externalData>
+</c:chartSpace>
 </file>
 
 <file path=ppt/notesMasters/notesMaster1.xml><?xml version="1.0" encoding="utf-8"?>
@@ -551,6 +1382,182 @@
 </p:notes>
 </file>
 
+<file path=ppt/notesSlides/notesSlide10.xml><?xml version="1.0" encoding="utf-8"?>
+<p:notes xmlns:a="http://schemas.openxmlformats.org/drawingml/2006/main" xmlns:r="http://schemas.openxmlformats.org/officeDocument/2006/relationships" xmlns:p="http://schemas.openxmlformats.org/presentationml/2006/main">
+  <p:cSld>
+    <p:spTree>
+      <p:nvGrpSpPr>
+        <p:cNvPr id="1" name=""/>
+        <p:cNvGrpSpPr/>
+        <p:nvPr/>
+      </p:nvGrpSpPr>
+      <p:grpSpPr>
+        <a:xfrm>
+          <a:off x="0" y="0"/>
+          <a:ext cx="0" cy="0"/>
+          <a:chOff x="0" y="0"/>
+          <a:chExt cx="0" cy="0"/>
+        </a:xfrm>
+      </p:grpSpPr>
+      <p:sp>
+        <p:nvSpPr>
+          <p:cNvPr id="2" name="Slide Image Placeholder 1"/>
+          <p:cNvSpPr>
+            <a:spLocks noGrp="1" noRot="1" noChangeAspect="1"/>
+          </p:cNvSpPr>
+          <p:nvPr>
+            <p:ph type="sldImg"/>
+          </p:nvPr>
+        </p:nvSpPr>
+        <p:spPr/>
+      </p:sp>
+      <p:sp>
+        <p:nvSpPr>
+          <p:cNvPr id="3" name="Notes Placeholder 2"/>
+          <p:cNvSpPr>
+            <a:spLocks noGrp="1"/>
+          </p:cNvSpPr>
+          <p:nvPr>
+            <p:ph type="body" idx="1"/>
+          </p:nvPr>
+        </p:nvSpPr>
+        <p:spPr/>
+        <p:txBody>
+          <a:bodyPr/>
+          <a:lstStyle/>
+          <a:p>
+            <a:r>
+              <a:rPr lang="en-US" dirty="0"/>
+              <a:t>Aqui entra o gancho do vídeo do grupo: o vídeo informativo É o 'meio' da nossa proposta — a nossa ação social na prática.</a:t>
+            </a:r>
+            <a:endParaRPr lang="en-US" dirty="0"/>
+          </a:p>
+        </p:txBody>
+      </p:sp>
+      <p:sp>
+        <p:nvSpPr>
+          <p:cNvPr id="4" name="Slide Number Placeholder 3"/>
+          <p:cNvSpPr>
+            <a:spLocks noGrp="1"/>
+          </p:cNvSpPr>
+          <p:nvPr>
+            <p:ph type="sldNum" sz="quarter" idx="10"/>
+          </p:nvPr>
+        </p:nvSpPr>
+        <p:spPr/>
+        <p:txBody>
+          <a:bodyPr/>
+          <a:lstStyle/>
+          <a:p>
+            <a:fld id="{F7021451-1387-4CA6-816F-3879F97B5CBC}" type="slidenum">
+              <a:rPr lang="en-US"/>
+              <a:t>10</a:t>
+            </a:fld>
+            <a:endParaRPr lang="en-US"/>
+          </a:p>
+        </p:txBody>
+      </p:sp>
+    </p:spTree>
+    <p:extLst>
+      <p:ext uri="{BB962C8B-B14F-4D97-AF65-F5344CB8AC3E}">
+        <p14:creationId xmlns:p14="http://schemas.microsoft.com/office/powerpoint/2010/main" val="1024086991"/>
+      </p:ext>
+    </p:extLst>
+  </p:cSld>
+  <p:clrMapOvr>
+    <a:masterClrMapping/>
+  </p:clrMapOvr>
+</p:notes>
+</file>
+
+<file path=ppt/notesSlides/notesSlide11.xml><?xml version="1.0" encoding="utf-8"?>
+<p:notes xmlns:a="http://schemas.openxmlformats.org/drawingml/2006/main" xmlns:r="http://schemas.openxmlformats.org/officeDocument/2006/relationships" xmlns:p="http://schemas.openxmlformats.org/presentationml/2006/main">
+  <p:cSld>
+    <p:spTree>
+      <p:nvGrpSpPr>
+        <p:cNvPr id="1" name=""/>
+        <p:cNvGrpSpPr/>
+        <p:nvPr/>
+      </p:nvGrpSpPr>
+      <p:grpSpPr>
+        <a:xfrm>
+          <a:off x="0" y="0"/>
+          <a:ext cx="0" cy="0"/>
+          <a:chOff x="0" y="0"/>
+          <a:chExt cx="0" cy="0"/>
+        </a:xfrm>
+      </p:grpSpPr>
+      <p:sp>
+        <p:nvSpPr>
+          <p:cNvPr id="2" name="Slide Image Placeholder 1"/>
+          <p:cNvSpPr>
+            <a:spLocks noGrp="1" noRot="1" noChangeAspect="1"/>
+          </p:cNvSpPr>
+          <p:nvPr>
+            <p:ph type="sldImg"/>
+          </p:nvPr>
+        </p:nvSpPr>
+        <p:spPr/>
+      </p:sp>
+      <p:sp>
+        <p:nvSpPr>
+          <p:cNvPr id="3" name="Notes Placeholder 2"/>
+          <p:cNvSpPr>
+            <a:spLocks noGrp="1"/>
+          </p:cNvSpPr>
+          <p:nvPr>
+            <p:ph type="body" idx="1"/>
+          </p:nvPr>
+        </p:nvSpPr>
+        <p:spPr/>
+        <p:txBody>
+          <a:bodyPr/>
+          <a:lstStyle/>
+          <a:p>
+            <a:r>
+              <a:rPr lang="en-US" dirty="0"/>
+              <a:t>Fechar com os canais de ajuda — isso mostra que a apresentação não só descreve o problema, mas aponta a saída.</a:t>
+            </a:r>
+            <a:endParaRPr lang="en-US" dirty="0"/>
+          </a:p>
+        </p:txBody>
+      </p:sp>
+      <p:sp>
+        <p:nvSpPr>
+          <p:cNvPr id="4" name="Slide Number Placeholder 3"/>
+          <p:cNvSpPr>
+            <a:spLocks noGrp="1"/>
+          </p:cNvSpPr>
+          <p:nvPr>
+            <p:ph type="sldNum" sz="quarter" idx="10"/>
+          </p:nvPr>
+        </p:nvSpPr>
+        <p:spPr/>
+        <p:txBody>
+          <a:bodyPr/>
+          <a:lstStyle/>
+          <a:p>
+            <a:fld id="{F7021451-1387-4CA6-816F-3879F97B5CBC}" type="slidenum">
+              <a:rPr lang="en-US"/>
+              <a:t>11</a:t>
+            </a:fld>
+            <a:endParaRPr lang="en-US"/>
+          </a:p>
+        </p:txBody>
+      </p:sp>
+    </p:spTree>
+    <p:extLst>
+      <p:ext uri="{BB962C8B-B14F-4D97-AF65-F5344CB8AC3E}">
+        <p14:creationId xmlns:p14="http://schemas.microsoft.com/office/powerpoint/2010/main" val="1024086991"/>
+      </p:ext>
+    </p:extLst>
+  </p:cSld>
+  <p:clrMapOvr>
+    <a:masterClrMapping/>
+  </p:clrMapOvr>
+</p:notes>
+</file>
+
 <file path=ppt/notesSlides/notesSlide2.xml><?xml version="1.0" encoding="utf-8"?>
 <p:notes xmlns:a="http://schemas.openxmlformats.org/drawingml/2006/main" xmlns:r="http://schemas.openxmlformats.org/officeDocument/2006/relationships" xmlns:p="http://schemas.openxmlformats.org/presentationml/2006/main">
   <p:cSld>
@@ -1037,7 +2044,7 @@
           <a:p>
             <a:r>
               <a:rPr lang="en-US" dirty="0"/>
-              <a:t>Aqui entra o gancho do vídeo do grupo: o vídeo informativo É o 'meio' da nossa proposta — a nossa ação social na prática.</a:t>
+              <a:t>Ponto de matemática: valor esperado e função exponencial. Se der tempo, mostrar que após 21 rodadas já se perdeu metade (0,968^21 ≈ 0,5 — meia-vida do dinheiro).</a:t>
             </a:r>
             <a:endParaRPr lang="en-US" dirty="0"/>
           </a:p>
@@ -1125,7 +2132,7 @@
           <a:p>
             <a:r>
               <a:rPr lang="en-US" dirty="0"/>
-              <a:t>Fechar com os canais de ajuda — isso mostra que a apresentação não só descreve o problema, mas aponta a saída.</a:t>
+              <a:t>Leitura de gráfico de barras e de setores — pontue: quase 4 em cada 10 apostadores se endividaram, e o público mais pobre é o mais atingido.</a:t>
             </a:r>
             <a:endParaRPr lang="en-US" dirty="0"/>
           </a:p>
@@ -1149,6 +2156,94 @@
             <a:fld id="{F7021451-1387-4CA6-816F-3879F97B5CBC}" type="slidenum">
               <a:rPr lang="en-US"/>
               <a:t>8</a:t>
+            </a:fld>
+            <a:endParaRPr lang="en-US"/>
+          </a:p>
+        </p:txBody>
+      </p:sp>
+    </p:spTree>
+    <p:extLst>
+      <p:ext uri="{BB962C8B-B14F-4D97-AF65-F5344CB8AC3E}">
+        <p14:creationId xmlns:p14="http://schemas.microsoft.com/office/powerpoint/2010/main" val="1024086991"/>
+      </p:ext>
+    </p:extLst>
+  </p:cSld>
+  <p:clrMapOvr>
+    <a:masterClrMapping/>
+  </p:clrMapOvr>
+</p:notes>
+</file>
+
+<file path=ppt/notesSlides/notesSlide9.xml><?xml version="1.0" encoding="utf-8"?>
+<p:notes xmlns:a="http://schemas.openxmlformats.org/drawingml/2006/main" xmlns:r="http://schemas.openxmlformats.org/officeDocument/2006/relationships" xmlns:p="http://schemas.openxmlformats.org/presentationml/2006/main">
+  <p:cSld>
+    <p:spTree>
+      <p:nvGrpSpPr>
+        <p:cNvPr id="1" name=""/>
+        <p:cNvGrpSpPr/>
+        <p:nvPr/>
+      </p:nvGrpSpPr>
+      <p:grpSpPr>
+        <a:xfrm>
+          <a:off x="0" y="0"/>
+          <a:ext cx="0" cy="0"/>
+          <a:chOff x="0" y="0"/>
+          <a:chExt cx="0" cy="0"/>
+        </a:xfrm>
+      </p:grpSpPr>
+      <p:sp>
+        <p:nvSpPr>
+          <p:cNvPr id="2" name="Slide Image Placeholder 1"/>
+          <p:cNvSpPr>
+            <a:spLocks noGrp="1" noRot="1" noChangeAspect="1"/>
+          </p:cNvSpPr>
+          <p:nvPr>
+            <p:ph type="sldImg"/>
+          </p:nvPr>
+        </p:nvSpPr>
+        <p:spPr/>
+      </p:sp>
+      <p:sp>
+        <p:nvSpPr>
+          <p:cNvPr id="3" name="Notes Placeholder 2"/>
+          <p:cNvSpPr>
+            <a:spLocks noGrp="1"/>
+          </p:cNvSpPr>
+          <p:nvPr>
+            <p:ph type="body" idx="1"/>
+          </p:nvPr>
+        </p:nvSpPr>
+        <p:spPr/>
+        <p:txBody>
+          <a:bodyPr/>
+          <a:lstStyle/>
+          <a:p>
+            <a:r>
+              <a:rPr lang="en-US" dirty="0"/>
+              <a:t>Ponto de biologia: dopamina, reforço intermitente, tolerância e maturação do córtex pré-frontal. Conectar com o slide 4 ('é doença'): aqui está o mecanismo da doença.</a:t>
+            </a:r>
+            <a:endParaRPr lang="en-US" dirty="0"/>
+          </a:p>
+        </p:txBody>
+      </p:sp>
+      <p:sp>
+        <p:nvSpPr>
+          <p:cNvPr id="4" name="Slide Number Placeholder 3"/>
+          <p:cNvSpPr>
+            <a:spLocks noGrp="1"/>
+          </p:cNvSpPr>
+          <p:nvPr>
+            <p:ph type="sldNum" sz="quarter" idx="10"/>
+          </p:nvPr>
+        </p:nvSpPr>
+        <p:spPr/>
+        <p:txBody>
+          <a:bodyPr/>
+          <a:lstStyle/>
+          <a:p>
+            <a:fld id="{F7021451-1387-4CA6-816F-3879F97B5CBC}" type="slidenum">
+              <a:rPr lang="en-US"/>
+              <a:t>9</a:t>
             </a:fld>
             <a:endParaRPr lang="en-US"/>
           </a:p>
@@ -1635,7 +2730,7 @@
                 <a:ea typeface="Calibri" pitchFamily="34" charset="-122"/>
                 <a:cs typeface="Calibri" pitchFamily="34" charset="-120"/>
               </a:rPr>
-              <a:t>Tese  •  Quatro por quês  •  Proposta de intervenção</a:t>
+              <a:t>Redação: tese e intervenção  •  Matemática: os números  •  Biologia: o cérebro no vício</a:t>
             </a:r>
             <a:endParaRPr lang="en-US" sz="1400" dirty="0"/>
           </a:p>
@@ -1677,6 +2772,1153 @@
               <a:t>[Nomes dos integrantes]  —  [Turma]  —  2026</a:t>
             </a:r>
             <a:endParaRPr lang="en-US" sz="1300" dirty="0"/>
+          </a:p>
+        </p:txBody>
+      </p:sp>
+    </p:spTree>
+  </p:cSld>
+  <p:clrMapOvr>
+    <a:masterClrMapping/>
+  </p:clrMapOvr>
+</p:sld>
+</file>
+
+<file path=ppt/slides/slide10.xml><?xml version="1.0" encoding="utf-8"?>
+<p:sld xmlns:a="http://schemas.openxmlformats.org/drawingml/2006/main" xmlns:r="http://schemas.openxmlformats.org/officeDocument/2006/relationships" xmlns:p="http://schemas.openxmlformats.org/presentationml/2006/main">
+  <p:cSld name="Slide 10">
+    <p:bg>
+      <p:bgPr>
+        <a:solidFill>
+          <a:srgbClr val="0D1117"/>
+        </a:solidFill>
+      </p:bgPr>
+    </p:bg>
+    <p:spTree>
+      <p:nvGrpSpPr>
+        <p:cNvPr id="1" name=""/>
+        <p:cNvGrpSpPr/>
+        <p:nvPr/>
+      </p:nvGrpSpPr>
+      <p:grpSpPr>
+        <a:xfrm>
+          <a:off x="0" y="0"/>
+          <a:ext cx="0" cy="0"/>
+          <a:chOff x="0" y="0"/>
+          <a:chExt cx="0" cy="0"/>
+        </a:xfrm>
+      </p:grpSpPr>
+      <p:sp>
+        <p:nvSpPr>
+          <p:cNvPr id="2" name="Text 0"/>
+          <p:cNvSpPr txBox="1"/>
+          <p:nvPr/>
+        </p:nvSpPr>
+        <p:spPr>
+          <a:xfrm>
+            <a:off x="640080" y="365760"/>
+            <a:ext cx="7863840" cy="548640"/>
+          </a:xfrm>
+          <a:prstGeom prst="rect">
+            <a:avLst/>
+          </a:prstGeom>
+          <a:noFill/>
+          <a:ln/>
+        </p:spPr>
+        <p:txBody>
+          <a:bodyPr wrap="square" lIns="0" tIns="0" rIns="0" bIns="0" rtlCol="0" anchor="ctr"/>
+          <a:lstStyle/>
+          <a:p>
+            <a:pPr indent="0" marL="0">
+              <a:buNone/>
+            </a:pPr>
+            <a:r>
+              <a:rPr lang="en-US" sz="3000" b="1" dirty="0">
+                <a:solidFill>
+                  <a:srgbClr val="F0F6FC"/>
+                </a:solidFill>
+                <a:latin typeface="Calibri" pitchFamily="34" charset="0"/>
+                <a:ea typeface="Calibri" pitchFamily="34" charset="-122"/>
+                <a:cs typeface="Calibri" pitchFamily="34" charset="-120"/>
+              </a:rPr>
+              <a:t>PROPOSTA DE INTERVENÇÃO</a:t>
+            </a:r>
+            <a:endParaRPr lang="en-US" sz="3000" dirty="0"/>
+          </a:p>
+        </p:txBody>
+      </p:sp>
+      <p:sp>
+        <p:nvSpPr>
+          <p:cNvPr id="3" name="Shape 1"/>
+          <p:cNvSpPr/>
+          <p:nvPr/>
+        </p:nvSpPr>
+        <p:spPr>
+          <a:xfrm>
+            <a:off x="640080" y="1143000"/>
+            <a:ext cx="1938528" cy="2331720"/>
+          </a:xfrm>
+          <a:prstGeom prst="roundRect">
+            <a:avLst>
+              <a:gd name="adj" fmla="val 4717"/>
+            </a:avLst>
+          </a:prstGeom>
+          <a:solidFill>
+            <a:srgbClr val="161C26"/>
+          </a:solidFill>
+          <a:ln/>
+        </p:spPr>
+      </p:sp>
+      <p:sp>
+        <p:nvSpPr>
+          <p:cNvPr id="4" name="Shape 2"/>
+          <p:cNvSpPr/>
+          <p:nvPr/>
+        </p:nvSpPr>
+        <p:spPr>
+          <a:xfrm>
+            <a:off x="804672" y="1307592"/>
+            <a:ext cx="502920" cy="502920"/>
+          </a:xfrm>
+          <a:prstGeom prst="ellipse">
+            <a:avLst/>
+          </a:prstGeom>
+          <a:solidFill>
+            <a:srgbClr val="1C2431"/>
+          </a:solidFill>
+          <a:ln/>
+        </p:spPr>
+      </p:sp>
+      <p:pic>
+        <p:nvPicPr>
+          <p:cNvPr id="5" name="Image 0" descr="preencoded.png">    </p:cNvPr>
+          <p:cNvPicPr>
+            <a:picLocks noChangeAspect="1"/>
+          </p:cNvPicPr>
+          <p:nvPr/>
+        </p:nvPicPr>
+        <p:blipFill>
+          <a:blip r:embed="rId1"/>
+          <a:stretch>
+            <a:fillRect/>
+          </a:stretch>
+        </p:blipFill>
+        <p:spPr>
+          <a:xfrm>
+            <a:off x="935431" y="1438351"/>
+            <a:ext cx="241402" cy="241402"/>
+          </a:xfrm>
+          <a:prstGeom prst="rect">
+            <a:avLst/>
+          </a:prstGeom>
+        </p:spPr>
+      </p:pic>
+      <p:sp>
+        <p:nvSpPr>
+          <p:cNvPr id="6" name="Text 3"/>
+          <p:cNvSpPr txBox="1"/>
+          <p:nvPr/>
+        </p:nvSpPr>
+        <p:spPr>
+          <a:xfrm>
+            <a:off x="804672" y="1920240"/>
+            <a:ext cx="1609344" cy="320040"/>
+          </a:xfrm>
+          <a:prstGeom prst="rect">
+            <a:avLst/>
+          </a:prstGeom>
+          <a:noFill/>
+          <a:ln/>
+        </p:spPr>
+        <p:txBody>
+          <a:bodyPr wrap="square" lIns="0" tIns="0" rIns="0" bIns="0" rtlCol="0" anchor="ctr"/>
+          <a:lstStyle/>
+          <a:p>
+            <a:pPr indent="0" marL="0">
+              <a:buNone/>
+            </a:pPr>
+            <a:r>
+              <a:rPr lang="en-US" sz="1400" b="1" dirty="0">
+                <a:solidFill>
+                  <a:srgbClr val="3FB950"/>
+                </a:solidFill>
+                <a:latin typeface="Calibri" pitchFamily="34" charset="0"/>
+                <a:ea typeface="Calibri" pitchFamily="34" charset="-122"/>
+                <a:cs typeface="Calibri" pitchFamily="34" charset="-120"/>
+              </a:rPr>
+              <a:t>AGENTE</a:t>
+            </a:r>
+            <a:endParaRPr lang="en-US" sz="1400" dirty="0"/>
+          </a:p>
+        </p:txBody>
+      </p:sp>
+      <p:sp>
+        <p:nvSpPr>
+          <p:cNvPr id="7" name="Text 4"/>
+          <p:cNvSpPr txBox="1"/>
+          <p:nvPr/>
+        </p:nvSpPr>
+        <p:spPr>
+          <a:xfrm>
+            <a:off x="804672" y="2240280"/>
+            <a:ext cx="1609344" cy="1097280"/>
+          </a:xfrm>
+          <a:prstGeom prst="rect">
+            <a:avLst/>
+          </a:prstGeom>
+          <a:noFill/>
+          <a:ln/>
+        </p:spPr>
+        <p:txBody>
+          <a:bodyPr wrap="square" lIns="0" tIns="0" rIns="0" bIns="0" rtlCol="0" anchor="t"/>
+          <a:lstStyle/>
+          <a:p>
+            <a:pPr indent="0" marL="0">
+              <a:lnSpc>
+                <a:spcPct val="110000"/>
+              </a:lnSpc>
+              <a:buNone/>
+            </a:pPr>
+            <a:r>
+              <a:rPr lang="en-US" sz="1150" dirty="0">
+                <a:solidFill>
+                  <a:srgbClr val="F0F6FC"/>
+                </a:solidFill>
+                <a:latin typeface="Calibri" pitchFamily="34" charset="0"/>
+                <a:ea typeface="Calibri" pitchFamily="34" charset="-122"/>
+                <a:cs typeface="Calibri" pitchFamily="34" charset="-120"/>
+              </a:rPr>
+              <a:t>Ministério da Saúde e escolas, em parceria com as prefeituras</a:t>
+            </a:r>
+            <a:endParaRPr lang="en-US" sz="1150" dirty="0"/>
+          </a:p>
+        </p:txBody>
+      </p:sp>
+      <p:sp>
+        <p:nvSpPr>
+          <p:cNvPr id="8" name="Shape 5"/>
+          <p:cNvSpPr/>
+          <p:nvPr/>
+        </p:nvSpPr>
+        <p:spPr>
+          <a:xfrm>
+            <a:off x="2779776" y="1143000"/>
+            <a:ext cx="1938528" cy="2331720"/>
+          </a:xfrm>
+          <a:prstGeom prst="roundRect">
+            <a:avLst>
+              <a:gd name="adj" fmla="val 4717"/>
+            </a:avLst>
+          </a:prstGeom>
+          <a:solidFill>
+            <a:srgbClr val="161C26"/>
+          </a:solidFill>
+          <a:ln/>
+        </p:spPr>
+      </p:sp>
+      <p:sp>
+        <p:nvSpPr>
+          <p:cNvPr id="9" name="Shape 6"/>
+          <p:cNvSpPr/>
+          <p:nvPr/>
+        </p:nvSpPr>
+        <p:spPr>
+          <a:xfrm>
+            <a:off x="2944368" y="1307592"/>
+            <a:ext cx="502920" cy="502920"/>
+          </a:xfrm>
+          <a:prstGeom prst="ellipse">
+            <a:avLst/>
+          </a:prstGeom>
+          <a:solidFill>
+            <a:srgbClr val="1C2431"/>
+          </a:solidFill>
+          <a:ln/>
+        </p:spPr>
+      </p:sp>
+      <p:pic>
+        <p:nvPicPr>
+          <p:cNvPr id="10" name="Image 1" descr="preencoded.png">    </p:cNvPr>
+          <p:cNvPicPr>
+            <a:picLocks noChangeAspect="1"/>
+          </p:cNvPicPr>
+          <p:nvPr/>
+        </p:nvPicPr>
+        <p:blipFill>
+          <a:blip r:embed="rId2"/>
+          <a:stretch>
+            <a:fillRect/>
+          </a:stretch>
+        </p:blipFill>
+        <p:spPr>
+          <a:xfrm>
+            <a:off x="3075127" y="1438351"/>
+            <a:ext cx="241402" cy="241402"/>
+          </a:xfrm>
+          <a:prstGeom prst="rect">
+            <a:avLst/>
+          </a:prstGeom>
+        </p:spPr>
+      </p:pic>
+      <p:sp>
+        <p:nvSpPr>
+          <p:cNvPr id="11" name="Text 7"/>
+          <p:cNvSpPr txBox="1"/>
+          <p:nvPr/>
+        </p:nvSpPr>
+        <p:spPr>
+          <a:xfrm>
+            <a:off x="2944368" y="1920240"/>
+            <a:ext cx="1609344" cy="320040"/>
+          </a:xfrm>
+          <a:prstGeom prst="rect">
+            <a:avLst/>
+          </a:prstGeom>
+          <a:noFill/>
+          <a:ln/>
+        </p:spPr>
+        <p:txBody>
+          <a:bodyPr wrap="square" lIns="0" tIns="0" rIns="0" bIns="0" rtlCol="0" anchor="ctr"/>
+          <a:lstStyle/>
+          <a:p>
+            <a:pPr indent="0" marL="0">
+              <a:buNone/>
+            </a:pPr>
+            <a:r>
+              <a:rPr lang="en-US" sz="1400" b="1" dirty="0">
+                <a:solidFill>
+                  <a:srgbClr val="3FB950"/>
+                </a:solidFill>
+                <a:latin typeface="Calibri" pitchFamily="34" charset="0"/>
+                <a:ea typeface="Calibri" pitchFamily="34" charset="-122"/>
+                <a:cs typeface="Calibri" pitchFamily="34" charset="-120"/>
+              </a:rPr>
+              <a:t>AÇÃO</a:t>
+            </a:r>
+            <a:endParaRPr lang="en-US" sz="1400" dirty="0"/>
+          </a:p>
+        </p:txBody>
+      </p:sp>
+      <p:sp>
+        <p:nvSpPr>
+          <p:cNvPr id="12" name="Text 8"/>
+          <p:cNvSpPr txBox="1"/>
+          <p:nvPr/>
+        </p:nvSpPr>
+        <p:spPr>
+          <a:xfrm>
+            <a:off x="2944368" y="2240280"/>
+            <a:ext cx="1609344" cy="1097280"/>
+          </a:xfrm>
+          <a:prstGeom prst="rect">
+            <a:avLst/>
+          </a:prstGeom>
+          <a:noFill/>
+          <a:ln/>
+        </p:spPr>
+        <p:txBody>
+          <a:bodyPr wrap="square" lIns="0" tIns="0" rIns="0" bIns="0" rtlCol="0" anchor="t"/>
+          <a:lstStyle/>
+          <a:p>
+            <a:pPr indent="0" marL="0">
+              <a:lnSpc>
+                <a:spcPct val="110000"/>
+              </a:lnSpc>
+              <a:buNone/>
+            </a:pPr>
+            <a:r>
+              <a:rPr lang="en-US" sz="1150" dirty="0">
+                <a:solidFill>
+                  <a:srgbClr val="F0F6FC"/>
+                </a:solidFill>
+                <a:latin typeface="Calibri" pitchFamily="34" charset="0"/>
+                <a:ea typeface="Calibri" pitchFamily="34" charset="-122"/>
+                <a:cs typeface="Calibri" pitchFamily="34" charset="-120"/>
+              </a:rPr>
+              <a:t>Campanha nacional de conscientização + ampliação do tratamento gratuito nos CAPS/SUS</a:t>
+            </a:r>
+            <a:endParaRPr lang="en-US" sz="1150" dirty="0"/>
+          </a:p>
+        </p:txBody>
+      </p:sp>
+      <p:sp>
+        <p:nvSpPr>
+          <p:cNvPr id="13" name="Shape 9"/>
+          <p:cNvSpPr/>
+          <p:nvPr/>
+        </p:nvSpPr>
+        <p:spPr>
+          <a:xfrm>
+            <a:off x="4919472" y="1143000"/>
+            <a:ext cx="1938528" cy="2331720"/>
+          </a:xfrm>
+          <a:prstGeom prst="roundRect">
+            <a:avLst>
+              <a:gd name="adj" fmla="val 4717"/>
+            </a:avLst>
+          </a:prstGeom>
+          <a:solidFill>
+            <a:srgbClr val="161C26"/>
+          </a:solidFill>
+          <a:ln/>
+        </p:spPr>
+      </p:sp>
+      <p:sp>
+        <p:nvSpPr>
+          <p:cNvPr id="14" name="Shape 10"/>
+          <p:cNvSpPr/>
+          <p:nvPr/>
+        </p:nvSpPr>
+        <p:spPr>
+          <a:xfrm>
+            <a:off x="5084064" y="1307592"/>
+            <a:ext cx="502920" cy="502920"/>
+          </a:xfrm>
+          <a:prstGeom prst="ellipse">
+            <a:avLst/>
+          </a:prstGeom>
+          <a:solidFill>
+            <a:srgbClr val="1C2431"/>
+          </a:solidFill>
+          <a:ln/>
+        </p:spPr>
+      </p:sp>
+      <p:pic>
+        <p:nvPicPr>
+          <p:cNvPr id="15" name="Image 2" descr="preencoded.png">    </p:cNvPr>
+          <p:cNvPicPr>
+            <a:picLocks noChangeAspect="1"/>
+          </p:cNvPicPr>
+          <p:nvPr/>
+        </p:nvPicPr>
+        <p:blipFill>
+          <a:blip r:embed="rId3"/>
+          <a:stretch>
+            <a:fillRect/>
+          </a:stretch>
+        </p:blipFill>
+        <p:spPr>
+          <a:xfrm>
+            <a:off x="5214823" y="1438351"/>
+            <a:ext cx="241402" cy="241402"/>
+          </a:xfrm>
+          <a:prstGeom prst="rect">
+            <a:avLst/>
+          </a:prstGeom>
+        </p:spPr>
+      </p:pic>
+      <p:sp>
+        <p:nvSpPr>
+          <p:cNvPr id="16" name="Text 11"/>
+          <p:cNvSpPr txBox="1"/>
+          <p:nvPr/>
+        </p:nvSpPr>
+        <p:spPr>
+          <a:xfrm>
+            <a:off x="5084064" y="1920240"/>
+            <a:ext cx="1609344" cy="320040"/>
+          </a:xfrm>
+          <a:prstGeom prst="rect">
+            <a:avLst/>
+          </a:prstGeom>
+          <a:noFill/>
+          <a:ln/>
+        </p:spPr>
+        <p:txBody>
+          <a:bodyPr wrap="square" lIns="0" tIns="0" rIns="0" bIns="0" rtlCol="0" anchor="ctr"/>
+          <a:lstStyle/>
+          <a:p>
+            <a:pPr indent="0" marL="0">
+              <a:buNone/>
+            </a:pPr>
+            <a:r>
+              <a:rPr lang="en-US" sz="1400" b="1" dirty="0">
+                <a:solidFill>
+                  <a:srgbClr val="3FB950"/>
+                </a:solidFill>
+                <a:latin typeface="Calibri" pitchFamily="34" charset="0"/>
+                <a:ea typeface="Calibri" pitchFamily="34" charset="-122"/>
+                <a:cs typeface="Calibri" pitchFamily="34" charset="-120"/>
+              </a:rPr>
+              <a:t>MEIO</a:t>
+            </a:r>
+            <a:endParaRPr lang="en-US" sz="1400" dirty="0"/>
+          </a:p>
+        </p:txBody>
+      </p:sp>
+      <p:sp>
+        <p:nvSpPr>
+          <p:cNvPr id="17" name="Text 12"/>
+          <p:cNvSpPr txBox="1"/>
+          <p:nvPr/>
+        </p:nvSpPr>
+        <p:spPr>
+          <a:xfrm>
+            <a:off x="5084064" y="2240280"/>
+            <a:ext cx="1609344" cy="1097280"/>
+          </a:xfrm>
+          <a:prstGeom prst="rect">
+            <a:avLst/>
+          </a:prstGeom>
+          <a:noFill/>
+          <a:ln/>
+        </p:spPr>
+        <p:txBody>
+          <a:bodyPr wrap="square" lIns="0" tIns="0" rIns="0" bIns="0" rtlCol="0" anchor="t"/>
+          <a:lstStyle/>
+          <a:p>
+            <a:pPr indent="0" marL="0">
+              <a:lnSpc>
+                <a:spcPct val="110000"/>
+              </a:lnSpc>
+              <a:buNone/>
+            </a:pPr>
+            <a:r>
+              <a:rPr lang="en-US" sz="1150" dirty="0">
+                <a:solidFill>
+                  <a:srgbClr val="F0F6FC"/>
+                </a:solidFill>
+                <a:latin typeface="Calibri" pitchFamily="34" charset="0"/>
+                <a:ea typeface="Calibri" pitchFamily="34" charset="-122"/>
+                <a:cs typeface="Calibri" pitchFamily="34" charset="-120"/>
+              </a:rPr>
+              <a:t>Vídeos informativos nas redes sociais, palestras nas escolas e divulgação dos canais de ajuda</a:t>
+            </a:r>
+            <a:endParaRPr lang="en-US" sz="1150" dirty="0"/>
+          </a:p>
+        </p:txBody>
+      </p:sp>
+      <p:sp>
+        <p:nvSpPr>
+          <p:cNvPr id="18" name="Shape 13"/>
+          <p:cNvSpPr/>
+          <p:nvPr/>
+        </p:nvSpPr>
+        <p:spPr>
+          <a:xfrm>
+            <a:off x="7059168" y="1143000"/>
+            <a:ext cx="1938528" cy="2331720"/>
+          </a:xfrm>
+          <a:prstGeom prst="roundRect">
+            <a:avLst>
+              <a:gd name="adj" fmla="val 4717"/>
+            </a:avLst>
+          </a:prstGeom>
+          <a:solidFill>
+            <a:srgbClr val="161C26"/>
+          </a:solidFill>
+          <a:ln/>
+        </p:spPr>
+      </p:sp>
+      <p:sp>
+        <p:nvSpPr>
+          <p:cNvPr id="19" name="Shape 14"/>
+          <p:cNvSpPr/>
+          <p:nvPr/>
+        </p:nvSpPr>
+        <p:spPr>
+          <a:xfrm>
+            <a:off x="7223760" y="1307592"/>
+            <a:ext cx="502920" cy="502920"/>
+          </a:xfrm>
+          <a:prstGeom prst="ellipse">
+            <a:avLst/>
+          </a:prstGeom>
+          <a:solidFill>
+            <a:srgbClr val="1C2431"/>
+          </a:solidFill>
+          <a:ln/>
+        </p:spPr>
+      </p:sp>
+      <p:pic>
+        <p:nvPicPr>
+          <p:cNvPr id="20" name="Image 3" descr="preencoded.png">    </p:cNvPr>
+          <p:cNvPicPr>
+            <a:picLocks noChangeAspect="1"/>
+          </p:cNvPicPr>
+          <p:nvPr/>
+        </p:nvPicPr>
+        <p:blipFill>
+          <a:blip r:embed="rId4"/>
+          <a:stretch>
+            <a:fillRect/>
+          </a:stretch>
+        </p:blipFill>
+        <p:spPr>
+          <a:xfrm>
+            <a:off x="7354519" y="1438351"/>
+            <a:ext cx="241402" cy="241402"/>
+          </a:xfrm>
+          <a:prstGeom prst="rect">
+            <a:avLst/>
+          </a:prstGeom>
+        </p:spPr>
+      </p:pic>
+      <p:sp>
+        <p:nvSpPr>
+          <p:cNvPr id="21" name="Text 15"/>
+          <p:cNvSpPr txBox="1"/>
+          <p:nvPr/>
+        </p:nvSpPr>
+        <p:spPr>
+          <a:xfrm>
+            <a:off x="7223760" y="1920240"/>
+            <a:ext cx="1609344" cy="320040"/>
+          </a:xfrm>
+          <a:prstGeom prst="rect">
+            <a:avLst/>
+          </a:prstGeom>
+          <a:noFill/>
+          <a:ln/>
+        </p:spPr>
+        <p:txBody>
+          <a:bodyPr wrap="square" lIns="0" tIns="0" rIns="0" bIns="0" rtlCol="0" anchor="ctr"/>
+          <a:lstStyle/>
+          <a:p>
+            <a:pPr indent="0" marL="0">
+              <a:buNone/>
+            </a:pPr>
+            <a:r>
+              <a:rPr lang="en-US" sz="1400" b="1" dirty="0">
+                <a:solidFill>
+                  <a:srgbClr val="3FB950"/>
+                </a:solidFill>
+                <a:latin typeface="Calibri" pitchFamily="34" charset="0"/>
+                <a:ea typeface="Calibri" pitchFamily="34" charset="-122"/>
+                <a:cs typeface="Calibri" pitchFamily="34" charset="-120"/>
+              </a:rPr>
+              <a:t>FINALIDADE</a:t>
+            </a:r>
+            <a:endParaRPr lang="en-US" sz="1400" dirty="0"/>
+          </a:p>
+        </p:txBody>
+      </p:sp>
+      <p:sp>
+        <p:nvSpPr>
+          <p:cNvPr id="22" name="Text 16"/>
+          <p:cNvSpPr txBox="1"/>
+          <p:nvPr/>
+        </p:nvSpPr>
+        <p:spPr>
+          <a:xfrm>
+            <a:off x="7223760" y="2240280"/>
+            <a:ext cx="1609344" cy="1097280"/>
+          </a:xfrm>
+          <a:prstGeom prst="rect">
+            <a:avLst/>
+          </a:prstGeom>
+          <a:noFill/>
+          <a:ln/>
+        </p:spPr>
+        <p:txBody>
+          <a:bodyPr wrap="square" lIns="0" tIns="0" rIns="0" bIns="0" rtlCol="0" anchor="t"/>
+          <a:lstStyle/>
+          <a:p>
+            <a:pPr indent="0" marL="0">
+              <a:lnSpc>
+                <a:spcPct val="110000"/>
+              </a:lnSpc>
+              <a:buNone/>
+            </a:pPr>
+            <a:r>
+              <a:rPr lang="en-US" sz="1150" dirty="0">
+                <a:solidFill>
+                  <a:srgbClr val="F0F6FC"/>
+                </a:solidFill>
+                <a:latin typeface="Calibri" pitchFamily="34" charset="0"/>
+                <a:ea typeface="Calibri" pitchFamily="34" charset="-122"/>
+                <a:cs typeface="Calibri" pitchFamily="34" charset="-120"/>
+              </a:rPr>
+              <a:t>Reduzir o número de viciados e proteger os jovens antes da primeira aposta</a:t>
+            </a:r>
+            <a:endParaRPr lang="en-US" sz="1150" dirty="0"/>
+          </a:p>
+        </p:txBody>
+      </p:sp>
+      <p:sp>
+        <p:nvSpPr>
+          <p:cNvPr id="23" name="Shape 17"/>
+          <p:cNvSpPr/>
+          <p:nvPr/>
+        </p:nvSpPr>
+        <p:spPr>
+          <a:xfrm>
+            <a:off x="640080" y="3703320"/>
+            <a:ext cx="7863840" cy="1005840"/>
+          </a:xfrm>
+          <a:prstGeom prst="roundRect">
+            <a:avLst>
+              <a:gd name="adj" fmla="val 9091"/>
+            </a:avLst>
+          </a:prstGeom>
+          <a:solidFill>
+            <a:srgbClr val="1C2431"/>
+          </a:solidFill>
+          <a:ln/>
+        </p:spPr>
+      </p:sp>
+      <p:sp>
+        <p:nvSpPr>
+          <p:cNvPr id="24" name="Shape 18"/>
+          <p:cNvSpPr/>
+          <p:nvPr/>
+        </p:nvSpPr>
+        <p:spPr>
+          <a:xfrm>
+            <a:off x="822960" y="3950208"/>
+            <a:ext cx="502920" cy="502920"/>
+          </a:xfrm>
+          <a:prstGeom prst="ellipse">
+            <a:avLst/>
+          </a:prstGeom>
+          <a:solidFill>
+            <a:srgbClr val="161C26"/>
+          </a:solidFill>
+          <a:ln/>
+        </p:spPr>
+      </p:sp>
+      <p:pic>
+        <p:nvPicPr>
+          <p:cNvPr id="25" name="Image 4" descr="preencoded.png">    </p:cNvPr>
+          <p:cNvPicPr>
+            <a:picLocks noChangeAspect="1"/>
+          </p:cNvPicPr>
+          <p:nvPr/>
+        </p:nvPicPr>
+        <p:blipFill>
+          <a:blip r:embed="rId5"/>
+          <a:stretch>
+            <a:fillRect/>
+          </a:stretch>
+        </p:blipFill>
+        <p:spPr>
+          <a:xfrm>
+            <a:off x="953719" y="4080967"/>
+            <a:ext cx="241402" cy="241402"/>
+          </a:xfrm>
+          <a:prstGeom prst="rect">
+            <a:avLst/>
+          </a:prstGeom>
+        </p:spPr>
+      </p:pic>
+      <p:sp>
+        <p:nvSpPr>
+          <p:cNvPr id="26" name="Text 19"/>
+          <p:cNvSpPr txBox="1"/>
+          <p:nvPr/>
+        </p:nvSpPr>
+        <p:spPr>
+          <a:xfrm>
+            <a:off x="1508760" y="3794760"/>
+            <a:ext cx="6812280" cy="822960"/>
+          </a:xfrm>
+          <a:prstGeom prst="rect">
+            <a:avLst/>
+          </a:prstGeom>
+          <a:noFill/>
+          <a:ln/>
+        </p:spPr>
+        <p:txBody>
+          <a:bodyPr wrap="square" lIns="0" tIns="0" rIns="0" bIns="0" rtlCol="0" anchor="ctr"/>
+          <a:lstStyle/>
+          <a:p>
+            <a:pPr indent="0" marL="0">
+              <a:lnSpc>
+                <a:spcPct val="110000"/>
+              </a:lnSpc>
+              <a:buNone/>
+            </a:pPr>
+            <a:r>
+              <a:rPr lang="en-US" sz="1300" b="1" dirty="0">
+                <a:solidFill>
+                  <a:srgbClr val="3FB950"/>
+                </a:solidFill>
+                <a:latin typeface="Calibri" pitchFamily="34" charset="0"/>
+                <a:ea typeface="Calibri" pitchFamily="34" charset="-122"/>
+                <a:cs typeface="Calibri" pitchFamily="34" charset="-120"/>
+              </a:rPr>
+              <a:t>DETALHAMENTO: </a:t>
+            </a:r>
+            <a:pPr indent="0" marL="0">
+              <a:lnSpc>
+                <a:spcPct val="110000"/>
+              </a:lnSpc>
+              <a:buNone/>
+            </a:pPr>
+            <a:r>
+              <a:rPr lang="en-US" sz="1300" dirty="0">
+                <a:solidFill>
+                  <a:srgbClr val="F0F6FC"/>
+                </a:solidFill>
+                <a:latin typeface="Calibri" pitchFamily="34" charset="0"/>
+                <a:ea typeface="Calibri" pitchFamily="34" charset="-122"/>
+                <a:cs typeface="Calibri" pitchFamily="34" charset="-120"/>
+              </a:rPr>
+              <a:t>restringir a publicidade de bets (como já foi feito com o cigarro), criar cadastro nacional de autoexclusão e bloquear o cadastro de menores com verificação real de identidade.</a:t>
+            </a:r>
+            <a:endParaRPr lang="en-US" sz="1300" dirty="0"/>
+          </a:p>
+        </p:txBody>
+      </p:sp>
+    </p:spTree>
+  </p:cSld>
+  <p:clrMapOvr>
+    <a:masterClrMapping/>
+  </p:clrMapOvr>
+</p:sld>
+</file>
+
+<file path=ppt/slides/slide11.xml><?xml version="1.0" encoding="utf-8"?>
+<p:sld xmlns:a="http://schemas.openxmlformats.org/drawingml/2006/main" xmlns:r="http://schemas.openxmlformats.org/officeDocument/2006/relationships" xmlns:p="http://schemas.openxmlformats.org/presentationml/2006/main">
+  <p:cSld name="Slide 11">
+    <p:bg>
+      <p:bgPr>
+        <a:solidFill>
+          <a:srgbClr val="0D1117"/>
+        </a:solidFill>
+      </p:bgPr>
+    </p:bg>
+    <p:spTree>
+      <p:nvGrpSpPr>
+        <p:cNvPr id="1" name=""/>
+        <p:cNvGrpSpPr/>
+        <p:nvPr/>
+      </p:nvGrpSpPr>
+      <p:grpSpPr>
+        <a:xfrm>
+          <a:off x="0" y="0"/>
+          <a:ext cx="0" cy="0"/>
+          <a:chOff x="0" y="0"/>
+          <a:chExt cx="0" cy="0"/>
+        </a:xfrm>
+      </p:grpSpPr>
+      <p:sp>
+        <p:nvSpPr>
+          <p:cNvPr id="2" name="Shape 0"/>
+          <p:cNvSpPr/>
+          <p:nvPr/>
+        </p:nvSpPr>
+        <p:spPr>
+          <a:xfrm>
+            <a:off x="640080" y="457200"/>
+            <a:ext cx="777240" cy="777240"/>
+          </a:xfrm>
+          <a:prstGeom prst="ellipse">
+            <a:avLst/>
+          </a:prstGeom>
+          <a:solidFill>
+            <a:srgbClr val="1C2431"/>
+          </a:solidFill>
+          <a:ln/>
+        </p:spPr>
+      </p:sp>
+      <p:pic>
+        <p:nvPicPr>
+          <p:cNvPr id="3" name="Image 0" descr="preencoded.png">    </p:cNvPr>
+          <p:cNvPicPr>
+            <a:picLocks noChangeAspect="1"/>
+          </p:cNvPicPr>
+          <p:nvPr/>
+        </p:nvPicPr>
+        <p:blipFill>
+          <a:blip r:embed="rId1"/>
+          <a:stretch>
+            <a:fillRect/>
+          </a:stretch>
+        </p:blipFill>
+        <p:spPr>
+          <a:xfrm>
+            <a:off x="842162" y="659282"/>
+            <a:ext cx="373075" cy="373075"/>
+          </a:xfrm>
+          <a:prstGeom prst="rect">
+            <a:avLst/>
+          </a:prstGeom>
+        </p:spPr>
+      </p:pic>
+      <p:sp>
+        <p:nvSpPr>
+          <p:cNvPr id="4" name="Text 1"/>
+          <p:cNvSpPr txBox="1"/>
+          <p:nvPr/>
+        </p:nvSpPr>
+        <p:spPr>
+          <a:xfrm>
+            <a:off x="1645920" y="566928"/>
+            <a:ext cx="6858000" cy="594360"/>
+          </a:xfrm>
+          <a:prstGeom prst="rect">
+            <a:avLst/>
+          </a:prstGeom>
+          <a:noFill/>
+          <a:ln/>
+        </p:spPr>
+        <p:txBody>
+          <a:bodyPr wrap="square" lIns="0" tIns="0" rIns="0" bIns="0" rtlCol="0" anchor="ctr"/>
+          <a:lstStyle/>
+          <a:p>
+            <a:pPr indent="0" marL="0">
+              <a:buNone/>
+            </a:pPr>
+            <a:r>
+              <a:rPr lang="en-US" sz="2600" b="1" dirty="0">
+                <a:solidFill>
+                  <a:srgbClr val="F0F6FC"/>
+                </a:solidFill>
+                <a:latin typeface="Calibri" pitchFamily="34" charset="0"/>
+                <a:ea typeface="Calibri" pitchFamily="34" charset="-122"/>
+                <a:cs typeface="Calibri" pitchFamily="34" charset="-120"/>
+              </a:rPr>
+              <a:t>A CASA NÃO PRECISA VENCER SEMPRE</a:t>
+            </a:r>
+            <a:endParaRPr lang="en-US" sz="2600" dirty="0"/>
+          </a:p>
+        </p:txBody>
+      </p:sp>
+      <p:sp>
+        <p:nvSpPr>
+          <p:cNvPr id="5" name="Text 2"/>
+          <p:cNvSpPr txBox="1"/>
+          <p:nvPr/>
+        </p:nvSpPr>
+        <p:spPr>
+          <a:xfrm>
+            <a:off x="640080" y="1463040"/>
+            <a:ext cx="7863840" cy="1051560"/>
+          </a:xfrm>
+          <a:prstGeom prst="rect">
+            <a:avLst/>
+          </a:prstGeom>
+          <a:noFill/>
+          <a:ln/>
+        </p:spPr>
+        <p:txBody>
+          <a:bodyPr wrap="square" lIns="0" tIns="0" rIns="0" bIns="0" rtlCol="0" anchor="ctr"/>
+          <a:lstStyle/>
+          <a:p>
+            <a:pPr indent="0" marL="0">
+              <a:lnSpc>
+                <a:spcPct val="115000"/>
+              </a:lnSpc>
+              <a:buNone/>
+            </a:pPr>
+            <a:r>
+              <a:rPr lang="en-US" sz="1600" dirty="0">
+                <a:solidFill>
+                  <a:srgbClr val="F0F6FC"/>
+                </a:solidFill>
+                <a:latin typeface="Calibri" pitchFamily="34" charset="0"/>
+                <a:ea typeface="Calibri" pitchFamily="34" charset="-122"/>
+                <a:cs typeface="Calibri" pitchFamily="34" charset="-120"/>
+              </a:rPr>
+              <a:t>Vício em aposta é doença, tem tratamento gratuito no SUS/CAPS e ninguém deve enfrentar isso sozinho. Informação é a melhor aposta: por isso nosso grupo também produziu um vídeo ensinando como identificar e combater o vício em bets.</a:t>
+            </a:r>
+            <a:endParaRPr lang="en-US" sz="1600" dirty="0"/>
+          </a:p>
+        </p:txBody>
+      </p:sp>
+      <p:sp>
+        <p:nvSpPr>
+          <p:cNvPr id="6" name="Shape 3"/>
+          <p:cNvSpPr/>
+          <p:nvPr/>
+        </p:nvSpPr>
+        <p:spPr>
+          <a:xfrm>
+            <a:off x="640080" y="2651760"/>
+            <a:ext cx="3840480" cy="1051560"/>
+          </a:xfrm>
+          <a:prstGeom prst="roundRect">
+            <a:avLst>
+              <a:gd name="adj" fmla="val 8696"/>
+            </a:avLst>
+          </a:prstGeom>
+          <a:solidFill>
+            <a:srgbClr val="161C26"/>
+          </a:solidFill>
+          <a:ln/>
+        </p:spPr>
+      </p:sp>
+      <p:sp>
+        <p:nvSpPr>
+          <p:cNvPr id="7" name="Text 4"/>
+          <p:cNvSpPr txBox="1"/>
+          <p:nvPr/>
+        </p:nvSpPr>
+        <p:spPr>
+          <a:xfrm>
+            <a:off x="822960" y="2743200"/>
+            <a:ext cx="3474720" cy="868680"/>
+          </a:xfrm>
+          <a:prstGeom prst="rect">
+            <a:avLst/>
+          </a:prstGeom>
+          <a:noFill/>
+          <a:ln/>
+        </p:spPr>
+        <p:txBody>
+          <a:bodyPr wrap="square" lIns="0" tIns="0" rIns="0" bIns="0" rtlCol="0" anchor="ctr"/>
+          <a:lstStyle/>
+          <a:p>
+            <a:pPr indent="0" marL="0">
+              <a:lnSpc>
+                <a:spcPct val="110000"/>
+              </a:lnSpc>
+              <a:buNone/>
+            </a:pPr>
+            <a:r>
+              <a:rPr lang="en-US" sz="1300" b="1" dirty="0">
+                <a:solidFill>
+                  <a:srgbClr val="3FB950"/>
+                </a:solidFill>
+                <a:latin typeface="Calibri" pitchFamily="34" charset="0"/>
+                <a:ea typeface="Calibri" pitchFamily="34" charset="-122"/>
+                <a:cs typeface="Calibri" pitchFamily="34" charset="-120"/>
+              </a:rPr>
+              <a:t>ONDE BUSCAR AJUDA
+</a:t>
+            </a:r>
+            <a:pPr indent="0" marL="0">
+              <a:lnSpc>
+                <a:spcPct val="110000"/>
+              </a:lnSpc>
+              <a:buNone/>
+            </a:pPr>
+            <a:r>
+              <a:rPr lang="en-US" sz="1250" dirty="0">
+                <a:solidFill>
+                  <a:srgbClr val="F0F6FC"/>
+                </a:solidFill>
+                <a:latin typeface="Calibri" pitchFamily="34" charset="0"/>
+                <a:ea typeface="Calibri" pitchFamily="34" charset="-122"/>
+                <a:cs typeface="Calibri" pitchFamily="34" charset="-120"/>
+              </a:rPr>
+              <a:t>CAPS (SUS) • Jogadores Anônimos • CVV: ligue 188 (24h, gratuito)</a:t>
+            </a:r>
+            <a:endParaRPr lang="en-US" sz="1300" dirty="0"/>
+          </a:p>
+        </p:txBody>
+      </p:sp>
+      <p:sp>
+        <p:nvSpPr>
+          <p:cNvPr id="8" name="Shape 5"/>
+          <p:cNvSpPr/>
+          <p:nvPr/>
+        </p:nvSpPr>
+        <p:spPr>
+          <a:xfrm>
+            <a:off x="4663440" y="2651760"/>
+            <a:ext cx="3840480" cy="1051560"/>
+          </a:xfrm>
+          <a:prstGeom prst="roundRect">
+            <a:avLst>
+              <a:gd name="adj" fmla="val 8696"/>
+            </a:avLst>
+          </a:prstGeom>
+          <a:solidFill>
+            <a:srgbClr val="161C26"/>
+          </a:solidFill>
+          <a:ln/>
+        </p:spPr>
+      </p:sp>
+      <p:sp>
+        <p:nvSpPr>
+          <p:cNvPr id="9" name="Text 6"/>
+          <p:cNvSpPr txBox="1"/>
+          <p:nvPr/>
+        </p:nvSpPr>
+        <p:spPr>
+          <a:xfrm>
+            <a:off x="4846320" y="2743200"/>
+            <a:ext cx="3474720" cy="868680"/>
+          </a:xfrm>
+          <a:prstGeom prst="rect">
+            <a:avLst/>
+          </a:prstGeom>
+          <a:noFill/>
+          <a:ln/>
+        </p:spPr>
+        <p:txBody>
+          <a:bodyPr wrap="square" lIns="0" tIns="0" rIns="0" bIns="0" rtlCol="0" anchor="ctr"/>
+          <a:lstStyle/>
+          <a:p>
+            <a:pPr indent="0" marL="0">
+              <a:lnSpc>
+                <a:spcPct val="110000"/>
+              </a:lnSpc>
+              <a:buNone/>
+            </a:pPr>
+            <a:r>
+              <a:rPr lang="en-US" sz="1300" b="1" dirty="0">
+                <a:solidFill>
+                  <a:srgbClr val="F85149"/>
+                </a:solidFill>
+                <a:latin typeface="Calibri" pitchFamily="34" charset="0"/>
+                <a:ea typeface="Calibri" pitchFamily="34" charset="-122"/>
+                <a:cs typeface="Calibri" pitchFamily="34" charset="-120"/>
+              </a:rPr>
+              <a:t>SINAIS DE ALERTA
+</a:t>
+            </a:r>
+            <a:pPr indent="0" marL="0">
+              <a:lnSpc>
+                <a:spcPct val="110000"/>
+              </a:lnSpc>
+              <a:buNone/>
+            </a:pPr>
+            <a:r>
+              <a:rPr lang="en-US" sz="1250" dirty="0">
+                <a:solidFill>
+                  <a:srgbClr val="F0F6FC"/>
+                </a:solidFill>
+                <a:latin typeface="Calibri" pitchFamily="34" charset="0"/>
+                <a:ea typeface="Calibri" pitchFamily="34" charset="-122"/>
+                <a:cs typeface="Calibri" pitchFamily="34" charset="-120"/>
+              </a:rPr>
+              <a:t>Apostar escondido • apostar para recuperar perdas • usar dinheiro de contas • irritação ao tentar parar</a:t>
+            </a:r>
+            <a:endParaRPr lang="en-US" sz="1300" dirty="0"/>
+          </a:p>
+        </p:txBody>
+      </p:sp>
+      <p:sp>
+        <p:nvSpPr>
+          <p:cNvPr id="10" name="Text 7"/>
+          <p:cNvSpPr txBox="1"/>
+          <p:nvPr/>
+        </p:nvSpPr>
+        <p:spPr>
+          <a:xfrm>
+            <a:off x="640080" y="4160520"/>
+            <a:ext cx="7863840" cy="640080"/>
+          </a:xfrm>
+          <a:prstGeom prst="rect">
+            <a:avLst/>
+          </a:prstGeom>
+          <a:noFill/>
+          <a:ln/>
+        </p:spPr>
+        <p:txBody>
+          <a:bodyPr wrap="square" lIns="0" tIns="0" rIns="0" bIns="0" rtlCol="0" anchor="ctr"/>
+          <a:lstStyle/>
+          <a:p>
+            <a:pPr indent="0" marL="0">
+              <a:lnSpc>
+                <a:spcPct val="110000"/>
+              </a:lnSpc>
+              <a:buNone/>
+            </a:pPr>
+            <a:r>
+              <a:rPr lang="en-US" sz="1050" dirty="0">
+                <a:solidFill>
+                  <a:srgbClr val="9BA7B4"/>
+                </a:solidFill>
+                <a:latin typeface="Calibri" pitchFamily="34" charset="0"/>
+                <a:ea typeface="Calibri" pitchFamily="34" charset="-122"/>
+                <a:cs typeface="Calibri" pitchFamily="34" charset="-120"/>
+              </a:rPr>
+              <a:t>Fontes: Fiocruz (Radis) • Agência Brasil / Ministério da Saúde • Associação Brasileira de Psiquiatria • Banco Central • FIA Business School / Ibevar • Associação Médica Brasileira</a:t>
+            </a:r>
+            <a:endParaRPr lang="en-US" sz="1050" dirty="0"/>
           </a:p>
         </p:txBody>
       </p:sp>
@@ -3465,7 +5707,46 @@
         </p:nvSpPr>
         <p:spPr>
           <a:xfrm>
-            <a:off x="640080" y="365760"/>
+            <a:off x="640080" y="384048"/>
+            <a:ext cx="2743200" cy="365760"/>
+          </a:xfrm>
+          <a:prstGeom prst="rect">
+            <a:avLst/>
+          </a:prstGeom>
+          <a:noFill/>
+          <a:ln/>
+        </p:spPr>
+        <p:txBody>
+          <a:bodyPr wrap="square" lIns="0" tIns="0" rIns="0" bIns="0" rtlCol="0" anchor="ctr"/>
+          <a:lstStyle/>
+          <a:p>
+            <a:pPr indent="0" marL="0">
+              <a:buNone/>
+            </a:pPr>
+            <a:r>
+              <a:rPr lang="en-US" sz="1500" b="1" spc="400" kern="0" dirty="0">
+                <a:solidFill>
+                  <a:srgbClr val="E3B341"/>
+                </a:solidFill>
+                <a:latin typeface="Calibri" pitchFamily="34" charset="0"/>
+                <a:ea typeface="Calibri" pitchFamily="34" charset="-122"/>
+                <a:cs typeface="Calibri" pitchFamily="34" charset="-120"/>
+              </a:rPr>
+              <a:t>MATEMÁTICA</a:t>
+            </a:r>
+            <a:endParaRPr lang="en-US" sz="1500" dirty="0"/>
+          </a:p>
+        </p:txBody>
+      </p:sp>
+      <p:sp>
+        <p:nvSpPr>
+          <p:cNvPr id="3" name="Text 1"/>
+          <p:cNvSpPr txBox="1"/>
+          <p:nvPr/>
+        </p:nvSpPr>
+        <p:spPr>
+          <a:xfrm>
+            <a:off x="640080" y="749808"/>
             <a:ext cx="7863840" cy="548640"/>
           </a:xfrm>
           <a:prstGeom prst="rect">
@@ -3482,7 +5763,7 @@
               <a:buNone/>
             </a:pPr>
             <a:r>
-              <a:rPr lang="en-US" sz="3000" b="1" dirty="0">
+              <a:rPr lang="en-US" sz="2900" b="1" dirty="0">
                 <a:solidFill>
                   <a:srgbClr val="F0F6FC"/>
                 </a:solidFill>
@@ -3490,26 +5771,26 @@
                 <a:ea typeface="Calibri" pitchFamily="34" charset="-122"/>
                 <a:cs typeface="Calibri" pitchFamily="34" charset="-120"/>
               </a:rPr>
-              <a:t>PROPOSTA DE INTERVENÇÃO</a:t>
-            </a:r>
-            <a:endParaRPr lang="en-US" sz="3000" dirty="0"/>
-          </a:p>
-        </p:txBody>
-      </p:sp>
-      <p:sp>
-        <p:nvSpPr>
-          <p:cNvPr id="3" name="Shape 1"/>
+              <a:t>Por que a casa sempre vence</a:t>
+            </a:r>
+            <a:endParaRPr lang="en-US" sz="2900" dirty="0"/>
+          </a:p>
+        </p:txBody>
+      </p:sp>
+      <p:sp>
+        <p:nvSpPr>
+          <p:cNvPr id="4" name="Shape 2"/>
           <p:cNvSpPr/>
           <p:nvPr/>
         </p:nvSpPr>
         <p:spPr>
           <a:xfrm>
-            <a:off x="640080" y="1143000"/>
-            <a:ext cx="1938528" cy="2331720"/>
+            <a:off x="640080" y="1463040"/>
+            <a:ext cx="3246120" cy="3200400"/>
           </a:xfrm>
           <a:prstGeom prst="roundRect">
             <a:avLst>
-              <a:gd name="adj" fmla="val 4717"/>
+              <a:gd name="adj" fmla="val 3429"/>
             </a:avLst>
           </a:prstGeom>
           <a:solidFill>
@@ -3520,58 +5801,14 @@
       </p:sp>
       <p:sp>
         <p:nvSpPr>
-          <p:cNvPr id="4" name="Shape 2"/>
-          <p:cNvSpPr/>
-          <p:nvPr/>
-        </p:nvSpPr>
-        <p:spPr>
-          <a:xfrm>
-            <a:off x="804672" y="1307592"/>
-            <a:ext cx="502920" cy="502920"/>
-          </a:xfrm>
-          <a:prstGeom prst="ellipse">
-            <a:avLst/>
-          </a:prstGeom>
-          <a:solidFill>
-            <a:srgbClr val="1C2431"/>
-          </a:solidFill>
-          <a:ln/>
-        </p:spPr>
-      </p:sp>
-      <p:pic>
-        <p:nvPicPr>
-          <p:cNvPr id="5" name="Image 0" descr="preencoded.png">    </p:cNvPr>
-          <p:cNvPicPr>
-            <a:picLocks noChangeAspect="1"/>
-          </p:cNvPicPr>
-          <p:nvPr/>
-        </p:nvPicPr>
-        <p:blipFill>
-          <a:blip r:embed="rId1"/>
-          <a:stretch>
-            <a:fillRect/>
-          </a:stretch>
-        </p:blipFill>
-        <p:spPr>
-          <a:xfrm>
-            <a:off x="935431" y="1438351"/>
-            <a:ext cx="241402" cy="241402"/>
-          </a:xfrm>
-          <a:prstGeom prst="rect">
-            <a:avLst/>
-          </a:prstGeom>
-        </p:spPr>
-      </p:pic>
-      <p:sp>
-        <p:nvSpPr>
-          <p:cNvPr id="6" name="Text 3"/>
+          <p:cNvPr id="5" name="Text 3"/>
           <p:cNvSpPr txBox="1"/>
           <p:nvPr/>
         </p:nvSpPr>
         <p:spPr>
           <a:xfrm>
-            <a:off x="804672" y="1920240"/>
-            <a:ext cx="1609344" cy="320040"/>
+            <a:off x="868680" y="1691640"/>
+            <a:ext cx="2788920" cy="2788920"/>
           </a:xfrm>
           <a:prstGeom prst="rect">
             <a:avLst/>
@@ -3580,27 +5817,154 @@
           <a:ln/>
         </p:spPr>
         <p:txBody>
-          <a:bodyPr wrap="square" lIns="0" tIns="0" rIns="0" bIns="0" rtlCol="0" anchor="ctr"/>
+          <a:bodyPr wrap="square" lIns="0" tIns="0" rIns="0" bIns="0" rtlCol="0" anchor="t"/>
           <a:lstStyle/>
           <a:p>
             <a:pPr indent="0" marL="0">
-              <a:buNone/>
-            </a:pPr>
-            <a:r>
-              <a:rPr lang="en-US" sz="1400" b="1" dirty="0">
-                <a:solidFill>
-                  <a:srgbClr val="3FB950"/>
-                </a:solidFill>
-                <a:latin typeface="Calibri" pitchFamily="34" charset="0"/>
-                <a:ea typeface="Calibri" pitchFamily="34" charset="-122"/>
-                <a:cs typeface="Calibri" pitchFamily="34" charset="-120"/>
-              </a:rPr>
-              <a:t>AGENTE</a:t>
-            </a:r>
-            <a:endParaRPr lang="en-US" sz="1400" dirty="0"/>
-          </a:p>
-        </p:txBody>
-      </p:sp>
+              <a:lnSpc>
+                <a:spcPct val="112000"/>
+              </a:lnSpc>
+              <a:buNone/>
+            </a:pPr>
+            <a:r>
+              <a:rPr lang="en-US" sz="1300" b="1" dirty="0">
+                <a:solidFill>
+                  <a:srgbClr val="E3B341"/>
+                </a:solidFill>
+                <a:latin typeface="Calibri" pitchFamily="34" charset="0"/>
+                <a:ea typeface="Calibri" pitchFamily="34" charset="-122"/>
+                <a:cs typeface="Calibri" pitchFamily="34" charset="-120"/>
+              </a:rPr>
+              <a:t>VALOR ESPERADO
+</a:t>
+            </a:r>
+            <a:pPr indent="0" marL="0">
+              <a:lnSpc>
+                <a:spcPct val="112000"/>
+              </a:lnSpc>
+              <a:buNone/>
+            </a:pPr>
+            <a:r>
+              <a:rPr lang="en-US" sz="1300" dirty="0">
+                <a:solidFill>
+                  <a:srgbClr val="F0F6FC"/>
+                </a:solidFill>
+                <a:latin typeface="Calibri" pitchFamily="34" charset="0"/>
+                <a:ea typeface="Calibri" pitchFamily="34" charset="-122"/>
+                <a:cs typeface="Calibri" pitchFamily="34" charset="-120"/>
+              </a:rPr>
+              <a:t>O 'jogo do tigrinho' devolve, em média, 96,8% do que recebe (RTP divulgado).
+</a:t>
+            </a:r>
+            <a:pPr indent="0" marL="0">
+              <a:lnSpc>
+                <a:spcPct val="112000"/>
+              </a:lnSpc>
+              <a:buNone/>
+            </a:pPr>
+            <a:r>
+              <a:rPr lang="en-US" sz="1300" dirty="0">
+                <a:solidFill>
+                  <a:srgbClr val="F0F6FC"/>
+                </a:solidFill>
+                <a:latin typeface="Calibri" pitchFamily="34" charset="0"/>
+                <a:ea typeface="Calibri" pitchFamily="34" charset="-122"/>
+                <a:cs typeface="Calibri" pitchFamily="34" charset="-120"/>
+              </a:rPr>
+              <a:t>A cada R$ 100 apostados:
+</a:t>
+            </a:r>
+            <a:pPr indent="0" marL="0">
+              <a:lnSpc>
+                <a:spcPct val="112000"/>
+              </a:lnSpc>
+              <a:buNone/>
+            </a:pPr>
+            <a:r>
+              <a:rPr lang="en-US" sz="1350" b="1" dirty="0">
+                <a:solidFill>
+                  <a:srgbClr val="F0F6FC"/>
+                </a:solidFill>
+                <a:latin typeface="Calibri" pitchFamily="34" charset="0"/>
+                <a:ea typeface="Calibri" pitchFamily="34" charset="-122"/>
+                <a:cs typeface="Calibri" pitchFamily="34" charset="-120"/>
+              </a:rPr>
+              <a:t>E = 100 × 0,968 = R$ 96,80
+</a:t>
+            </a:r>
+            <a:pPr indent="0" marL="0">
+              <a:lnSpc>
+                <a:spcPct val="112000"/>
+              </a:lnSpc>
+              <a:buNone/>
+            </a:pPr>
+            <a:r>
+              <a:rPr lang="en-US" sz="1300" b="1" dirty="0">
+                <a:solidFill>
+                  <a:srgbClr val="F85149"/>
+                </a:solidFill>
+                <a:latin typeface="Calibri" pitchFamily="34" charset="0"/>
+                <a:ea typeface="Calibri" pitchFamily="34" charset="-122"/>
+                <a:cs typeface="Calibri" pitchFamily="34" charset="-120"/>
+              </a:rPr>
+              <a:t>Perda média: R$ 3,20 por rodada
+</a:t>
+            </a:r>
+            <a:pPr indent="0" marL="0">
+              <a:lnSpc>
+                <a:spcPct val="112000"/>
+              </a:lnSpc>
+              <a:buNone/>
+            </a:pPr>
+            <a:r>
+              <a:rPr lang="en-US" sz="1300" dirty="0">
+                <a:solidFill>
+                  <a:srgbClr val="F0F6FC"/>
+                </a:solidFill>
+                <a:latin typeface="Calibri" pitchFamily="34" charset="0"/>
+                <a:ea typeface="Calibri" pitchFamily="34" charset="-122"/>
+                <a:cs typeface="Calibri" pitchFamily="34" charset="-120"/>
+              </a:rPr>
+              <a:t>Reapostando tudo n vezes:
+</a:t>
+            </a:r>
+            <a:pPr indent="0" marL="0">
+              <a:lnSpc>
+                <a:spcPct val="112000"/>
+              </a:lnSpc>
+              <a:buNone/>
+            </a:pPr>
+            <a:r>
+              <a:rPr lang="en-US" sz="1500" b="1" dirty="0">
+                <a:solidFill>
+                  <a:srgbClr val="F0F6FC"/>
+                </a:solidFill>
+                <a:latin typeface="Calibri" pitchFamily="34" charset="0"/>
+                <a:ea typeface="Calibri" pitchFamily="34" charset="-122"/>
+                <a:cs typeface="Calibri" pitchFamily="34" charset="-120"/>
+              </a:rPr>
+              <a:t>E(n) = 100 × 0,968ⁿ</a:t>
+            </a:r>
+            <a:endParaRPr lang="en-US" sz="1300" dirty="0"/>
+          </a:p>
+        </p:txBody>
+      </p:sp>
+      <p:graphicFrame>
+        <p:nvGraphicFramePr>
+          <p:cNvPr id="6" name="Chart 0" descr=""/>
+          <p:cNvGraphicFramePr/>
+          <p:nvPr/>
+        </p:nvGraphicFramePr>
+        <p:xfrm>
+          <a:off x="4114800" y="1417320"/>
+          <a:ext cx="4480560" cy="3063240"/>
+        </p:xfrm>
+        <a:graphic xmlns:a="http://schemas.openxmlformats.org/drawingml/2006/main">
+          <a:graphicData uri="http://schemas.openxmlformats.org/drawingml/2006/chart">
+            <c:chart xmlns:c="http://schemas.openxmlformats.org/drawingml/2006/chart" r:id="rId1"/>
+          </a:graphicData>
+        </a:graphic>
+      </p:graphicFrame>
       <p:sp>
         <p:nvSpPr>
           <p:cNvPr id="7" name="Text 4"/>
@@ -3609,8 +5973,8 @@
         </p:nvSpPr>
         <p:spPr>
           <a:xfrm>
-            <a:off x="804672" y="2240280"/>
-            <a:ext cx="1609344" cy="1097280"/>
+            <a:off x="4114800" y="4480560"/>
+            <a:ext cx="4480560" cy="365760"/>
           </a:xfrm>
           <a:prstGeom prst="rect">
             <a:avLst/>
@@ -3619,593 +5983,24 @@
           <a:ln/>
         </p:spPr>
         <p:txBody>
-          <a:bodyPr wrap="square" lIns="0" tIns="0" rIns="0" bIns="0" rtlCol="0" anchor="t"/>
+          <a:bodyPr wrap="square" lIns="0" tIns="0" rIns="0" bIns="0" rtlCol="0" anchor="ctr"/>
           <a:lstStyle/>
           <a:p>
             <a:pPr indent="0" marL="0">
-              <a:lnSpc>
-                <a:spcPct val="110000"/>
-              </a:lnSpc>
-              <a:buNone/>
-            </a:pPr>
-            <a:r>
-              <a:rPr lang="en-US" sz="1150" dirty="0">
-                <a:solidFill>
-                  <a:srgbClr val="F0F6FC"/>
-                </a:solidFill>
-                <a:latin typeface="Calibri" pitchFamily="34" charset="0"/>
-                <a:ea typeface="Calibri" pitchFamily="34" charset="-122"/>
-                <a:cs typeface="Calibri" pitchFamily="34" charset="-120"/>
-              </a:rPr>
-              <a:t>Ministério da Saúde e escolas, em parceria com as prefeituras</a:t>
+              <a:buNone/>
+            </a:pPr>
+            <a:r>
+              <a:rPr lang="en-US" sz="1150" i="1" dirty="0">
+                <a:solidFill>
+                  <a:srgbClr val="9BA7B4"/>
+                </a:solidFill>
+                <a:latin typeface="Calibri" pitchFamily="34" charset="0"/>
+                <a:ea typeface="Calibri" pitchFamily="34" charset="-122"/>
+                <a:cs typeface="Calibri" pitchFamily="34" charset="-120"/>
+              </a:rPr>
+              <a:t>Não é azar: é uma função exponencial decrescente. Jogando o suficiente, a perda é matemática.</a:t>
             </a:r>
             <a:endParaRPr lang="en-US" sz="1150" dirty="0"/>
-          </a:p>
-        </p:txBody>
-      </p:sp>
-      <p:sp>
-        <p:nvSpPr>
-          <p:cNvPr id="8" name="Shape 5"/>
-          <p:cNvSpPr/>
-          <p:nvPr/>
-        </p:nvSpPr>
-        <p:spPr>
-          <a:xfrm>
-            <a:off x="2779776" y="1143000"/>
-            <a:ext cx="1938528" cy="2331720"/>
-          </a:xfrm>
-          <a:prstGeom prst="roundRect">
-            <a:avLst>
-              <a:gd name="adj" fmla="val 4717"/>
-            </a:avLst>
-          </a:prstGeom>
-          <a:solidFill>
-            <a:srgbClr val="161C26"/>
-          </a:solidFill>
-          <a:ln/>
-        </p:spPr>
-      </p:sp>
-      <p:sp>
-        <p:nvSpPr>
-          <p:cNvPr id="9" name="Shape 6"/>
-          <p:cNvSpPr/>
-          <p:nvPr/>
-        </p:nvSpPr>
-        <p:spPr>
-          <a:xfrm>
-            <a:off x="2944368" y="1307592"/>
-            <a:ext cx="502920" cy="502920"/>
-          </a:xfrm>
-          <a:prstGeom prst="ellipse">
-            <a:avLst/>
-          </a:prstGeom>
-          <a:solidFill>
-            <a:srgbClr val="1C2431"/>
-          </a:solidFill>
-          <a:ln/>
-        </p:spPr>
-      </p:sp>
-      <p:pic>
-        <p:nvPicPr>
-          <p:cNvPr id="10" name="Image 1" descr="preencoded.png">    </p:cNvPr>
-          <p:cNvPicPr>
-            <a:picLocks noChangeAspect="1"/>
-          </p:cNvPicPr>
-          <p:nvPr/>
-        </p:nvPicPr>
-        <p:blipFill>
-          <a:blip r:embed="rId2"/>
-          <a:stretch>
-            <a:fillRect/>
-          </a:stretch>
-        </p:blipFill>
-        <p:spPr>
-          <a:xfrm>
-            <a:off x="3075127" y="1438351"/>
-            <a:ext cx="241402" cy="241402"/>
-          </a:xfrm>
-          <a:prstGeom prst="rect">
-            <a:avLst/>
-          </a:prstGeom>
-        </p:spPr>
-      </p:pic>
-      <p:sp>
-        <p:nvSpPr>
-          <p:cNvPr id="11" name="Text 7"/>
-          <p:cNvSpPr txBox="1"/>
-          <p:nvPr/>
-        </p:nvSpPr>
-        <p:spPr>
-          <a:xfrm>
-            <a:off x="2944368" y="1920240"/>
-            <a:ext cx="1609344" cy="320040"/>
-          </a:xfrm>
-          <a:prstGeom prst="rect">
-            <a:avLst/>
-          </a:prstGeom>
-          <a:noFill/>
-          <a:ln/>
-        </p:spPr>
-        <p:txBody>
-          <a:bodyPr wrap="square" lIns="0" tIns="0" rIns="0" bIns="0" rtlCol="0" anchor="ctr"/>
-          <a:lstStyle/>
-          <a:p>
-            <a:pPr indent="0" marL="0">
-              <a:buNone/>
-            </a:pPr>
-            <a:r>
-              <a:rPr lang="en-US" sz="1400" b="1" dirty="0">
-                <a:solidFill>
-                  <a:srgbClr val="3FB950"/>
-                </a:solidFill>
-                <a:latin typeface="Calibri" pitchFamily="34" charset="0"/>
-                <a:ea typeface="Calibri" pitchFamily="34" charset="-122"/>
-                <a:cs typeface="Calibri" pitchFamily="34" charset="-120"/>
-              </a:rPr>
-              <a:t>AÇÃO</a:t>
-            </a:r>
-            <a:endParaRPr lang="en-US" sz="1400" dirty="0"/>
-          </a:p>
-        </p:txBody>
-      </p:sp>
-      <p:sp>
-        <p:nvSpPr>
-          <p:cNvPr id="12" name="Text 8"/>
-          <p:cNvSpPr txBox="1"/>
-          <p:nvPr/>
-        </p:nvSpPr>
-        <p:spPr>
-          <a:xfrm>
-            <a:off x="2944368" y="2240280"/>
-            <a:ext cx="1609344" cy="1097280"/>
-          </a:xfrm>
-          <a:prstGeom prst="rect">
-            <a:avLst/>
-          </a:prstGeom>
-          <a:noFill/>
-          <a:ln/>
-        </p:spPr>
-        <p:txBody>
-          <a:bodyPr wrap="square" lIns="0" tIns="0" rIns="0" bIns="0" rtlCol="0" anchor="t"/>
-          <a:lstStyle/>
-          <a:p>
-            <a:pPr indent="0" marL="0">
-              <a:lnSpc>
-                <a:spcPct val="110000"/>
-              </a:lnSpc>
-              <a:buNone/>
-            </a:pPr>
-            <a:r>
-              <a:rPr lang="en-US" sz="1150" dirty="0">
-                <a:solidFill>
-                  <a:srgbClr val="F0F6FC"/>
-                </a:solidFill>
-                <a:latin typeface="Calibri" pitchFamily="34" charset="0"/>
-                <a:ea typeface="Calibri" pitchFamily="34" charset="-122"/>
-                <a:cs typeface="Calibri" pitchFamily="34" charset="-120"/>
-              </a:rPr>
-              <a:t>Campanha nacional de conscientização + ampliação do tratamento gratuito nos CAPS/SUS</a:t>
-            </a:r>
-            <a:endParaRPr lang="en-US" sz="1150" dirty="0"/>
-          </a:p>
-        </p:txBody>
-      </p:sp>
-      <p:sp>
-        <p:nvSpPr>
-          <p:cNvPr id="13" name="Shape 9"/>
-          <p:cNvSpPr/>
-          <p:nvPr/>
-        </p:nvSpPr>
-        <p:spPr>
-          <a:xfrm>
-            <a:off x="4919472" y="1143000"/>
-            <a:ext cx="1938528" cy="2331720"/>
-          </a:xfrm>
-          <a:prstGeom prst="roundRect">
-            <a:avLst>
-              <a:gd name="adj" fmla="val 4717"/>
-            </a:avLst>
-          </a:prstGeom>
-          <a:solidFill>
-            <a:srgbClr val="161C26"/>
-          </a:solidFill>
-          <a:ln/>
-        </p:spPr>
-      </p:sp>
-      <p:sp>
-        <p:nvSpPr>
-          <p:cNvPr id="14" name="Shape 10"/>
-          <p:cNvSpPr/>
-          <p:nvPr/>
-        </p:nvSpPr>
-        <p:spPr>
-          <a:xfrm>
-            <a:off x="5084064" y="1307592"/>
-            <a:ext cx="502920" cy="502920"/>
-          </a:xfrm>
-          <a:prstGeom prst="ellipse">
-            <a:avLst/>
-          </a:prstGeom>
-          <a:solidFill>
-            <a:srgbClr val="1C2431"/>
-          </a:solidFill>
-          <a:ln/>
-        </p:spPr>
-      </p:sp>
-      <p:pic>
-        <p:nvPicPr>
-          <p:cNvPr id="15" name="Image 2" descr="preencoded.png">    </p:cNvPr>
-          <p:cNvPicPr>
-            <a:picLocks noChangeAspect="1"/>
-          </p:cNvPicPr>
-          <p:nvPr/>
-        </p:nvPicPr>
-        <p:blipFill>
-          <a:blip r:embed="rId3"/>
-          <a:stretch>
-            <a:fillRect/>
-          </a:stretch>
-        </p:blipFill>
-        <p:spPr>
-          <a:xfrm>
-            <a:off x="5214823" y="1438351"/>
-            <a:ext cx="241402" cy="241402"/>
-          </a:xfrm>
-          <a:prstGeom prst="rect">
-            <a:avLst/>
-          </a:prstGeom>
-        </p:spPr>
-      </p:pic>
-      <p:sp>
-        <p:nvSpPr>
-          <p:cNvPr id="16" name="Text 11"/>
-          <p:cNvSpPr txBox="1"/>
-          <p:nvPr/>
-        </p:nvSpPr>
-        <p:spPr>
-          <a:xfrm>
-            <a:off x="5084064" y="1920240"/>
-            <a:ext cx="1609344" cy="320040"/>
-          </a:xfrm>
-          <a:prstGeom prst="rect">
-            <a:avLst/>
-          </a:prstGeom>
-          <a:noFill/>
-          <a:ln/>
-        </p:spPr>
-        <p:txBody>
-          <a:bodyPr wrap="square" lIns="0" tIns="0" rIns="0" bIns="0" rtlCol="0" anchor="ctr"/>
-          <a:lstStyle/>
-          <a:p>
-            <a:pPr indent="0" marL="0">
-              <a:buNone/>
-            </a:pPr>
-            <a:r>
-              <a:rPr lang="en-US" sz="1400" b="1" dirty="0">
-                <a:solidFill>
-                  <a:srgbClr val="3FB950"/>
-                </a:solidFill>
-                <a:latin typeface="Calibri" pitchFamily="34" charset="0"/>
-                <a:ea typeface="Calibri" pitchFamily="34" charset="-122"/>
-                <a:cs typeface="Calibri" pitchFamily="34" charset="-120"/>
-              </a:rPr>
-              <a:t>MEIO</a:t>
-            </a:r>
-            <a:endParaRPr lang="en-US" sz="1400" dirty="0"/>
-          </a:p>
-        </p:txBody>
-      </p:sp>
-      <p:sp>
-        <p:nvSpPr>
-          <p:cNvPr id="17" name="Text 12"/>
-          <p:cNvSpPr txBox="1"/>
-          <p:nvPr/>
-        </p:nvSpPr>
-        <p:spPr>
-          <a:xfrm>
-            <a:off x="5084064" y="2240280"/>
-            <a:ext cx="1609344" cy="1097280"/>
-          </a:xfrm>
-          <a:prstGeom prst="rect">
-            <a:avLst/>
-          </a:prstGeom>
-          <a:noFill/>
-          <a:ln/>
-        </p:spPr>
-        <p:txBody>
-          <a:bodyPr wrap="square" lIns="0" tIns="0" rIns="0" bIns="0" rtlCol="0" anchor="t"/>
-          <a:lstStyle/>
-          <a:p>
-            <a:pPr indent="0" marL="0">
-              <a:lnSpc>
-                <a:spcPct val="110000"/>
-              </a:lnSpc>
-              <a:buNone/>
-            </a:pPr>
-            <a:r>
-              <a:rPr lang="en-US" sz="1150" dirty="0">
-                <a:solidFill>
-                  <a:srgbClr val="F0F6FC"/>
-                </a:solidFill>
-                <a:latin typeface="Calibri" pitchFamily="34" charset="0"/>
-                <a:ea typeface="Calibri" pitchFamily="34" charset="-122"/>
-                <a:cs typeface="Calibri" pitchFamily="34" charset="-120"/>
-              </a:rPr>
-              <a:t>Vídeos informativos nas redes sociais, palestras nas escolas e divulgação dos canais de ajuda</a:t>
-            </a:r>
-            <a:endParaRPr lang="en-US" sz="1150" dirty="0"/>
-          </a:p>
-        </p:txBody>
-      </p:sp>
-      <p:sp>
-        <p:nvSpPr>
-          <p:cNvPr id="18" name="Shape 13"/>
-          <p:cNvSpPr/>
-          <p:nvPr/>
-        </p:nvSpPr>
-        <p:spPr>
-          <a:xfrm>
-            <a:off x="7059168" y="1143000"/>
-            <a:ext cx="1938528" cy="2331720"/>
-          </a:xfrm>
-          <a:prstGeom prst="roundRect">
-            <a:avLst>
-              <a:gd name="adj" fmla="val 4717"/>
-            </a:avLst>
-          </a:prstGeom>
-          <a:solidFill>
-            <a:srgbClr val="161C26"/>
-          </a:solidFill>
-          <a:ln/>
-        </p:spPr>
-      </p:sp>
-      <p:sp>
-        <p:nvSpPr>
-          <p:cNvPr id="19" name="Shape 14"/>
-          <p:cNvSpPr/>
-          <p:nvPr/>
-        </p:nvSpPr>
-        <p:spPr>
-          <a:xfrm>
-            <a:off x="7223760" y="1307592"/>
-            <a:ext cx="502920" cy="502920"/>
-          </a:xfrm>
-          <a:prstGeom prst="ellipse">
-            <a:avLst/>
-          </a:prstGeom>
-          <a:solidFill>
-            <a:srgbClr val="1C2431"/>
-          </a:solidFill>
-          <a:ln/>
-        </p:spPr>
-      </p:sp>
-      <p:pic>
-        <p:nvPicPr>
-          <p:cNvPr id="20" name="Image 3" descr="preencoded.png">    </p:cNvPr>
-          <p:cNvPicPr>
-            <a:picLocks noChangeAspect="1"/>
-          </p:cNvPicPr>
-          <p:nvPr/>
-        </p:nvPicPr>
-        <p:blipFill>
-          <a:blip r:embed="rId4"/>
-          <a:stretch>
-            <a:fillRect/>
-          </a:stretch>
-        </p:blipFill>
-        <p:spPr>
-          <a:xfrm>
-            <a:off x="7354519" y="1438351"/>
-            <a:ext cx="241402" cy="241402"/>
-          </a:xfrm>
-          <a:prstGeom prst="rect">
-            <a:avLst/>
-          </a:prstGeom>
-        </p:spPr>
-      </p:pic>
-      <p:sp>
-        <p:nvSpPr>
-          <p:cNvPr id="21" name="Text 15"/>
-          <p:cNvSpPr txBox="1"/>
-          <p:nvPr/>
-        </p:nvSpPr>
-        <p:spPr>
-          <a:xfrm>
-            <a:off x="7223760" y="1920240"/>
-            <a:ext cx="1609344" cy="320040"/>
-          </a:xfrm>
-          <a:prstGeom prst="rect">
-            <a:avLst/>
-          </a:prstGeom>
-          <a:noFill/>
-          <a:ln/>
-        </p:spPr>
-        <p:txBody>
-          <a:bodyPr wrap="square" lIns="0" tIns="0" rIns="0" bIns="0" rtlCol="0" anchor="ctr"/>
-          <a:lstStyle/>
-          <a:p>
-            <a:pPr indent="0" marL="0">
-              <a:buNone/>
-            </a:pPr>
-            <a:r>
-              <a:rPr lang="en-US" sz="1400" b="1" dirty="0">
-                <a:solidFill>
-                  <a:srgbClr val="3FB950"/>
-                </a:solidFill>
-                <a:latin typeface="Calibri" pitchFamily="34" charset="0"/>
-                <a:ea typeface="Calibri" pitchFamily="34" charset="-122"/>
-                <a:cs typeface="Calibri" pitchFamily="34" charset="-120"/>
-              </a:rPr>
-              <a:t>FINALIDADE</a:t>
-            </a:r>
-            <a:endParaRPr lang="en-US" sz="1400" dirty="0"/>
-          </a:p>
-        </p:txBody>
-      </p:sp>
-      <p:sp>
-        <p:nvSpPr>
-          <p:cNvPr id="22" name="Text 16"/>
-          <p:cNvSpPr txBox="1"/>
-          <p:nvPr/>
-        </p:nvSpPr>
-        <p:spPr>
-          <a:xfrm>
-            <a:off x="7223760" y="2240280"/>
-            <a:ext cx="1609344" cy="1097280"/>
-          </a:xfrm>
-          <a:prstGeom prst="rect">
-            <a:avLst/>
-          </a:prstGeom>
-          <a:noFill/>
-          <a:ln/>
-        </p:spPr>
-        <p:txBody>
-          <a:bodyPr wrap="square" lIns="0" tIns="0" rIns="0" bIns="0" rtlCol="0" anchor="t"/>
-          <a:lstStyle/>
-          <a:p>
-            <a:pPr indent="0" marL="0">
-              <a:lnSpc>
-                <a:spcPct val="110000"/>
-              </a:lnSpc>
-              <a:buNone/>
-            </a:pPr>
-            <a:r>
-              <a:rPr lang="en-US" sz="1150" dirty="0">
-                <a:solidFill>
-                  <a:srgbClr val="F0F6FC"/>
-                </a:solidFill>
-                <a:latin typeface="Calibri" pitchFamily="34" charset="0"/>
-                <a:ea typeface="Calibri" pitchFamily="34" charset="-122"/>
-                <a:cs typeface="Calibri" pitchFamily="34" charset="-120"/>
-              </a:rPr>
-              <a:t>Reduzir o número de viciados e proteger os jovens antes da primeira aposta</a:t>
-            </a:r>
-            <a:endParaRPr lang="en-US" sz="1150" dirty="0"/>
-          </a:p>
-        </p:txBody>
-      </p:sp>
-      <p:sp>
-        <p:nvSpPr>
-          <p:cNvPr id="23" name="Shape 17"/>
-          <p:cNvSpPr/>
-          <p:nvPr/>
-        </p:nvSpPr>
-        <p:spPr>
-          <a:xfrm>
-            <a:off x="640080" y="3703320"/>
-            <a:ext cx="7863840" cy="1005840"/>
-          </a:xfrm>
-          <a:prstGeom prst="roundRect">
-            <a:avLst>
-              <a:gd name="adj" fmla="val 9091"/>
-            </a:avLst>
-          </a:prstGeom>
-          <a:solidFill>
-            <a:srgbClr val="1C2431"/>
-          </a:solidFill>
-          <a:ln/>
-        </p:spPr>
-      </p:sp>
-      <p:sp>
-        <p:nvSpPr>
-          <p:cNvPr id="24" name="Shape 18"/>
-          <p:cNvSpPr/>
-          <p:nvPr/>
-        </p:nvSpPr>
-        <p:spPr>
-          <a:xfrm>
-            <a:off x="822960" y="3950208"/>
-            <a:ext cx="502920" cy="502920"/>
-          </a:xfrm>
-          <a:prstGeom prst="ellipse">
-            <a:avLst/>
-          </a:prstGeom>
-          <a:solidFill>
-            <a:srgbClr val="161C26"/>
-          </a:solidFill>
-          <a:ln/>
-        </p:spPr>
-      </p:sp>
-      <p:pic>
-        <p:nvPicPr>
-          <p:cNvPr id="25" name="Image 4" descr="preencoded.png">    </p:cNvPr>
-          <p:cNvPicPr>
-            <a:picLocks noChangeAspect="1"/>
-          </p:cNvPicPr>
-          <p:nvPr/>
-        </p:nvPicPr>
-        <p:blipFill>
-          <a:blip r:embed="rId5"/>
-          <a:stretch>
-            <a:fillRect/>
-          </a:stretch>
-        </p:blipFill>
-        <p:spPr>
-          <a:xfrm>
-            <a:off x="953719" y="4080967"/>
-            <a:ext cx="241402" cy="241402"/>
-          </a:xfrm>
-          <a:prstGeom prst="rect">
-            <a:avLst/>
-          </a:prstGeom>
-        </p:spPr>
-      </p:pic>
-      <p:sp>
-        <p:nvSpPr>
-          <p:cNvPr id="26" name="Text 19"/>
-          <p:cNvSpPr txBox="1"/>
-          <p:nvPr/>
-        </p:nvSpPr>
-        <p:spPr>
-          <a:xfrm>
-            <a:off x="1508760" y="3794760"/>
-            <a:ext cx="6812280" cy="822960"/>
-          </a:xfrm>
-          <a:prstGeom prst="rect">
-            <a:avLst/>
-          </a:prstGeom>
-          <a:noFill/>
-          <a:ln/>
-        </p:spPr>
-        <p:txBody>
-          <a:bodyPr wrap="square" lIns="0" tIns="0" rIns="0" bIns="0" rtlCol="0" anchor="ctr"/>
-          <a:lstStyle/>
-          <a:p>
-            <a:pPr indent="0" marL="0">
-              <a:lnSpc>
-                <a:spcPct val="110000"/>
-              </a:lnSpc>
-              <a:buNone/>
-            </a:pPr>
-            <a:r>
-              <a:rPr lang="en-US" sz="1300" b="1" dirty="0">
-                <a:solidFill>
-                  <a:srgbClr val="3FB950"/>
-                </a:solidFill>
-                <a:latin typeface="Calibri" pitchFamily="34" charset="0"/>
-                <a:ea typeface="Calibri" pitchFamily="34" charset="-122"/>
-                <a:cs typeface="Calibri" pitchFamily="34" charset="-120"/>
-              </a:rPr>
-              <a:t>DETALHAMENTO: </a:t>
-            </a:r>
-            <a:pPr indent="0" marL="0">
-              <a:lnSpc>
-                <a:spcPct val="110000"/>
-              </a:lnSpc>
-              <a:buNone/>
-            </a:pPr>
-            <a:r>
-              <a:rPr lang="en-US" sz="1300" dirty="0">
-                <a:solidFill>
-                  <a:srgbClr val="F0F6FC"/>
-                </a:solidFill>
-                <a:latin typeface="Calibri" pitchFamily="34" charset="0"/>
-                <a:ea typeface="Calibri" pitchFamily="34" charset="-122"/>
-                <a:cs typeface="Calibri" pitchFamily="34" charset="-120"/>
-              </a:rPr>
-              <a:t>restringir a publicidade de bets (como já foi feito com o cigarro), criar cadastro nacional de autoexclusão e bloquear o cadastro de menores com verificação real de identidade.</a:t>
-            </a:r>
-            <a:endParaRPr lang="en-US" sz="1300" dirty="0"/>
           </a:p>
         </p:txBody>
       </p:sp>
@@ -4243,14 +6038,373 @@
       </p:grpSpPr>
       <p:sp>
         <p:nvSpPr>
-          <p:cNvPr id="2" name="Shape 0"/>
+          <p:cNvPr id="2" name="Text 0"/>
+          <p:cNvSpPr txBox="1"/>
+          <p:nvPr/>
+        </p:nvSpPr>
+        <p:spPr>
+          <a:xfrm>
+            <a:off x="640080" y="384048"/>
+            <a:ext cx="2743200" cy="365760"/>
+          </a:xfrm>
+          <a:prstGeom prst="rect">
+            <a:avLst/>
+          </a:prstGeom>
+          <a:noFill/>
+          <a:ln/>
+        </p:spPr>
+        <p:txBody>
+          <a:bodyPr wrap="square" lIns="0" tIns="0" rIns="0" bIns="0" rtlCol="0" anchor="ctr"/>
+          <a:lstStyle/>
+          <a:p>
+            <a:pPr indent="0" marL="0">
+              <a:buNone/>
+            </a:pPr>
+            <a:r>
+              <a:rPr lang="en-US" sz="1500" b="1" spc="400" kern="0" dirty="0">
+                <a:solidFill>
+                  <a:srgbClr val="E3B341"/>
+                </a:solidFill>
+                <a:latin typeface="Calibri" pitchFamily="34" charset="0"/>
+                <a:ea typeface="Calibri" pitchFamily="34" charset="-122"/>
+                <a:cs typeface="Calibri" pitchFamily="34" charset="-120"/>
+              </a:rPr>
+              <a:t>MATEMÁTICA</a:t>
+            </a:r>
+            <a:endParaRPr lang="en-US" sz="1500" dirty="0"/>
+          </a:p>
+        </p:txBody>
+      </p:sp>
+      <p:sp>
+        <p:nvSpPr>
+          <p:cNvPr id="3" name="Text 1"/>
+          <p:cNvSpPr txBox="1"/>
+          <p:nvPr/>
+        </p:nvSpPr>
+        <p:spPr>
+          <a:xfrm>
+            <a:off x="640080" y="749808"/>
+            <a:ext cx="7863840" cy="548640"/>
+          </a:xfrm>
+          <a:prstGeom prst="rect">
+            <a:avLst/>
+          </a:prstGeom>
+          <a:noFill/>
+          <a:ln/>
+        </p:spPr>
+        <p:txBody>
+          <a:bodyPr wrap="square" lIns="0" tIns="0" rIns="0" bIns="0" rtlCol="0" anchor="ctr"/>
+          <a:lstStyle/>
+          <a:p>
+            <a:pPr indent="0" marL="0">
+              <a:buNone/>
+            </a:pPr>
+            <a:r>
+              <a:rPr lang="en-US" sz="2900" b="1" dirty="0">
+                <a:solidFill>
+                  <a:srgbClr val="F0F6FC"/>
+                </a:solidFill>
+                <a:latin typeface="Calibri" pitchFamily="34" charset="0"/>
+                <a:ea typeface="Calibri" pitchFamily="34" charset="-122"/>
+                <a:cs typeface="Calibri" pitchFamily="34" charset="-120"/>
+              </a:rPr>
+              <a:t>O vício em números</a:t>
+            </a:r>
+            <a:endParaRPr lang="en-US" sz="2900" dirty="0"/>
+          </a:p>
+        </p:txBody>
+      </p:sp>
+      <p:graphicFrame>
+        <p:nvGraphicFramePr>
+          <p:cNvPr id="4" name="Chart 0" descr=""/>
+          <p:cNvGraphicFramePr/>
+          <p:nvPr/>
+        </p:nvGraphicFramePr>
+        <p:xfrm>
+          <a:off x="502920" y="1463040"/>
+          <a:ext cx="5212080" cy="2834640"/>
+        </p:xfrm>
+        <a:graphic xmlns:a="http://schemas.openxmlformats.org/drawingml/2006/main">
+          <a:graphicData uri="http://schemas.openxmlformats.org/drawingml/2006/chart">
+            <c:chart xmlns:c="http://schemas.openxmlformats.org/drawingml/2006/chart" r:id="rId1"/>
+          </a:graphicData>
+        </a:graphic>
+      </p:graphicFrame>
+      <p:sp>
+        <p:nvSpPr>
+          <p:cNvPr id="5" name="Text 2"/>
+          <p:cNvSpPr txBox="1"/>
+          <p:nvPr/>
+        </p:nvSpPr>
+        <p:spPr>
+          <a:xfrm>
+            <a:off x="640080" y="4343400"/>
+            <a:ext cx="5029200" cy="320040"/>
+          </a:xfrm>
+          <a:prstGeom prst="rect">
+            <a:avLst/>
+          </a:prstGeom>
+          <a:noFill/>
+          <a:ln/>
+        </p:spPr>
+        <p:txBody>
+          <a:bodyPr wrap="square" lIns="0" tIns="0" rIns="0" bIns="0" rtlCol="0" anchor="ctr"/>
+          <a:lstStyle/>
+          <a:p>
+            <a:pPr indent="0" marL="0">
+              <a:buNone/>
+            </a:pPr>
+            <a:r>
+              <a:rPr lang="en-US" sz="1000" dirty="0">
+                <a:solidFill>
+                  <a:srgbClr val="9BA7B4"/>
+                </a:solidFill>
+                <a:latin typeface="Calibri" pitchFamily="34" charset="0"/>
+                <a:ea typeface="Calibri" pitchFamily="34" charset="-122"/>
+                <a:cs typeface="Calibri" pitchFamily="34" charset="-120"/>
+              </a:rPr>
+              <a:t>Fontes: FIA Business School / Ibevar (2025)</a:t>
+            </a:r>
+            <a:endParaRPr lang="en-US" sz="1000" dirty="0"/>
+          </a:p>
+        </p:txBody>
+      </p:sp>
+      <p:graphicFrame>
+        <p:nvGraphicFramePr>
+          <p:cNvPr id="6" name="Chart 1" descr=""/>
+          <p:cNvGraphicFramePr/>
+          <p:nvPr/>
+        </p:nvGraphicFramePr>
+        <p:xfrm>
+          <a:off x="5943600" y="1417320"/>
+          <a:ext cx="2651760" cy="2651760"/>
+        </p:xfrm>
+        <a:graphic xmlns:a="http://schemas.openxmlformats.org/drawingml/2006/main">
+          <a:graphicData uri="http://schemas.openxmlformats.org/drawingml/2006/chart">
+            <c:chart xmlns:c="http://schemas.openxmlformats.org/drawingml/2006/chart" r:id="rId2"/>
+          </a:graphicData>
+        </a:graphic>
+      </p:graphicFrame>
+      <p:sp>
+        <p:nvSpPr>
+          <p:cNvPr id="7" name="Text 3"/>
+          <p:cNvSpPr txBox="1"/>
+          <p:nvPr/>
+        </p:nvSpPr>
+        <p:spPr>
+          <a:xfrm>
+            <a:off x="5943600" y="2377440"/>
+            <a:ext cx="2651760" cy="640080"/>
+          </a:xfrm>
+          <a:prstGeom prst="rect">
+            <a:avLst/>
+          </a:prstGeom>
+          <a:noFill/>
+          <a:ln/>
+        </p:spPr>
+        <p:txBody>
+          <a:bodyPr wrap="square" lIns="0" tIns="0" rIns="0" bIns="0" rtlCol="0" anchor="ctr"/>
+          <a:lstStyle/>
+          <a:p>
+            <a:pPr algn="ctr" indent="0" marL="0">
+              <a:buNone/>
+            </a:pPr>
+            <a:r>
+              <a:rPr lang="en-US" sz="3000" b="1" dirty="0">
+                <a:solidFill>
+                  <a:srgbClr val="F85149"/>
+                </a:solidFill>
+                <a:latin typeface="Calibri" pitchFamily="34" charset="0"/>
+                <a:ea typeface="Calibri" pitchFamily="34" charset="-122"/>
+                <a:cs typeface="Calibri" pitchFamily="34" charset="-120"/>
+              </a:rPr>
+              <a:t>10,5%</a:t>
+            </a:r>
+            <a:endParaRPr lang="en-US" sz="3000" dirty="0"/>
+          </a:p>
+        </p:txBody>
+      </p:sp>
+      <p:sp>
+        <p:nvSpPr>
+          <p:cNvPr id="8" name="Text 4"/>
+          <p:cNvSpPr txBox="1"/>
+          <p:nvPr/>
+        </p:nvSpPr>
+        <p:spPr>
+          <a:xfrm>
+            <a:off x="5806440" y="4114800"/>
+            <a:ext cx="2926080" cy="777240"/>
+          </a:xfrm>
+          <a:prstGeom prst="rect">
+            <a:avLst/>
+          </a:prstGeom>
+          <a:noFill/>
+          <a:ln/>
+        </p:spPr>
+        <p:txBody>
+          <a:bodyPr wrap="square" lIns="0" tIns="0" rIns="0" bIns="0" rtlCol="0" anchor="t"/>
+          <a:lstStyle/>
+          <a:p>
+            <a:pPr algn="ctr" indent="0" marL="0">
+              <a:buNone/>
+            </a:pPr>
+            <a:r>
+              <a:rPr lang="en-US" sz="1100" dirty="0">
+                <a:solidFill>
+                  <a:srgbClr val="9BA7B4"/>
+                </a:solidFill>
+                <a:latin typeface="Calibri" pitchFamily="34" charset="0"/>
+                <a:ea typeface="Calibri" pitchFamily="34" charset="-122"/>
+                <a:cs typeface="Calibri" pitchFamily="34" charset="-120"/>
+              </a:rPr>
+              <a:t>dos adolescentes de 14 a 17 anos apostaram no último ano — mesmo sendo proibido (Fiocruz)</a:t>
+            </a:r>
+            <a:endParaRPr lang="en-US" sz="1100" dirty="0"/>
+          </a:p>
+        </p:txBody>
+      </p:sp>
+    </p:spTree>
+  </p:cSld>
+  <p:clrMapOvr>
+    <a:masterClrMapping/>
+  </p:clrMapOvr>
+</p:sld>
+</file>
+
+<file path=ppt/slides/slide9.xml><?xml version="1.0" encoding="utf-8"?>
+<p:sld xmlns:a="http://schemas.openxmlformats.org/drawingml/2006/main" xmlns:r="http://schemas.openxmlformats.org/officeDocument/2006/relationships" xmlns:p="http://schemas.openxmlformats.org/presentationml/2006/main">
+  <p:cSld name="Slide 9">
+    <p:bg>
+      <p:bgPr>
+        <a:solidFill>
+          <a:srgbClr val="0D1117"/>
+        </a:solidFill>
+      </p:bgPr>
+    </p:bg>
+    <p:spTree>
+      <p:nvGrpSpPr>
+        <p:cNvPr id="1" name=""/>
+        <p:cNvGrpSpPr/>
+        <p:nvPr/>
+      </p:nvGrpSpPr>
+      <p:grpSpPr>
+        <a:xfrm>
+          <a:off x="0" y="0"/>
+          <a:ext cx="0" cy="0"/>
+          <a:chOff x="0" y="0"/>
+          <a:chExt cx="0" cy="0"/>
+        </a:xfrm>
+      </p:grpSpPr>
+      <p:sp>
+        <p:nvSpPr>
+          <p:cNvPr id="2" name="Text 0"/>
+          <p:cNvSpPr txBox="1"/>
+          <p:nvPr/>
+        </p:nvSpPr>
+        <p:spPr>
+          <a:xfrm>
+            <a:off x="640080" y="384048"/>
+            <a:ext cx="2743200" cy="365760"/>
+          </a:xfrm>
+          <a:prstGeom prst="rect">
+            <a:avLst/>
+          </a:prstGeom>
+          <a:noFill/>
+          <a:ln/>
+        </p:spPr>
+        <p:txBody>
+          <a:bodyPr wrap="square" lIns="0" tIns="0" rIns="0" bIns="0" rtlCol="0" anchor="ctr"/>
+          <a:lstStyle/>
+          <a:p>
+            <a:pPr indent="0" marL="0">
+              <a:buNone/>
+            </a:pPr>
+            <a:r>
+              <a:rPr lang="en-US" sz="1500" b="1" spc="400" kern="0" dirty="0">
+                <a:solidFill>
+                  <a:srgbClr val="F85149"/>
+                </a:solidFill>
+                <a:latin typeface="Calibri" pitchFamily="34" charset="0"/>
+                <a:ea typeface="Calibri" pitchFamily="34" charset="-122"/>
+                <a:cs typeface="Calibri" pitchFamily="34" charset="-120"/>
+              </a:rPr>
+              <a:t>BIOLOGIA</a:t>
+            </a:r>
+            <a:endParaRPr lang="en-US" sz="1500" dirty="0"/>
+          </a:p>
+        </p:txBody>
+      </p:sp>
+      <p:sp>
+        <p:nvSpPr>
+          <p:cNvPr id="3" name="Text 1"/>
+          <p:cNvSpPr txBox="1"/>
+          <p:nvPr/>
+        </p:nvSpPr>
+        <p:spPr>
+          <a:xfrm>
+            <a:off x="640080" y="749808"/>
+            <a:ext cx="7863840" cy="548640"/>
+          </a:xfrm>
+          <a:prstGeom prst="rect">
+            <a:avLst/>
+          </a:prstGeom>
+          <a:noFill/>
+          <a:ln/>
+        </p:spPr>
+        <p:txBody>
+          <a:bodyPr wrap="square" lIns="0" tIns="0" rIns="0" bIns="0" rtlCol="0" anchor="ctr"/>
+          <a:lstStyle/>
+          <a:p>
+            <a:pPr indent="0" marL="0">
+              <a:buNone/>
+            </a:pPr>
+            <a:r>
+              <a:rPr lang="en-US" sz="2900" b="1" dirty="0">
+                <a:solidFill>
+                  <a:srgbClr val="F0F6FC"/>
+                </a:solidFill>
+                <a:latin typeface="Calibri" pitchFamily="34" charset="0"/>
+                <a:ea typeface="Calibri" pitchFamily="34" charset="-122"/>
+                <a:cs typeface="Calibri" pitchFamily="34" charset="-120"/>
+              </a:rPr>
+              <a:t>O que a aposta faz no cérebro</a:t>
+            </a:r>
+            <a:endParaRPr lang="en-US" sz="2900" dirty="0"/>
+          </a:p>
+        </p:txBody>
+      </p:sp>
+      <p:sp>
+        <p:nvSpPr>
+          <p:cNvPr id="4" name="Shape 2"/>
           <p:cNvSpPr/>
           <p:nvPr/>
         </p:nvSpPr>
         <p:spPr>
           <a:xfrm>
-            <a:off x="640080" y="457200"/>
-            <a:ext cx="777240" cy="777240"/>
+            <a:off x="640080" y="1463040"/>
+            <a:ext cx="7863840" cy="987552"/>
+          </a:xfrm>
+          <a:prstGeom prst="roundRect">
+            <a:avLst>
+              <a:gd name="adj" fmla="val 9259"/>
+            </a:avLst>
+          </a:prstGeom>
+          <a:solidFill>
+            <a:srgbClr val="161C26"/>
+          </a:solidFill>
+          <a:ln/>
+        </p:spPr>
+      </p:sp>
+      <p:sp>
+        <p:nvSpPr>
+          <p:cNvPr id="5" name="Shape 3"/>
+          <p:cNvSpPr/>
+          <p:nvPr/>
+        </p:nvSpPr>
+        <p:spPr>
+          <a:xfrm>
+            <a:off x="804672" y="1700784"/>
+            <a:ext cx="512064" cy="512064"/>
           </a:xfrm>
           <a:prstGeom prst="ellipse">
             <a:avLst/>
@@ -4263,7 +6417,7 @@
       </p:sp>
       <p:pic>
         <p:nvPicPr>
-          <p:cNvPr id="3" name="Image 0" descr="preencoded.png">    </p:cNvPr>
+          <p:cNvPr id="6" name="Image 0" descr="preencoded.png">    </p:cNvPr>
           <p:cNvPicPr>
             <a:picLocks noChangeAspect="1"/>
           </p:cNvPicPr>
@@ -4277,8 +6431,8 @@
         </p:blipFill>
         <p:spPr>
           <a:xfrm>
-            <a:off x="842162" y="659282"/>
-            <a:ext cx="373075" cy="373075"/>
+            <a:off x="937809" y="1833921"/>
+            <a:ext cx="245791" cy="245791"/>
           </a:xfrm>
           <a:prstGeom prst="rect">
             <a:avLst/>
@@ -4287,53 +6441,14 @@
       </p:pic>
       <p:sp>
         <p:nvSpPr>
-          <p:cNvPr id="4" name="Text 1"/>
+          <p:cNvPr id="7" name="Text 4"/>
           <p:cNvSpPr txBox="1"/>
           <p:nvPr/>
         </p:nvSpPr>
         <p:spPr>
           <a:xfrm>
-            <a:off x="1645920" y="566928"/>
-            <a:ext cx="6858000" cy="594360"/>
-          </a:xfrm>
-          <a:prstGeom prst="rect">
-            <a:avLst/>
-          </a:prstGeom>
-          <a:noFill/>
-          <a:ln/>
-        </p:spPr>
-        <p:txBody>
-          <a:bodyPr wrap="square" lIns="0" tIns="0" rIns="0" bIns="0" rtlCol="0" anchor="ctr"/>
-          <a:lstStyle/>
-          <a:p>
-            <a:pPr indent="0" marL="0">
-              <a:buNone/>
-            </a:pPr>
-            <a:r>
-              <a:rPr lang="en-US" sz="2600" b="1" dirty="0">
-                <a:solidFill>
-                  <a:srgbClr val="F0F6FC"/>
-                </a:solidFill>
-                <a:latin typeface="Calibri" pitchFamily="34" charset="0"/>
-                <a:ea typeface="Calibri" pitchFamily="34" charset="-122"/>
-                <a:cs typeface="Calibri" pitchFamily="34" charset="-120"/>
-              </a:rPr>
-              <a:t>A CASA NÃO PRECISA VENCER SEMPRE</a:t>
-            </a:r>
-            <a:endParaRPr lang="en-US" sz="2600" dirty="0"/>
-          </a:p>
-        </p:txBody>
-      </p:sp>
-      <p:sp>
-        <p:nvSpPr>
-          <p:cNvPr id="5" name="Text 2"/>
-          <p:cNvSpPr txBox="1"/>
-          <p:nvPr/>
-        </p:nvSpPr>
-        <p:spPr>
-          <a:xfrm>
-            <a:off x="640080" y="1463040"/>
-            <a:ext cx="7863840" cy="1051560"/>
+            <a:off x="1481328" y="1536192"/>
+            <a:ext cx="6858000" cy="868680"/>
           </a:xfrm>
           <a:prstGeom prst="rect">
             <a:avLst/>
@@ -4347,12 +6462,30 @@
           <a:p>
             <a:pPr indent="0" marL="0">
               <a:lnSpc>
-                <a:spcPct val="115000"/>
+                <a:spcPct val="105000"/>
               </a:lnSpc>
               <a:buNone/>
             </a:pPr>
             <a:r>
-              <a:rPr lang="en-US" sz="1600" dirty="0">
+              <a:rPr lang="en-US" sz="1250" b="1" dirty="0">
+                <a:solidFill>
+                  <a:srgbClr val="F85149"/>
+                </a:solidFill>
+                <a:latin typeface="Calibri" pitchFamily="34" charset="0"/>
+                <a:ea typeface="Calibri" pitchFamily="34" charset="-122"/>
+                <a:cs typeface="Calibri" pitchFamily="34" charset="-120"/>
+              </a:rPr>
+              <a:t>Dopamina e o circuito de recompensa
+</a:t>
+            </a:r>
+            <a:pPr indent="0" marL="0">
+              <a:lnSpc>
+                <a:spcPct val="105000"/>
+              </a:lnSpc>
+              <a:buNone/>
+            </a:pPr>
+            <a:r>
+              <a:rPr lang="en-US" sz="1100" dirty="0">
                 <a:solidFill>
                   <a:srgbClr val="F0F6FC"/>
                 </a:solidFill>
@@ -4360,26 +6493,26 @@
                 <a:ea typeface="Calibri" pitchFamily="34" charset="-122"/>
                 <a:cs typeface="Calibri" pitchFamily="34" charset="-120"/>
               </a:rPr>
-              <a:t>Vício em aposta é doença, tem tratamento gratuito no SUS/CAPS e ninguém deve enfrentar isso sozinho. Informação é a melhor aposta: por isso nosso grupo também produziu um vídeo ensinando como identificar e combater o vício em bets.</a:t>
-            </a:r>
-            <a:endParaRPr lang="en-US" sz="1600" dirty="0"/>
-          </a:p>
-        </p:txBody>
-      </p:sp>
-      <p:sp>
-        <p:nvSpPr>
-          <p:cNvPr id="6" name="Shape 3"/>
+              <a:t>Cada aposta libera dopamina no sistema de recompensa (núcleo accumbens). Recompensa IMPREVISÍVEL libera mais dopamina do que recompensa certa — por isso o 'quase ganhei' vicia tanto quanto ganhar.</a:t>
+            </a:r>
+            <a:endParaRPr lang="en-US" sz="1250" dirty="0"/>
+          </a:p>
+        </p:txBody>
+      </p:sp>
+      <p:sp>
+        <p:nvSpPr>
+          <p:cNvPr id="8" name="Shape 5"/>
           <p:cNvSpPr/>
           <p:nvPr/>
         </p:nvSpPr>
         <p:spPr>
           <a:xfrm>
-            <a:off x="640080" y="2651760"/>
-            <a:ext cx="3840480" cy="1051560"/>
+            <a:off x="640080" y="2578608"/>
+            <a:ext cx="7863840" cy="987552"/>
           </a:xfrm>
           <a:prstGeom prst="roundRect">
             <a:avLst>
-              <a:gd name="adj" fmla="val 8696"/>
+              <a:gd name="adj" fmla="val 9259"/>
             </a:avLst>
           </a:prstGeom>
           <a:solidFill>
@@ -4390,14 +6523,58 @@
       </p:sp>
       <p:sp>
         <p:nvSpPr>
-          <p:cNvPr id="7" name="Text 4"/>
+          <p:cNvPr id="9" name="Shape 6"/>
+          <p:cNvSpPr/>
+          <p:nvPr/>
+        </p:nvSpPr>
+        <p:spPr>
+          <a:xfrm>
+            <a:off x="804672" y="2816352"/>
+            <a:ext cx="512064" cy="512064"/>
+          </a:xfrm>
+          <a:prstGeom prst="ellipse">
+            <a:avLst/>
+          </a:prstGeom>
+          <a:solidFill>
+            <a:srgbClr val="1C2431"/>
+          </a:solidFill>
+          <a:ln/>
+        </p:spPr>
+      </p:sp>
+      <p:pic>
+        <p:nvPicPr>
+          <p:cNvPr id="10" name="Image 1" descr="preencoded.png">    </p:cNvPr>
+          <p:cNvPicPr>
+            <a:picLocks noChangeAspect="1"/>
+          </p:cNvPicPr>
+          <p:nvPr/>
+        </p:nvPicPr>
+        <p:blipFill>
+          <a:blip r:embed="rId2"/>
+          <a:stretch>
+            <a:fillRect/>
+          </a:stretch>
+        </p:blipFill>
+        <p:spPr>
+          <a:xfrm>
+            <a:off x="937809" y="2949489"/>
+            <a:ext cx="245791" cy="245791"/>
+          </a:xfrm>
+          <a:prstGeom prst="rect">
+            <a:avLst/>
+          </a:prstGeom>
+        </p:spPr>
+      </p:pic>
+      <p:sp>
+        <p:nvSpPr>
+          <p:cNvPr id="11" name="Text 7"/>
           <p:cNvSpPr txBox="1"/>
           <p:nvPr/>
         </p:nvSpPr>
         <p:spPr>
           <a:xfrm>
-            <a:off x="822960" y="2743200"/>
-            <a:ext cx="3474720" cy="868680"/>
+            <a:off x="1481328" y="2651760"/>
+            <a:ext cx="6858000" cy="868680"/>
           </a:xfrm>
           <a:prstGeom prst="rect">
             <a:avLst/>
@@ -4411,30 +6588,30 @@
           <a:p>
             <a:pPr indent="0" marL="0">
               <a:lnSpc>
-                <a:spcPct val="110000"/>
+                <a:spcPct val="105000"/>
               </a:lnSpc>
               <a:buNone/>
             </a:pPr>
             <a:r>
-              <a:rPr lang="en-US" sz="1300" b="1" dirty="0">
-                <a:solidFill>
-                  <a:srgbClr val="3FB950"/>
-                </a:solidFill>
-                <a:latin typeface="Calibri" pitchFamily="34" charset="0"/>
-                <a:ea typeface="Calibri" pitchFamily="34" charset="-122"/>
-                <a:cs typeface="Calibri" pitchFamily="34" charset="-120"/>
-              </a:rPr>
-              <a:t>ONDE BUSCAR AJUDA
+              <a:rPr lang="en-US" sz="1250" b="1" dirty="0">
+                <a:solidFill>
+                  <a:srgbClr val="F85149"/>
+                </a:solidFill>
+                <a:latin typeface="Calibri" pitchFamily="34" charset="0"/>
+                <a:ea typeface="Calibri" pitchFamily="34" charset="-122"/>
+                <a:cs typeface="Calibri" pitchFamily="34" charset="-120"/>
+              </a:rPr>
+              <a:t>Tolerância: o mesmo mecanismo das drogas
 </a:t>
             </a:r>
             <a:pPr indent="0" marL="0">
               <a:lnSpc>
-                <a:spcPct val="110000"/>
+                <a:spcPct val="105000"/>
               </a:lnSpc>
               <a:buNone/>
             </a:pPr>
             <a:r>
-              <a:rPr lang="en-US" sz="1250" dirty="0">
+              <a:rPr lang="en-US" sz="1100" dirty="0">
                 <a:solidFill>
                   <a:srgbClr val="F0F6FC"/>
                 </a:solidFill>
@@ -4442,26 +6619,26 @@
                 <a:ea typeface="Calibri" pitchFamily="34" charset="-122"/>
                 <a:cs typeface="Calibri" pitchFamily="34" charset="-120"/>
               </a:rPr>
-              <a:t>CAPS (SUS) • Jogadores Anônimos • CVV: ligue 188 (24h, gratuito)</a:t>
-            </a:r>
-            <a:endParaRPr lang="en-US" sz="1300" dirty="0"/>
-          </a:p>
-        </p:txBody>
-      </p:sp>
-      <p:sp>
-        <p:nvSpPr>
-          <p:cNvPr id="8" name="Shape 5"/>
+              <a:t>Com a repetição, o cérebro reduz a sensibilidade dos receptores de dopamina. Resultado: é preciso apostar mais, e mais alto, para sentir o mesmo prazer — a definição biológica de dependência (CID-11, OMS).</a:t>
+            </a:r>
+            <a:endParaRPr lang="en-US" sz="1250" dirty="0"/>
+          </a:p>
+        </p:txBody>
+      </p:sp>
+      <p:sp>
+        <p:nvSpPr>
+          <p:cNvPr id="12" name="Shape 8"/>
           <p:cNvSpPr/>
           <p:nvPr/>
         </p:nvSpPr>
         <p:spPr>
           <a:xfrm>
-            <a:off x="4663440" y="2651760"/>
-            <a:ext cx="3840480" cy="1051560"/>
+            <a:off x="640080" y="3694176"/>
+            <a:ext cx="7863840" cy="987552"/>
           </a:xfrm>
           <a:prstGeom prst="roundRect">
             <a:avLst>
-              <a:gd name="adj" fmla="val 8696"/>
+              <a:gd name="adj" fmla="val 9259"/>
             </a:avLst>
           </a:prstGeom>
           <a:solidFill>
@@ -4472,14 +6649,58 @@
       </p:sp>
       <p:sp>
         <p:nvSpPr>
-          <p:cNvPr id="9" name="Text 6"/>
+          <p:cNvPr id="13" name="Shape 9"/>
+          <p:cNvSpPr/>
+          <p:nvPr/>
+        </p:nvSpPr>
+        <p:spPr>
+          <a:xfrm>
+            <a:off x="804672" y="3931920"/>
+            <a:ext cx="512064" cy="512064"/>
+          </a:xfrm>
+          <a:prstGeom prst="ellipse">
+            <a:avLst/>
+          </a:prstGeom>
+          <a:solidFill>
+            <a:srgbClr val="1C2431"/>
+          </a:solidFill>
+          <a:ln/>
+        </p:spPr>
+      </p:sp>
+      <p:pic>
+        <p:nvPicPr>
+          <p:cNvPr id="14" name="Image 2" descr="preencoded.png">    </p:cNvPr>
+          <p:cNvPicPr>
+            <a:picLocks noChangeAspect="1"/>
+          </p:cNvPicPr>
+          <p:nvPr/>
+        </p:nvPicPr>
+        <p:blipFill>
+          <a:blip r:embed="rId3"/>
+          <a:stretch>
+            <a:fillRect/>
+          </a:stretch>
+        </p:blipFill>
+        <p:spPr>
+          <a:xfrm>
+            <a:off x="937809" y="4065057"/>
+            <a:ext cx="245791" cy="245791"/>
+          </a:xfrm>
+          <a:prstGeom prst="rect">
+            <a:avLst/>
+          </a:prstGeom>
+        </p:spPr>
+      </p:pic>
+      <p:sp>
+        <p:nvSpPr>
+          <p:cNvPr id="15" name="Text 10"/>
           <p:cNvSpPr txBox="1"/>
           <p:nvPr/>
         </p:nvSpPr>
         <p:spPr>
           <a:xfrm>
-            <a:off x="4846320" y="2743200"/>
-            <a:ext cx="3474720" cy="868680"/>
+            <a:off x="1481328" y="3767328"/>
+            <a:ext cx="6858000" cy="868680"/>
           </a:xfrm>
           <a:prstGeom prst="rect">
             <a:avLst/>
@@ -4493,12 +6714,12 @@
           <a:p>
             <a:pPr indent="0" marL="0">
               <a:lnSpc>
-                <a:spcPct val="110000"/>
+                <a:spcPct val="105000"/>
               </a:lnSpc>
               <a:buNone/>
             </a:pPr>
             <a:r>
-              <a:rPr lang="en-US" sz="1300" b="1" dirty="0">
+              <a:rPr lang="en-US" sz="1250" b="1" dirty="0">
                 <a:solidFill>
                   <a:srgbClr val="F85149"/>
                 </a:solidFill>
@@ -4506,17 +6727,17 @@
                 <a:ea typeface="Calibri" pitchFamily="34" charset="-122"/>
                 <a:cs typeface="Calibri" pitchFamily="34" charset="-120"/>
               </a:rPr>
-              <a:t>SINAIS DE ALERTA
+              <a:t>Por que o adolescente é mais vulnerável
 </a:t>
             </a:r>
             <a:pPr indent="0" marL="0">
               <a:lnSpc>
-                <a:spcPct val="110000"/>
+                <a:spcPct val="105000"/>
               </a:lnSpc>
               <a:buNone/>
             </a:pPr>
             <a:r>
-              <a:rPr lang="en-US" sz="1250" dirty="0">
+              <a:rPr lang="en-US" sz="1100" dirty="0">
                 <a:solidFill>
                   <a:srgbClr val="F0F6FC"/>
                 </a:solidFill>
@@ -4524,51 +6745,9 @@
                 <a:ea typeface="Calibri" pitchFamily="34" charset="-122"/>
                 <a:cs typeface="Calibri" pitchFamily="34" charset="-120"/>
               </a:rPr>
-              <a:t>Apostar escondido • apostar para recuperar perdas • usar dinheiro de contas • irritação ao tentar parar</a:t>
-            </a:r>
-            <a:endParaRPr lang="en-US" sz="1300" dirty="0"/>
-          </a:p>
-        </p:txBody>
-      </p:sp>
-      <p:sp>
-        <p:nvSpPr>
-          <p:cNvPr id="10" name="Text 7"/>
-          <p:cNvSpPr txBox="1"/>
-          <p:nvPr/>
-        </p:nvSpPr>
-        <p:spPr>
-          <a:xfrm>
-            <a:off x="640080" y="4160520"/>
-            <a:ext cx="7863840" cy="640080"/>
-          </a:xfrm>
-          <a:prstGeom prst="rect">
-            <a:avLst/>
-          </a:prstGeom>
-          <a:noFill/>
-          <a:ln/>
-        </p:spPr>
-        <p:txBody>
-          <a:bodyPr wrap="square" lIns="0" tIns="0" rIns="0" bIns="0" rtlCol="0" anchor="ctr"/>
-          <a:lstStyle/>
-          <a:p>
-            <a:pPr indent="0" marL="0">
-              <a:lnSpc>
-                <a:spcPct val="110000"/>
-              </a:lnSpc>
-              <a:buNone/>
-            </a:pPr>
-            <a:r>
-              <a:rPr lang="en-US" sz="1050" dirty="0">
-                <a:solidFill>
-                  <a:srgbClr val="9BA7B4"/>
-                </a:solidFill>
-                <a:latin typeface="Calibri" pitchFamily="34" charset="0"/>
-                <a:ea typeface="Calibri" pitchFamily="34" charset="-122"/>
-                <a:cs typeface="Calibri" pitchFamily="34" charset="-120"/>
-              </a:rPr>
-              <a:t>Fontes: Fiocruz (Radis) • Agência Brasil / Ministério da Saúde • Associação Brasileira de Psiquiatria • Banco Central • FIA Business School / Ibevar • Associação Médica Brasileira</a:t>
-            </a:r>
-            <a:endParaRPr lang="en-US" sz="1050" dirty="0"/>
+              <a:t>O córtex pré-frontal — a área que freia impulsos e avalia riscos — só termina de amadurecer por volta dos 25 anos. Cérebro em formação + app desenhado para viciar é uma disputa desleal.</a:t>
+            </a:r>
+            <a:endParaRPr lang="en-US" sz="1250" dirty="0"/>
           </a:p>
         </p:txBody>
       </p:sp>

--- a/trabalho-vicio-em-bets/vicio-em-bets.pptx
+++ b/trabalho-vicio-em-bets/vicio-em-bets.pptx
@@ -2730,7 +2730,7 @@
                 <a:ea typeface="Calibri" pitchFamily="34" charset="-122"/>
                 <a:cs typeface="Calibri" pitchFamily="34" charset="-120"/>
               </a:rPr>
-              <a:t>Redação: tese e intervenção  •  Matemática: os números  •  Biologia: o cérebro no vício</a:t>
+              <a:t>Trabalho interdisciplinar  —  Redação  •  Matemática  •  Biologia</a:t>
             </a:r>
             <a:endParaRPr lang="en-US" sz="1400" dirty="0"/>
           </a:p>
@@ -2744,7 +2744,7 @@
         </p:nvSpPr>
         <p:spPr>
           <a:xfrm>
-            <a:off x="640080" y="4343400"/>
+            <a:off x="640080" y="4160520"/>
             <a:ext cx="7863840" cy="365760"/>
           </a:xfrm>
           <a:prstGeom prst="rect">
@@ -2761,7 +2761,46 @@
               <a:buNone/>
             </a:pPr>
             <a:r>
-              <a:rPr lang="en-US" sz="1300" dirty="0">
+              <a:rPr lang="en-US" sz="1400" b="1" dirty="0">
+                <a:solidFill>
+                  <a:srgbClr val="F0F6FC"/>
+                </a:solidFill>
+                <a:latin typeface="Calibri" pitchFamily="34" charset="0"/>
+                <a:ea typeface="Calibri" pitchFamily="34" charset="-122"/>
+                <a:cs typeface="Calibri" pitchFamily="34" charset="-120"/>
+              </a:rPr>
+              <a:t>João Victor e Najib  —  Turma 3B  —  2026</a:t>
+            </a:r>
+            <a:endParaRPr lang="en-US" sz="1400" dirty="0"/>
+          </a:p>
+        </p:txBody>
+      </p:sp>
+      <p:sp>
+        <p:nvSpPr>
+          <p:cNvPr id="7" name="Text 4"/>
+          <p:cNvSpPr txBox="1"/>
+          <p:nvPr/>
+        </p:nvSpPr>
+        <p:spPr>
+          <a:xfrm>
+            <a:off x="640080" y="4553712"/>
+            <a:ext cx="7863840" cy="365760"/>
+          </a:xfrm>
+          <a:prstGeom prst="rect">
+            <a:avLst/>
+          </a:prstGeom>
+          <a:noFill/>
+          <a:ln/>
+        </p:spPr>
+        <p:txBody>
+          <a:bodyPr wrap="square" lIns="0" tIns="0" rIns="0" bIns="0" rtlCol="0" anchor="ctr"/>
+          <a:lstStyle/>
+          <a:p>
+            <a:pPr algn="l" indent="0" marL="0">
+              <a:buNone/>
+            </a:pPr>
+            <a:r>
+              <a:rPr lang="en-US" sz="1200" dirty="0">
                 <a:solidFill>
                   <a:srgbClr val="9BA7B4"/>
                 </a:solidFill>
@@ -2769,9 +2808,9 @@
                 <a:ea typeface="Calibri" pitchFamily="34" charset="-122"/>
                 <a:cs typeface="Calibri" pitchFamily="34" charset="-120"/>
               </a:rPr>
-              <a:t>[Nomes dos integrantes]  —  [Turma]  —  2026</a:t>
-            </a:r>
-            <a:endParaRPr lang="en-US" sz="1300" dirty="0"/>
+              <a:t>Professores: Tiago (Matemática)  •  Cristina (Biologia)  •  Karen (Redação)</a:t>
+            </a:r>
+            <a:endParaRPr lang="en-US" sz="1200" dirty="0"/>
           </a:p>
         </p:txBody>
       </p:sp>

--- a/trabalho-vicio-em-bets/vicio-em-bets.pptx
+++ b/trabalho-vicio-em-bets/vicio-em-bets.pptx
@@ -129,17 +129,17 @@
           <a:lstStyle/>
           <a:p>
             <a:pPr>
-              <a:defRPr sz="1100" b="0" i="0" u="none" strike="noStrike">
-                <a:solidFill>
-                  <a:srgbClr val="9BA7B4"/>
+              <a:defRPr sz="1200" b="0" i="0" u="none" strike="noStrike">
+                <a:solidFill>
+                  <a:srgbClr val="262626"/>
                 </a:solidFill>
                 <a:latin typeface="Calibri"/>
               </a:defRPr>
             </a:pPr>
             <a:r>
-              <a:rPr sz="1100" b="0" i="0" u="none" strike="noStrike">
-                <a:solidFill>
-                  <a:srgbClr val="9BA7B4"/>
+              <a:rPr sz="1200" b="0" i="0" u="none" strike="noStrike">
+                <a:solidFill>
+                  <a:srgbClr val="262626"/>
                 </a:solidFill>
                 <a:latin typeface="Calibri"/>
               </a:rPr>
@@ -172,11 +172,11 @@
           </c:tx>
           <c:spPr>
             <a:solidFill>
-              <a:srgbClr val="F85149"/>
+              <a:srgbClr val="C00000"/>
             </a:solidFill>
-            <a:ln w="31750" cap="flat">
+            <a:ln w="25400" cap="flat">
               <a:solidFill>
-                <a:srgbClr val="F85149"/>
+                <a:srgbClr val="C00000"/>
               </a:solidFill>
               <a:prstDash val="solid"/>
               <a:round/>
@@ -213,11 +213,11 @@
             <c:size val="5"/>
             <c:spPr>
               <a:solidFill>
-                <a:srgbClr val="F85149"/>
+                <a:srgbClr val="C00000"/>
               </a:solidFill>
               <a:ln w="9525" cap="flat">
                 <a:solidFill>
-                  <a:srgbClr val="F85149"/>
+                  <a:srgbClr val="C00000"/>
                 </a:solidFill>
                 <a:prstDash val="solid"/>
                 <a:round/>
@@ -369,7 +369,7 @@
                 <a:pPr>
                   <a:defRPr sz="1000" b="0" i="0" u="none" strike="noStrike">
                     <a:solidFill>
-                      <a:srgbClr val="9BA7B4"/>
+                      <a:srgbClr val="595959"/>
                     </a:solidFill>
                     <a:latin typeface="Arial"/>
                   </a:defRPr>
@@ -377,7 +377,7 @@
                 <a:r>
                   <a:rPr sz="1000" b="0" i="0" u="none" strike="noStrike">
                     <a:solidFill>
-                      <a:srgbClr val="9BA7B4"/>
+                      <a:srgbClr val="595959"/>
                     </a:solidFill>
                     <a:latin typeface="Arial"/>
                   </a:rPr>
@@ -409,7 +409,7 @@
             <a:pPr>
               <a:defRPr sz="1000" b="0" i="0" u="none" strike="noStrike">
                 <a:solidFill>
-                  <a:srgbClr val="9BA7B4"/>
+                  <a:srgbClr val="595959"/>
                 </a:solidFill>
                 <a:latin typeface="Arial"/>
               </a:defRPr>
@@ -436,7 +436,7 @@
           <c:spPr>
             <a:ln w="6350" cap="flat">
               <a:solidFill>
-                <a:srgbClr val="2A3240"/>
+                <a:srgbClr val="D9D9D9"/>
               </a:solidFill>
               <a:prstDash val="solid"/>
               <a:round/>
@@ -463,7 +463,7 @@
             <a:pPr>
               <a:defRPr sz="1000" b="0" i="0" u="none" strike="noStrike">
                 <a:solidFill>
-                  <a:srgbClr val="9BA7B4"/>
+                  <a:srgbClr val="595959"/>
                 </a:solidFill>
                 <a:latin typeface="Arial"/>
               </a:defRPr>
@@ -511,17 +511,17 @@
           <a:lstStyle/>
           <a:p>
             <a:pPr>
-              <a:defRPr sz="1100" b="0" i="0" u="none" strike="noStrike">
-                <a:solidFill>
-                  <a:srgbClr val="9BA7B4"/>
+              <a:defRPr sz="1200" b="0" i="0" u="none" strike="noStrike">
+                <a:solidFill>
+                  <a:srgbClr val="262626"/>
                 </a:solidFill>
                 <a:latin typeface="Calibri"/>
               </a:defRPr>
             </a:pPr>
             <a:r>
-              <a:rPr sz="1100" b="0" i="0" u="none" strike="noStrike">
-                <a:solidFill>
-                  <a:srgbClr val="9BA7B4"/>
+              <a:rPr sz="1200" b="0" i="0" u="none" strike="noStrike">
+                <a:solidFill>
+                  <a:srgbClr val="262626"/>
                 </a:solidFill>
                 <a:latin typeface="Calibri"/>
               </a:rPr>
@@ -556,7 +556,7 @@
           </c:tx>
           <c:spPr>
             <a:solidFill>
-              <a:srgbClr val="E3B341"/>
+              <a:srgbClr val="4472C4"/>
             </a:solidFill>
             <a:effectLst/>
           </c:spPr>
@@ -570,7 +570,7 @@
                 <a:pPr>
                   <a:defRPr b="0" i="0" strike="noStrike" sz="1100" u="none">
                     <a:solidFill>
-                      <a:srgbClr val="F0F6FC"/>
+                      <a:srgbClr val="262626"/>
                     </a:solidFill>
                     <a:latin typeface="Calibri"/>
                   </a:defRPr>
@@ -632,7 +632,7 @@
               <a:pPr>
                 <a:defRPr b="0" i="0" strike="noStrike" sz="1100" u="none">
                   <a:solidFill>
-                    <a:srgbClr val="F0F6FC"/>
+                    <a:srgbClr val="262626"/>
                   </a:solidFill>
                   <a:latin typeface="Calibri"/>
                 </a:defRPr>
@@ -680,7 +680,7 @@
             <a:pPr>
               <a:defRPr sz="1050" b="0" i="0" u="none" strike="noStrike">
                 <a:solidFill>
-                  <a:srgbClr val="F0F6FC"/>
+                  <a:srgbClr val="262626"/>
                 </a:solidFill>
                 <a:latin typeface="Arial"/>
               </a:defRPr>
@@ -800,7 +800,7 @@
             <c:bubble3D val="0"/>
             <c:spPr>
               <a:solidFill>
-                <a:srgbClr val="F85149"/>
+                <a:srgbClr val="ED7D31"/>
               </a:solidFill>
               <a:effectLst/>
             </c:spPr>
@@ -810,7 +810,7 @@
             <c:bubble3D val="0"/>
             <c:spPr>
               <a:solidFill>
-                <a:srgbClr val="2A3240"/>
+                <a:srgbClr val="D9D9D9"/>
               </a:solidFill>
               <a:effectLst/>
             </c:spPr>
@@ -919,7 +919,7 @@
           </c:val>
         </c:ser>
         <c:firstSliceAng val="0"/>
-        <c:holeSize val="62"/>
+        <c:holeSize val="60"/>
       </c:doughnutChart>
       <c:spPr>
         <a:noFill/>
@@ -1340,7 +1340,7 @@
           <a:p>
             <a:r>
               <a:rPr lang="en-US" dirty="0"/>
-              <a:t>Slide de capa. Troquem o campo de nomes/turma. Frase de abertura sugerida: 'Hoje vamos falar de um vício que cabe no bolso: as apostas online.'</a:t>
+              <a:t>Frase de abertura sugerida: 'Hoje vamos falar de um vício que cabe no bolso: as apostas online.'</a:t>
             </a:r>
             <a:endParaRPr lang="en-US" dirty="0"/>
           </a:p>
@@ -1428,7 +1428,7 @@
           <a:p>
             <a:r>
               <a:rPr lang="en-US" dirty="0"/>
-              <a:t>Aqui entra o gancho do vídeo do grupo: o vídeo informativo É o 'meio' da nossa proposta — a nossa ação social na prática.</a:t>
+              <a:t>Gancho do vídeo do grupo: o vídeo informativo É o 'meio' da nossa proposta — a nossa ação social na prática.</a:t>
             </a:r>
             <a:endParaRPr lang="en-US" dirty="0"/>
           </a:p>
@@ -1516,7 +1516,7 @@
           <a:p>
             <a:r>
               <a:rPr lang="en-US" dirty="0"/>
-              <a:t>Fechar com os canais de ajuda — isso mostra que a apresentação não só descreve o problema, mas aponta a saída.</a:t>
+              <a:t>Fechar com os canais de ajuda — a apresentação não só descreve o problema, aponta a saída.</a:t>
             </a:r>
             <a:endParaRPr lang="en-US" dirty="0"/>
           </a:p>
@@ -1604,7 +1604,7 @@
           <a:p>
             <a:r>
               <a:rPr lang="en-US" dirty="0"/>
-              <a:t>Ler a tese com calma — ela é a espinha dorsal da apresentação. Os quatro slides seguintes respondem 'por quê?' a essa tese.</a:t>
+              <a:t>Ler a tese com calma — ela é a espinha dorsal. Os quatro slides seguintes respondem 'por quê?'.</a:t>
             </a:r>
             <a:endParaRPr lang="en-US" dirty="0"/>
           </a:p>
@@ -1692,7 +1692,7 @@
           <a:p>
             <a:r>
               <a:rPr lang="en-US" dirty="0"/>
-              <a:t>Reforçar: esse dinheiro deixa de ir para comida, contas e escola. Fonte: Banco Central / FIA-Ibevar.</a:t>
+              <a:t>Fonte: Banco Central / FIA-Ibevar.</a:t>
             </a:r>
             <a:endParaRPr lang="en-US" dirty="0"/>
           </a:p>
@@ -1780,7 +1780,7 @@
           <a:p>
             <a:r>
               <a:rPr lang="en-US" dirty="0"/>
-              <a:t>Ponto-chave para a proposta de intervenção: se é doença, o tratamento é dever do SUS.</a:t>
+              <a:t>Ponto-chave para a proposta de intervenção.</a:t>
             </a:r>
             <a:endParaRPr lang="en-US" dirty="0"/>
           </a:p>
@@ -1956,7 +1956,7 @@
           <a:p>
             <a:r>
               <a:rPr lang="en-US" dirty="0"/>
-              <a:t>Diferença para o cassino antigo: não tem porta, não tem horário e não tem ninguém vendo você perder.</a:t>
+              <a:t>Gancho para os slides de matemática e biologia.</a:t>
             </a:r>
             <a:endParaRPr lang="en-US" dirty="0"/>
           </a:p>
@@ -2044,7 +2044,7 @@
           <a:p>
             <a:r>
               <a:rPr lang="en-US" dirty="0"/>
-              <a:t>Ponto de matemática: valor esperado e função exponencial. Se der tempo, mostrar que após 21 rodadas já se perdeu metade (0,968^21 ≈ 0,5 — meia-vida do dinheiro).</a:t>
+              <a:t>Ponto de matemática: valor esperado e função exponencial. Bônus: após 21 rodadas já se perdeu metade (0,968^21 ≈ 0,5 — a 'meia-vida' do dinheiro).</a:t>
             </a:r>
             <a:endParaRPr lang="en-US" dirty="0"/>
           </a:p>
@@ -2132,7 +2132,7 @@
           <a:p>
             <a:r>
               <a:rPr lang="en-US" dirty="0"/>
-              <a:t>Leitura de gráfico de barras e de setores — pontue: quase 4 em cada 10 apostadores se endividaram, e o público mais pobre é o mais atingido.</a:t>
+              <a:t>Leitura dos gráficos: quase 4 em cada 10 apostadores se endividaram, e o público mais pobre é o mais atingido.</a:t>
             </a:r>
             <a:endParaRPr lang="en-US" dirty="0"/>
           </a:p>
@@ -2220,7 +2220,7 @@
           <a:p>
             <a:r>
               <a:rPr lang="en-US" dirty="0"/>
-              <a:t>Ponto de biologia: dopamina, reforço intermitente, tolerância e maturação do córtex pré-frontal. Conectar com o slide 4 ('é doença'): aqui está o mecanismo da doença.</a:t>
+              <a:t>Conectar com o 'por quê 2': aqui está o mecanismo biológico da doença.</a:t>
             </a:r>
             <a:endParaRPr lang="en-US" dirty="0"/>
           </a:p>
@@ -2575,7 +2575,7 @@
     <p:bg>
       <p:bgPr>
         <a:solidFill>
-          <a:srgbClr val="0D1117"/>
+          <a:srgbClr val="FFFFFF"/>
         </a:solidFill>
       </p:bgPr>
     </p:bg>
@@ -2593,42 +2593,16 @@
           <a:chExt cx="0" cy="0"/>
         </a:xfrm>
       </p:grpSpPr>
-      <p:pic>
-        <p:nvPicPr>
-          <p:cNvPr id="2" name="Image 0" descr="preencoded.png">    </p:cNvPr>
-          <p:cNvPicPr>
-            <a:picLocks noChangeAspect="1"/>
-          </p:cNvPicPr>
+      <p:sp>
+        <p:nvSpPr>
+          <p:cNvPr id="2" name="Text 0"/>
+          <p:cNvSpPr txBox="1"/>
           <p:nvPr/>
-        </p:nvPicPr>
-        <p:blipFill>
-          <a:blip r:embed="rId1">
-            <a:alphaModFix amt="18000"/>
-          </a:blip>
-          <a:stretch>
-            <a:fillRect/>
-          </a:stretch>
-        </p:blipFill>
+        </p:nvSpPr>
         <p:spPr>
           <a:xfrm>
-            <a:off x="6492240" y="1371600"/>
-            <a:ext cx="2103120" cy="2103120"/>
-          </a:xfrm>
-          <a:prstGeom prst="rect">
-            <a:avLst/>
-          </a:prstGeom>
-        </p:spPr>
-      </p:pic>
-      <p:sp>
-        <p:nvSpPr>
-          <p:cNvPr id="3" name="Text 0"/>
-          <p:cNvSpPr txBox="1"/>
-          <p:nvPr/>
-        </p:nvSpPr>
-        <p:spPr>
-          <a:xfrm>
-            <a:off x="640080" y="1417320"/>
-            <a:ext cx="7863840" cy="960120"/>
+            <a:off x="548640" y="1234440"/>
+            <a:ext cx="8046720" cy="868680"/>
           </a:xfrm>
           <a:prstGeom prst="rect">
             <a:avLst/>
@@ -2640,34 +2614,34 @@
           <a:bodyPr wrap="square" lIns="0" tIns="0" rIns="0" bIns="0" rtlCol="0" anchor="ctr"/>
           <a:lstStyle/>
           <a:p>
-            <a:pPr algn="l" indent="0" marL="0">
+            <a:pPr algn="ctr" indent="0" marL="0">
               <a:buNone/>
             </a:pPr>
             <a:r>
-              <a:rPr lang="en-US" sz="5400" b="1" dirty="0">
-                <a:solidFill>
-                  <a:srgbClr val="F0F6FC"/>
+              <a:rPr lang="en-US" sz="4400" b="1" dirty="0">
+                <a:solidFill>
+                  <a:srgbClr val="1F3864"/>
                 </a:solidFill>
                 <a:latin typeface="Calibri" pitchFamily="34" charset="0"/>
                 <a:ea typeface="Calibri" pitchFamily="34" charset="-122"/>
                 <a:cs typeface="Calibri" pitchFamily="34" charset="-120"/>
               </a:rPr>
-              <a:t>VÍCIO EM BETS</a:t>
-            </a:r>
-            <a:endParaRPr lang="en-US" sz="5400" dirty="0"/>
+              <a:t>O vício em bets no Brasil</a:t>
+            </a:r>
+            <a:endParaRPr lang="en-US" sz="4400" dirty="0"/>
           </a:p>
         </p:txBody>
       </p:sp>
       <p:sp>
         <p:nvSpPr>
-          <p:cNvPr id="4" name="Text 1"/>
+          <p:cNvPr id="3" name="Text 1"/>
           <p:cNvSpPr txBox="1"/>
           <p:nvPr/>
         </p:nvSpPr>
         <p:spPr>
           <a:xfrm>
-            <a:off x="640080" y="2395728"/>
-            <a:ext cx="7315200" cy="457200"/>
+            <a:off x="548640" y="2148840"/>
+            <a:ext cx="8046720" cy="457200"/>
           </a:xfrm>
           <a:prstGeom prst="rect">
             <a:avLst/>
@@ -2679,13 +2653,13 @@
           <a:bodyPr wrap="square" lIns="0" tIns="0" rIns="0" bIns="0" rtlCol="0" anchor="ctr"/>
           <a:lstStyle/>
           <a:p>
-            <a:pPr algn="l" indent="0" marL="0">
+            <a:pPr algn="ctr" indent="0" marL="0">
               <a:buNone/>
             </a:pPr>
             <a:r>
               <a:rPr lang="en-US" sz="2000" i="1" dirty="0">
                 <a:solidFill>
-                  <a:srgbClr val="3FB950"/>
+                  <a:srgbClr val="C00000"/>
                 </a:solidFill>
                 <a:latin typeface="Calibri" pitchFamily="34" charset="0"/>
                 <a:ea typeface="Calibri" pitchFamily="34" charset="-122"/>
@@ -2699,14 +2673,14 @@
       </p:sp>
       <p:sp>
         <p:nvSpPr>
-          <p:cNvPr id="5" name="Text 2"/>
+          <p:cNvPr id="4" name="Text 2"/>
           <p:cNvSpPr txBox="1"/>
           <p:nvPr/>
         </p:nvSpPr>
         <p:spPr>
           <a:xfrm>
-            <a:off x="640080" y="3063240"/>
-            <a:ext cx="7315200" cy="365760"/>
+            <a:off x="548640" y="2743200"/>
+            <a:ext cx="8046720" cy="365760"/>
           </a:xfrm>
           <a:prstGeom prst="rect">
             <a:avLst/>
@@ -2718,19 +2692,19 @@
           <a:bodyPr wrap="square" lIns="0" tIns="0" rIns="0" bIns="0" rtlCol="0" anchor="ctr"/>
           <a:lstStyle/>
           <a:p>
-            <a:pPr algn="l" indent="0" marL="0">
+            <a:pPr algn="ctr" indent="0" marL="0">
               <a:buNone/>
             </a:pPr>
             <a:r>
               <a:rPr lang="en-US" sz="1400" dirty="0">
                 <a:solidFill>
-                  <a:srgbClr val="9BA7B4"/>
+                  <a:srgbClr val="595959"/>
                 </a:solidFill>
                 <a:latin typeface="Calibri" pitchFamily="34" charset="0"/>
                 <a:ea typeface="Calibri" pitchFamily="34" charset="-122"/>
                 <a:cs typeface="Calibri" pitchFamily="34" charset="-120"/>
               </a:rPr>
-              <a:t>Trabalho interdisciplinar  —  Redação  •  Matemática  •  Biologia</a:t>
+              <a:t>Trabalho interdisciplinar — Redação, Matemática e Biologia</a:t>
             </a:r>
             <a:endParaRPr lang="en-US" sz="1400" dirty="0"/>
           </a:p>
@@ -2738,14 +2712,14 @@
       </p:sp>
       <p:sp>
         <p:nvSpPr>
-          <p:cNvPr id="6" name="Text 3"/>
+          <p:cNvPr id="5" name="Text 3"/>
           <p:cNvSpPr txBox="1"/>
           <p:nvPr/>
         </p:nvSpPr>
         <p:spPr>
           <a:xfrm>
-            <a:off x="640080" y="4160520"/>
-            <a:ext cx="7863840" cy="365760"/>
+            <a:off x="548640" y="3657600"/>
+            <a:ext cx="8046720" cy="365760"/>
           </a:xfrm>
           <a:prstGeom prst="rect">
             <a:avLst/>
@@ -2757,34 +2731,34 @@
           <a:bodyPr wrap="square" lIns="0" tIns="0" rIns="0" bIns="0" rtlCol="0" anchor="ctr"/>
           <a:lstStyle/>
           <a:p>
-            <a:pPr algn="l" indent="0" marL="0">
+            <a:pPr algn="ctr" indent="0" marL="0">
               <a:buNone/>
             </a:pPr>
             <a:r>
-              <a:rPr lang="en-US" sz="1400" b="1" dirty="0">
-                <a:solidFill>
-                  <a:srgbClr val="F0F6FC"/>
+              <a:rPr lang="en-US" sz="1600" b="1" dirty="0">
+                <a:solidFill>
+                  <a:srgbClr val="262626"/>
                 </a:solidFill>
                 <a:latin typeface="Calibri" pitchFamily="34" charset="0"/>
                 <a:ea typeface="Calibri" pitchFamily="34" charset="-122"/>
                 <a:cs typeface="Calibri" pitchFamily="34" charset="-120"/>
               </a:rPr>
-              <a:t>João Victor e Najib  —  Turma 3B  —  2026</a:t>
-            </a:r>
-            <a:endParaRPr lang="en-US" sz="1400" dirty="0"/>
+              <a:t>João Victor e Najib — Turma 3B</a:t>
+            </a:r>
+            <a:endParaRPr lang="en-US" sz="1600" dirty="0"/>
           </a:p>
         </p:txBody>
       </p:sp>
       <p:sp>
         <p:nvSpPr>
-          <p:cNvPr id="7" name="Text 4"/>
+          <p:cNvPr id="6" name="Text 4"/>
           <p:cNvSpPr txBox="1"/>
           <p:nvPr/>
         </p:nvSpPr>
         <p:spPr>
           <a:xfrm>
-            <a:off x="640080" y="4553712"/>
-            <a:ext cx="7863840" cy="365760"/>
+            <a:off x="548640" y="4069080"/>
+            <a:ext cx="8046720" cy="365760"/>
           </a:xfrm>
           <a:prstGeom prst="rect">
             <a:avLst/>
@@ -2796,21 +2770,21 @@
           <a:bodyPr wrap="square" lIns="0" tIns="0" rIns="0" bIns="0" rtlCol="0" anchor="ctr"/>
           <a:lstStyle/>
           <a:p>
-            <a:pPr algn="l" indent="0" marL="0">
+            <a:pPr algn="ctr" indent="0" marL="0">
               <a:buNone/>
             </a:pPr>
             <a:r>
-              <a:rPr lang="en-US" sz="1200" dirty="0">
-                <a:solidFill>
-                  <a:srgbClr val="9BA7B4"/>
+              <a:rPr lang="en-US" sz="1300" dirty="0">
+                <a:solidFill>
+                  <a:srgbClr val="595959"/>
                 </a:solidFill>
                 <a:latin typeface="Calibri" pitchFamily="34" charset="0"/>
                 <a:ea typeface="Calibri" pitchFamily="34" charset="-122"/>
                 <a:cs typeface="Calibri" pitchFamily="34" charset="-120"/>
               </a:rPr>
-              <a:t>Professores: Tiago (Matemática)  •  Cristina (Biologia)  •  Karen (Redação)</a:t>
-            </a:r>
-            <a:endParaRPr lang="en-US" sz="1200" dirty="0"/>
+              <a:t>Professores: Tiago (Matemática) • Cristina (Biologia) • Karen (Redação)</a:t>
+            </a:r>
+            <a:endParaRPr lang="en-US" sz="1300" dirty="0"/>
           </a:p>
         </p:txBody>
       </p:sp>
@@ -2828,7 +2802,7 @@
     <p:bg>
       <p:bgPr>
         <a:solidFill>
-          <a:srgbClr val="0D1117"/>
+          <a:srgbClr val="FFFFFF"/>
         </a:solidFill>
       </p:bgPr>
     </p:bg>
@@ -2854,8 +2828,8 @@
         </p:nvSpPr>
         <p:spPr>
           <a:xfrm>
-            <a:off x="640080" y="365760"/>
-            <a:ext cx="7863840" cy="548640"/>
+            <a:off x="548640" y="320040"/>
+            <a:ext cx="8046720" cy="685800"/>
           </a:xfrm>
           <a:prstGeom prst="rect">
             <a:avLst/>
@@ -2873,731 +2847,846 @@
             <a:r>
               <a:rPr lang="en-US" sz="3000" b="1" dirty="0">
                 <a:solidFill>
-                  <a:srgbClr val="F0F6FC"/>
+                  <a:srgbClr val="1F3864"/>
                 </a:solidFill>
                 <a:latin typeface="Calibri" pitchFamily="34" charset="0"/>
                 <a:ea typeface="Calibri" pitchFamily="34" charset="-122"/>
                 <a:cs typeface="Calibri" pitchFamily="34" charset="-120"/>
               </a:rPr>
-              <a:t>PROPOSTA DE INTERVENÇÃO</a:t>
+              <a:t>Proposta de intervenção</a:t>
             </a:r>
             <a:endParaRPr lang="en-US" sz="3000" dirty="0"/>
           </a:p>
         </p:txBody>
       </p:sp>
-      <p:sp>
-        <p:nvSpPr>
-          <p:cNvPr id="3" name="Shape 1"/>
-          <p:cNvSpPr/>
-          <p:nvPr/>
-        </p:nvSpPr>
-        <p:spPr>
-          <a:xfrm>
-            <a:off x="640080" y="1143000"/>
-            <a:ext cx="1938528" cy="2331720"/>
-          </a:xfrm>
-          <a:prstGeom prst="roundRect">
-            <a:avLst>
-              <a:gd name="adj" fmla="val 4717"/>
-            </a:avLst>
-          </a:prstGeom>
-          <a:solidFill>
-            <a:srgbClr val="161C26"/>
-          </a:solidFill>
-          <a:ln/>
-        </p:spPr>
-      </p:sp>
-      <p:sp>
-        <p:nvSpPr>
-          <p:cNvPr id="4" name="Shape 2"/>
-          <p:cNvSpPr/>
-          <p:nvPr/>
-        </p:nvSpPr>
-        <p:spPr>
-          <a:xfrm>
-            <a:off x="804672" y="1307592"/>
-            <a:ext cx="502920" cy="502920"/>
-          </a:xfrm>
-          <a:prstGeom prst="ellipse">
-            <a:avLst/>
-          </a:prstGeom>
-          <a:solidFill>
-            <a:srgbClr val="1C2431"/>
-          </a:solidFill>
-          <a:ln/>
-        </p:spPr>
-      </p:sp>
-      <p:pic>
-        <p:nvPicPr>
-          <p:cNvPr id="5" name="Image 0" descr="preencoded.png">    </p:cNvPr>
-          <p:cNvPicPr>
-            <a:picLocks noChangeAspect="1"/>
-          </p:cNvPicPr>
-          <p:nvPr/>
-        </p:nvPicPr>
-        <p:blipFill>
-          <a:blip r:embed="rId1"/>
-          <a:stretch>
-            <a:fillRect/>
-          </a:stretch>
-        </p:blipFill>
-        <p:spPr>
-          <a:xfrm>
-            <a:off x="935431" y="1438351"/>
-            <a:ext cx="241402" cy="241402"/>
-          </a:xfrm>
-          <a:prstGeom prst="rect">
-            <a:avLst/>
-          </a:prstGeom>
-        </p:spPr>
-      </p:pic>
-      <p:sp>
-        <p:nvSpPr>
-          <p:cNvPr id="6" name="Text 3"/>
-          <p:cNvSpPr txBox="1"/>
-          <p:nvPr/>
-        </p:nvSpPr>
-        <p:spPr>
-          <a:xfrm>
-            <a:off x="804672" y="1920240"/>
-            <a:ext cx="1609344" cy="320040"/>
-          </a:xfrm>
-          <a:prstGeom prst="rect">
-            <a:avLst/>
-          </a:prstGeom>
-          <a:noFill/>
-          <a:ln/>
-        </p:spPr>
-        <p:txBody>
-          <a:bodyPr wrap="square" lIns="0" tIns="0" rIns="0" bIns="0" rtlCol="0" anchor="ctr"/>
-          <a:lstStyle/>
-          <a:p>
-            <a:pPr indent="0" marL="0">
-              <a:buNone/>
-            </a:pPr>
-            <a:r>
-              <a:rPr lang="en-US" sz="1400" b="1" dirty="0">
-                <a:solidFill>
-                  <a:srgbClr val="3FB950"/>
-                </a:solidFill>
-                <a:latin typeface="Calibri" pitchFamily="34" charset="0"/>
-                <a:ea typeface="Calibri" pitchFamily="34" charset="-122"/>
-                <a:cs typeface="Calibri" pitchFamily="34" charset="-120"/>
-              </a:rPr>
-              <a:t>AGENTE</a:t>
-            </a:r>
-            <a:endParaRPr lang="en-US" sz="1400" dirty="0"/>
-          </a:p>
-        </p:txBody>
-      </p:sp>
-      <p:sp>
-        <p:nvSpPr>
-          <p:cNvPr id="7" name="Text 4"/>
-          <p:cNvSpPr txBox="1"/>
-          <p:nvPr/>
-        </p:nvSpPr>
-        <p:spPr>
-          <a:xfrm>
-            <a:off x="804672" y="2240280"/>
-            <a:ext cx="1609344" cy="1097280"/>
-          </a:xfrm>
-          <a:prstGeom prst="rect">
-            <a:avLst/>
-          </a:prstGeom>
-          <a:noFill/>
-          <a:ln/>
-        </p:spPr>
-        <p:txBody>
-          <a:bodyPr wrap="square" lIns="0" tIns="0" rIns="0" bIns="0" rtlCol="0" anchor="t"/>
-          <a:lstStyle/>
-          <a:p>
-            <a:pPr indent="0" marL="0">
-              <a:lnSpc>
-                <a:spcPct val="110000"/>
-              </a:lnSpc>
-              <a:buNone/>
-            </a:pPr>
-            <a:r>
-              <a:rPr lang="en-US" sz="1150" dirty="0">
-                <a:solidFill>
-                  <a:srgbClr val="F0F6FC"/>
-                </a:solidFill>
-                <a:latin typeface="Calibri" pitchFamily="34" charset="0"/>
-                <a:ea typeface="Calibri" pitchFamily="34" charset="-122"/>
-                <a:cs typeface="Calibri" pitchFamily="34" charset="-120"/>
-              </a:rPr>
-              <a:t>Ministério da Saúde e escolas, em parceria com as prefeituras</a:t>
-            </a:r>
-            <a:endParaRPr lang="en-US" sz="1150" dirty="0"/>
-          </a:p>
-        </p:txBody>
-      </p:sp>
-      <p:sp>
-        <p:nvSpPr>
-          <p:cNvPr id="8" name="Shape 5"/>
-          <p:cNvSpPr/>
-          <p:nvPr/>
-        </p:nvSpPr>
-        <p:spPr>
-          <a:xfrm>
-            <a:off x="2779776" y="1143000"/>
-            <a:ext cx="1938528" cy="2331720"/>
-          </a:xfrm>
-          <a:prstGeom prst="roundRect">
-            <a:avLst>
-              <a:gd name="adj" fmla="val 4717"/>
-            </a:avLst>
-          </a:prstGeom>
-          <a:solidFill>
-            <a:srgbClr val="161C26"/>
-          </a:solidFill>
-          <a:ln/>
-        </p:spPr>
-      </p:sp>
-      <p:sp>
-        <p:nvSpPr>
-          <p:cNvPr id="9" name="Shape 6"/>
-          <p:cNvSpPr/>
-          <p:nvPr/>
-        </p:nvSpPr>
-        <p:spPr>
-          <a:xfrm>
-            <a:off x="2944368" y="1307592"/>
-            <a:ext cx="502920" cy="502920"/>
-          </a:xfrm>
-          <a:prstGeom prst="ellipse">
-            <a:avLst/>
-          </a:prstGeom>
-          <a:solidFill>
-            <a:srgbClr val="1C2431"/>
-          </a:solidFill>
-          <a:ln/>
-        </p:spPr>
-      </p:sp>
-      <p:pic>
-        <p:nvPicPr>
-          <p:cNvPr id="10" name="Image 1" descr="preencoded.png">    </p:cNvPr>
-          <p:cNvPicPr>
-            <a:picLocks noChangeAspect="1"/>
-          </p:cNvPicPr>
-          <p:nvPr/>
-        </p:nvPicPr>
-        <p:blipFill>
-          <a:blip r:embed="rId2"/>
-          <a:stretch>
-            <a:fillRect/>
-          </a:stretch>
-        </p:blipFill>
-        <p:spPr>
-          <a:xfrm>
-            <a:off x="3075127" y="1438351"/>
-            <a:ext cx="241402" cy="241402"/>
-          </a:xfrm>
-          <a:prstGeom prst="rect">
-            <a:avLst/>
-          </a:prstGeom>
-        </p:spPr>
-      </p:pic>
-      <p:sp>
-        <p:nvSpPr>
-          <p:cNvPr id="11" name="Text 7"/>
-          <p:cNvSpPr txBox="1"/>
-          <p:nvPr/>
-        </p:nvSpPr>
-        <p:spPr>
-          <a:xfrm>
-            <a:off x="2944368" y="1920240"/>
-            <a:ext cx="1609344" cy="320040"/>
-          </a:xfrm>
-          <a:prstGeom prst="rect">
-            <a:avLst/>
-          </a:prstGeom>
-          <a:noFill/>
-          <a:ln/>
-        </p:spPr>
-        <p:txBody>
-          <a:bodyPr wrap="square" lIns="0" tIns="0" rIns="0" bIns="0" rtlCol="0" anchor="ctr"/>
-          <a:lstStyle/>
-          <a:p>
-            <a:pPr indent="0" marL="0">
-              <a:buNone/>
-            </a:pPr>
-            <a:r>
-              <a:rPr lang="en-US" sz="1400" b="1" dirty="0">
-                <a:solidFill>
-                  <a:srgbClr val="3FB950"/>
-                </a:solidFill>
-                <a:latin typeface="Calibri" pitchFamily="34" charset="0"/>
-                <a:ea typeface="Calibri" pitchFamily="34" charset="-122"/>
-                <a:cs typeface="Calibri" pitchFamily="34" charset="-120"/>
-              </a:rPr>
-              <a:t>AÇÃO</a:t>
-            </a:r>
-            <a:endParaRPr lang="en-US" sz="1400" dirty="0"/>
-          </a:p>
-        </p:txBody>
-      </p:sp>
-      <p:sp>
-        <p:nvSpPr>
-          <p:cNvPr id="12" name="Text 8"/>
-          <p:cNvSpPr txBox="1"/>
-          <p:nvPr/>
-        </p:nvSpPr>
-        <p:spPr>
-          <a:xfrm>
-            <a:off x="2944368" y="2240280"/>
-            <a:ext cx="1609344" cy="1097280"/>
-          </a:xfrm>
-          <a:prstGeom prst="rect">
-            <a:avLst/>
-          </a:prstGeom>
-          <a:noFill/>
-          <a:ln/>
-        </p:spPr>
-        <p:txBody>
-          <a:bodyPr wrap="square" lIns="0" tIns="0" rIns="0" bIns="0" rtlCol="0" anchor="t"/>
-          <a:lstStyle/>
-          <a:p>
-            <a:pPr indent="0" marL="0">
-              <a:lnSpc>
-                <a:spcPct val="110000"/>
-              </a:lnSpc>
-              <a:buNone/>
-            </a:pPr>
-            <a:r>
-              <a:rPr lang="en-US" sz="1150" dirty="0">
-                <a:solidFill>
-                  <a:srgbClr val="F0F6FC"/>
-                </a:solidFill>
-                <a:latin typeface="Calibri" pitchFamily="34" charset="0"/>
-                <a:ea typeface="Calibri" pitchFamily="34" charset="-122"/>
-                <a:cs typeface="Calibri" pitchFamily="34" charset="-120"/>
-              </a:rPr>
-              <a:t>Campanha nacional de conscientização + ampliação do tratamento gratuito nos CAPS/SUS</a:t>
-            </a:r>
-            <a:endParaRPr lang="en-US" sz="1150" dirty="0"/>
-          </a:p>
-        </p:txBody>
-      </p:sp>
-      <p:sp>
-        <p:nvSpPr>
-          <p:cNvPr id="13" name="Shape 9"/>
-          <p:cNvSpPr/>
-          <p:nvPr/>
-        </p:nvSpPr>
-        <p:spPr>
-          <a:xfrm>
-            <a:off x="4919472" y="1143000"/>
-            <a:ext cx="1938528" cy="2331720"/>
-          </a:xfrm>
-          <a:prstGeom prst="roundRect">
-            <a:avLst>
-              <a:gd name="adj" fmla="val 4717"/>
-            </a:avLst>
-          </a:prstGeom>
-          <a:solidFill>
-            <a:srgbClr val="161C26"/>
-          </a:solidFill>
-          <a:ln/>
-        </p:spPr>
-      </p:sp>
-      <p:sp>
-        <p:nvSpPr>
-          <p:cNvPr id="14" name="Shape 10"/>
-          <p:cNvSpPr/>
-          <p:nvPr/>
-        </p:nvSpPr>
-        <p:spPr>
-          <a:xfrm>
-            <a:off x="5084064" y="1307592"/>
-            <a:ext cx="502920" cy="502920"/>
-          </a:xfrm>
-          <a:prstGeom prst="ellipse">
-            <a:avLst/>
-          </a:prstGeom>
-          <a:solidFill>
-            <a:srgbClr val="1C2431"/>
-          </a:solidFill>
-          <a:ln/>
-        </p:spPr>
-      </p:sp>
-      <p:pic>
-        <p:nvPicPr>
-          <p:cNvPr id="15" name="Image 2" descr="preencoded.png">    </p:cNvPr>
-          <p:cNvPicPr>
-            <a:picLocks noChangeAspect="1"/>
-          </p:cNvPicPr>
-          <p:nvPr/>
-        </p:nvPicPr>
-        <p:blipFill>
-          <a:blip r:embed="rId3"/>
-          <a:stretch>
-            <a:fillRect/>
-          </a:stretch>
-        </p:blipFill>
-        <p:spPr>
-          <a:xfrm>
-            <a:off x="5214823" y="1438351"/>
-            <a:ext cx="241402" cy="241402"/>
-          </a:xfrm>
-          <a:prstGeom prst="rect">
-            <a:avLst/>
-          </a:prstGeom>
-        </p:spPr>
-      </p:pic>
-      <p:sp>
-        <p:nvSpPr>
-          <p:cNvPr id="16" name="Text 11"/>
-          <p:cNvSpPr txBox="1"/>
-          <p:nvPr/>
-        </p:nvSpPr>
-        <p:spPr>
-          <a:xfrm>
-            <a:off x="5084064" y="1920240"/>
-            <a:ext cx="1609344" cy="320040"/>
-          </a:xfrm>
-          <a:prstGeom prst="rect">
-            <a:avLst/>
-          </a:prstGeom>
-          <a:noFill/>
-          <a:ln/>
-        </p:spPr>
-        <p:txBody>
-          <a:bodyPr wrap="square" lIns="0" tIns="0" rIns="0" bIns="0" rtlCol="0" anchor="ctr"/>
-          <a:lstStyle/>
-          <a:p>
-            <a:pPr indent="0" marL="0">
-              <a:buNone/>
-            </a:pPr>
-            <a:r>
-              <a:rPr lang="en-US" sz="1400" b="1" dirty="0">
-                <a:solidFill>
-                  <a:srgbClr val="3FB950"/>
-                </a:solidFill>
-                <a:latin typeface="Calibri" pitchFamily="34" charset="0"/>
-                <a:ea typeface="Calibri" pitchFamily="34" charset="-122"/>
-                <a:cs typeface="Calibri" pitchFamily="34" charset="-120"/>
-              </a:rPr>
-              <a:t>MEIO</a:t>
-            </a:r>
-            <a:endParaRPr lang="en-US" sz="1400" dirty="0"/>
-          </a:p>
-        </p:txBody>
-      </p:sp>
-      <p:sp>
-        <p:nvSpPr>
-          <p:cNvPr id="17" name="Text 12"/>
-          <p:cNvSpPr txBox="1"/>
-          <p:nvPr/>
-        </p:nvSpPr>
-        <p:spPr>
-          <a:xfrm>
-            <a:off x="5084064" y="2240280"/>
-            <a:ext cx="1609344" cy="1097280"/>
-          </a:xfrm>
-          <a:prstGeom prst="rect">
-            <a:avLst/>
-          </a:prstGeom>
-          <a:noFill/>
-          <a:ln/>
-        </p:spPr>
-        <p:txBody>
-          <a:bodyPr wrap="square" lIns="0" tIns="0" rIns="0" bIns="0" rtlCol="0" anchor="t"/>
-          <a:lstStyle/>
-          <a:p>
-            <a:pPr indent="0" marL="0">
-              <a:lnSpc>
-                <a:spcPct val="110000"/>
-              </a:lnSpc>
-              <a:buNone/>
-            </a:pPr>
-            <a:r>
-              <a:rPr lang="en-US" sz="1150" dirty="0">
-                <a:solidFill>
-                  <a:srgbClr val="F0F6FC"/>
-                </a:solidFill>
-                <a:latin typeface="Calibri" pitchFamily="34" charset="0"/>
-                <a:ea typeface="Calibri" pitchFamily="34" charset="-122"/>
-                <a:cs typeface="Calibri" pitchFamily="34" charset="-120"/>
-              </a:rPr>
-              <a:t>Vídeos informativos nas redes sociais, palestras nas escolas e divulgação dos canais de ajuda</a:t>
-            </a:r>
-            <a:endParaRPr lang="en-US" sz="1150" dirty="0"/>
-          </a:p>
-        </p:txBody>
-      </p:sp>
-      <p:sp>
-        <p:nvSpPr>
-          <p:cNvPr id="18" name="Shape 13"/>
-          <p:cNvSpPr/>
-          <p:nvPr/>
-        </p:nvSpPr>
-        <p:spPr>
-          <a:xfrm>
-            <a:off x="7059168" y="1143000"/>
-            <a:ext cx="1938528" cy="2331720"/>
-          </a:xfrm>
-          <a:prstGeom prst="roundRect">
-            <a:avLst>
-              <a:gd name="adj" fmla="val 4717"/>
-            </a:avLst>
-          </a:prstGeom>
-          <a:solidFill>
-            <a:srgbClr val="161C26"/>
-          </a:solidFill>
-          <a:ln/>
-        </p:spPr>
-      </p:sp>
-      <p:sp>
-        <p:nvSpPr>
-          <p:cNvPr id="19" name="Shape 14"/>
-          <p:cNvSpPr/>
-          <p:nvPr/>
-        </p:nvSpPr>
-        <p:spPr>
-          <a:xfrm>
-            <a:off x="7223760" y="1307592"/>
-            <a:ext cx="502920" cy="502920"/>
-          </a:xfrm>
-          <a:prstGeom prst="ellipse">
-            <a:avLst/>
-          </a:prstGeom>
-          <a:solidFill>
-            <a:srgbClr val="1C2431"/>
-          </a:solidFill>
-          <a:ln/>
-        </p:spPr>
-      </p:sp>
-      <p:pic>
-        <p:nvPicPr>
-          <p:cNvPr id="20" name="Image 3" descr="preencoded.png">    </p:cNvPr>
-          <p:cNvPicPr>
-            <a:picLocks noChangeAspect="1"/>
-          </p:cNvPicPr>
-          <p:nvPr/>
-        </p:nvPicPr>
-        <p:blipFill>
-          <a:blip r:embed="rId4"/>
-          <a:stretch>
-            <a:fillRect/>
-          </a:stretch>
-        </p:blipFill>
-        <p:spPr>
-          <a:xfrm>
-            <a:off x="7354519" y="1438351"/>
-            <a:ext cx="241402" cy="241402"/>
-          </a:xfrm>
-          <a:prstGeom prst="rect">
-            <a:avLst/>
-          </a:prstGeom>
-        </p:spPr>
-      </p:pic>
-      <p:sp>
-        <p:nvSpPr>
-          <p:cNvPr id="21" name="Text 15"/>
-          <p:cNvSpPr txBox="1"/>
-          <p:nvPr/>
-        </p:nvSpPr>
-        <p:spPr>
-          <a:xfrm>
-            <a:off x="7223760" y="1920240"/>
-            <a:ext cx="1609344" cy="320040"/>
-          </a:xfrm>
-          <a:prstGeom prst="rect">
-            <a:avLst/>
-          </a:prstGeom>
-          <a:noFill/>
-          <a:ln/>
-        </p:spPr>
-        <p:txBody>
-          <a:bodyPr wrap="square" lIns="0" tIns="0" rIns="0" bIns="0" rtlCol="0" anchor="ctr"/>
-          <a:lstStyle/>
-          <a:p>
-            <a:pPr indent="0" marL="0">
-              <a:buNone/>
-            </a:pPr>
-            <a:r>
-              <a:rPr lang="en-US" sz="1400" b="1" dirty="0">
-                <a:solidFill>
-                  <a:srgbClr val="3FB950"/>
-                </a:solidFill>
-                <a:latin typeface="Calibri" pitchFamily="34" charset="0"/>
-                <a:ea typeface="Calibri" pitchFamily="34" charset="-122"/>
-                <a:cs typeface="Calibri" pitchFamily="34" charset="-120"/>
-              </a:rPr>
-              <a:t>FINALIDADE</a:t>
-            </a:r>
-            <a:endParaRPr lang="en-US" sz="1400" dirty="0"/>
-          </a:p>
-        </p:txBody>
-      </p:sp>
-      <p:sp>
-        <p:nvSpPr>
-          <p:cNvPr id="22" name="Text 16"/>
-          <p:cNvSpPr txBox="1"/>
-          <p:nvPr/>
-        </p:nvSpPr>
-        <p:spPr>
-          <a:xfrm>
-            <a:off x="7223760" y="2240280"/>
-            <a:ext cx="1609344" cy="1097280"/>
-          </a:xfrm>
-          <a:prstGeom prst="rect">
-            <a:avLst/>
-          </a:prstGeom>
-          <a:noFill/>
-          <a:ln/>
-        </p:spPr>
-        <p:txBody>
-          <a:bodyPr wrap="square" lIns="0" tIns="0" rIns="0" bIns="0" rtlCol="0" anchor="t"/>
-          <a:lstStyle/>
-          <a:p>
-            <a:pPr indent="0" marL="0">
-              <a:lnSpc>
-                <a:spcPct val="110000"/>
-              </a:lnSpc>
-              <a:buNone/>
-            </a:pPr>
-            <a:r>
-              <a:rPr lang="en-US" sz="1150" dirty="0">
-                <a:solidFill>
-                  <a:srgbClr val="F0F6FC"/>
-                </a:solidFill>
-                <a:latin typeface="Calibri" pitchFamily="34" charset="0"/>
-                <a:ea typeface="Calibri" pitchFamily="34" charset="-122"/>
-                <a:cs typeface="Calibri" pitchFamily="34" charset="-120"/>
-              </a:rPr>
-              <a:t>Reduzir o número de viciados e proteger os jovens antes da primeira aposta</a:t>
-            </a:r>
-            <a:endParaRPr lang="en-US" sz="1150" dirty="0"/>
-          </a:p>
-        </p:txBody>
-      </p:sp>
-      <p:sp>
-        <p:nvSpPr>
-          <p:cNvPr id="23" name="Shape 17"/>
-          <p:cNvSpPr/>
-          <p:nvPr/>
-        </p:nvSpPr>
-        <p:spPr>
-          <a:xfrm>
-            <a:off x="640080" y="3703320"/>
-            <a:ext cx="7863840" cy="1005840"/>
-          </a:xfrm>
-          <a:prstGeom prst="roundRect">
-            <a:avLst>
-              <a:gd name="adj" fmla="val 9091"/>
-            </a:avLst>
-          </a:prstGeom>
-          <a:solidFill>
-            <a:srgbClr val="1C2431"/>
-          </a:solidFill>
-          <a:ln/>
-        </p:spPr>
-      </p:sp>
-      <p:sp>
-        <p:nvSpPr>
-          <p:cNvPr id="24" name="Shape 18"/>
-          <p:cNvSpPr/>
-          <p:nvPr/>
-        </p:nvSpPr>
-        <p:spPr>
-          <a:xfrm>
-            <a:off x="822960" y="3950208"/>
-            <a:ext cx="502920" cy="502920"/>
-          </a:xfrm>
-          <a:prstGeom prst="ellipse">
-            <a:avLst/>
-          </a:prstGeom>
-          <a:solidFill>
-            <a:srgbClr val="161C26"/>
-          </a:solidFill>
-          <a:ln/>
-        </p:spPr>
-      </p:sp>
-      <p:pic>
-        <p:nvPicPr>
-          <p:cNvPr id="25" name="Image 4" descr="preencoded.png">    </p:cNvPr>
-          <p:cNvPicPr>
-            <a:picLocks noChangeAspect="1"/>
-          </p:cNvPicPr>
-          <p:nvPr/>
-        </p:nvPicPr>
-        <p:blipFill>
-          <a:blip r:embed="rId5"/>
-          <a:stretch>
-            <a:fillRect/>
-          </a:stretch>
-        </p:blipFill>
-        <p:spPr>
-          <a:xfrm>
-            <a:off x="953719" y="4080967"/>
-            <a:ext cx="241402" cy="241402"/>
-          </a:xfrm>
-          <a:prstGeom prst="rect">
-            <a:avLst/>
-          </a:prstGeom>
-        </p:spPr>
-      </p:pic>
-      <p:sp>
-        <p:nvSpPr>
-          <p:cNvPr id="26" name="Text 19"/>
-          <p:cNvSpPr txBox="1"/>
-          <p:nvPr/>
-        </p:nvSpPr>
-        <p:spPr>
-          <a:xfrm>
-            <a:off x="1508760" y="3794760"/>
-            <a:ext cx="6812280" cy="822960"/>
-          </a:xfrm>
-          <a:prstGeom prst="rect">
-            <a:avLst/>
-          </a:prstGeom>
-          <a:noFill/>
-          <a:ln/>
-        </p:spPr>
-        <p:txBody>
-          <a:bodyPr wrap="square" lIns="0" tIns="0" rIns="0" bIns="0" rtlCol="0" anchor="ctr"/>
-          <a:lstStyle/>
-          <a:p>
-            <a:pPr indent="0" marL="0">
-              <a:lnSpc>
-                <a:spcPct val="110000"/>
-              </a:lnSpc>
-              <a:buNone/>
-            </a:pPr>
-            <a:r>
-              <a:rPr lang="en-US" sz="1300" b="1" dirty="0">
-                <a:solidFill>
-                  <a:srgbClr val="3FB950"/>
-                </a:solidFill>
-                <a:latin typeface="Calibri" pitchFamily="34" charset="0"/>
-                <a:ea typeface="Calibri" pitchFamily="34" charset="-122"/>
-                <a:cs typeface="Calibri" pitchFamily="34" charset="-120"/>
-              </a:rPr>
-              <a:t>DETALHAMENTO: </a:t>
-            </a:r>
-            <a:pPr indent="0" marL="0">
-              <a:lnSpc>
-                <a:spcPct val="110000"/>
-              </a:lnSpc>
-              <a:buNone/>
-            </a:pPr>
-            <a:r>
-              <a:rPr lang="en-US" sz="1300" dirty="0">
-                <a:solidFill>
-                  <a:srgbClr val="F0F6FC"/>
-                </a:solidFill>
-                <a:latin typeface="Calibri" pitchFamily="34" charset="0"/>
-                <a:ea typeface="Calibri" pitchFamily="34" charset="-122"/>
-                <a:cs typeface="Calibri" pitchFamily="34" charset="-120"/>
-              </a:rPr>
-              <a:t>restringir a publicidade de bets (como já foi feito com o cigarro), criar cadastro nacional de autoexclusão e bloquear o cadastro de menores com verificação real de identidade.</a:t>
-            </a:r>
-            <a:endParaRPr lang="en-US" sz="1300" dirty="0"/>
-          </a:p>
-        </p:txBody>
-      </p:sp>
+      <p:graphicFrame>
+        <p:nvGraphicFramePr>
+          <p:cNvPr id="11" name="Table 0"/>
+          <p:cNvGraphicFramePr>
+            <a:graphicFrameLocks noGrp="1"/>
+          </p:cNvGraphicFramePr>
+          <p:nvPr>
+            <p:extLst>
+              <p:ext uri="{D42A27DB-BD31-4B8C-83A1-F6EECF244321}">
+                <p14:modId xmlns:p14="http://schemas.microsoft.com/office/powerpoint/2010/main" val="1579011935"/>
+              </p:ext>
+            </p:extLst>
+          </p:nvPr>
+        </p:nvGraphicFramePr>
+        <p:xfrm>
+          <a:off x="640080" y="1234440"/>
+          <a:ext cx="7863840" cy="914400"/>
+        </p:xfrm>
+        <a:graphic>
+          <a:graphicData uri="http://schemas.openxmlformats.org/drawingml/2006/table">
+            <a:tbl>
+              <a:tblPr/>
+              <a:tblGrid>
+                <a:gridCol w="1737360"/>
+                <a:gridCol w="6126480"/>
+              </a:tblGrid>
+              <a:tr h="566928">
+                <a:tc>
+                  <a:txBody>
+                    <a:bodyPr/>
+                    <a:lstStyle/>
+                    <a:p>
+                      <a:pPr indent="0" marL="0">
+                        <a:buNone/>
+                      </a:pPr>
+                      <a:r>
+                        <a:rPr lang="en-US" sz="1300" b="1" dirty="0">
+                          <a:solidFill>
+                            <a:srgbClr val="FFFFFF"/>
+                          </a:solidFill>
+                          <a:latin typeface="Calibri" pitchFamily="34" charset="0"/>
+                          <a:ea typeface="Calibri" pitchFamily="34" charset="-122"/>
+                          <a:cs typeface="Calibri" pitchFamily="34" charset="-120"/>
+                        </a:rPr>
+                        <a:t>Elemento</a:t>
+                      </a:r>
+                      <a:endParaRPr lang="en-US" sz="1300" dirty="0">
+                        <a:latin typeface="Calibri" charset="0"/>
+                        <a:ea typeface="Calibri" charset="0"/>
+                        <a:cs typeface="Calibri" charset="0"/>
+                      </a:endParaRPr>
+                    </a:p>
+                  </a:txBody>
+                  <a:tcPr marL="91440" marR="91440" marT="45720" marB="45720" anchor="ctr">
+                    <a:lnL w="9525" cap="flat" cmpd="sng" algn="ctr">
+                      <a:solidFill>
+                        <a:srgbClr val="BFBFBF"/>
+                      </a:solidFill>
+                      <a:prstDash val="solid"/>
+                      <a:round/>
+                      <a:headEnd type="none" w="med" len="med"/>
+                      <a:tailEnd type="none" w="med" len="med"/>
+                    </a:lnL>
+                    <a:lnR w="9525" cap="flat" cmpd="sng" algn="ctr">
+                      <a:solidFill>
+                        <a:srgbClr val="BFBFBF"/>
+                      </a:solidFill>
+                      <a:prstDash val="solid"/>
+                      <a:round/>
+                      <a:headEnd type="none" w="med" len="med"/>
+                      <a:tailEnd type="none" w="med" len="med"/>
+                    </a:lnR>
+                    <a:lnT w="9525" cap="flat" cmpd="sng" algn="ctr">
+                      <a:solidFill>
+                        <a:srgbClr val="BFBFBF"/>
+                      </a:solidFill>
+                      <a:prstDash val="solid"/>
+                      <a:round/>
+                      <a:headEnd type="none" w="med" len="med"/>
+                      <a:tailEnd type="none" w="med" len="med"/>
+                    </a:lnT>
+                    <a:lnB w="9525" cap="flat" cmpd="sng" algn="ctr">
+                      <a:solidFill>
+                        <a:srgbClr val="BFBFBF"/>
+                      </a:solidFill>
+                      <a:prstDash val="solid"/>
+                      <a:round/>
+                      <a:headEnd type="none" w="med" len="med"/>
+                      <a:tailEnd type="none" w="med" len="med"/>
+                    </a:lnB>
+                    <a:solidFill>
+                      <a:srgbClr val="1F3864"/>
+                    </a:solidFill>
+                  </a:tcPr>
+                </a:tc>
+                <a:tc>
+                  <a:txBody>
+                    <a:bodyPr/>
+                    <a:lstStyle/>
+                    <a:p>
+                      <a:pPr indent="0" marL="0">
+                        <a:buNone/>
+                      </a:pPr>
+                      <a:r>
+                        <a:rPr lang="en-US" sz="1300" b="1" dirty="0">
+                          <a:solidFill>
+                            <a:srgbClr val="FFFFFF"/>
+                          </a:solidFill>
+                          <a:latin typeface="Calibri" pitchFamily="34" charset="0"/>
+                          <a:ea typeface="Calibri" pitchFamily="34" charset="-122"/>
+                          <a:cs typeface="Calibri" pitchFamily="34" charset="-120"/>
+                        </a:rPr>
+                        <a:t>O que propomos</a:t>
+                      </a:r>
+                      <a:endParaRPr lang="en-US" sz="1300" dirty="0">
+                        <a:latin typeface="Calibri" charset="0"/>
+                        <a:ea typeface="Calibri" charset="0"/>
+                        <a:cs typeface="Calibri" charset="0"/>
+                      </a:endParaRPr>
+                    </a:p>
+                  </a:txBody>
+                  <a:tcPr marL="91440" marR="91440" marT="45720" marB="45720" anchor="ctr">
+                    <a:lnL w="9525" cap="flat" cmpd="sng" algn="ctr">
+                      <a:solidFill>
+                        <a:srgbClr val="BFBFBF"/>
+                      </a:solidFill>
+                      <a:prstDash val="solid"/>
+                      <a:round/>
+                      <a:headEnd type="none" w="med" len="med"/>
+                      <a:tailEnd type="none" w="med" len="med"/>
+                    </a:lnL>
+                    <a:lnR w="9525" cap="flat" cmpd="sng" algn="ctr">
+                      <a:solidFill>
+                        <a:srgbClr val="BFBFBF"/>
+                      </a:solidFill>
+                      <a:prstDash val="solid"/>
+                      <a:round/>
+                      <a:headEnd type="none" w="med" len="med"/>
+                      <a:tailEnd type="none" w="med" len="med"/>
+                    </a:lnR>
+                    <a:lnT w="9525" cap="flat" cmpd="sng" algn="ctr">
+                      <a:solidFill>
+                        <a:srgbClr val="BFBFBF"/>
+                      </a:solidFill>
+                      <a:prstDash val="solid"/>
+                      <a:round/>
+                      <a:headEnd type="none" w="med" len="med"/>
+                      <a:tailEnd type="none" w="med" len="med"/>
+                    </a:lnT>
+                    <a:lnB w="9525" cap="flat" cmpd="sng" algn="ctr">
+                      <a:solidFill>
+                        <a:srgbClr val="BFBFBF"/>
+                      </a:solidFill>
+                      <a:prstDash val="solid"/>
+                      <a:round/>
+                      <a:headEnd type="none" w="med" len="med"/>
+                      <a:tailEnd type="none" w="med" len="med"/>
+                    </a:lnB>
+                    <a:solidFill>
+                      <a:srgbClr val="1F3864"/>
+                    </a:solidFill>
+                  </a:tcPr>
+                </a:tc>
+              </a:tr>
+              <a:tr h="566928">
+                <a:tc>
+                  <a:txBody>
+                    <a:bodyPr/>
+                    <a:lstStyle/>
+                    <a:p>
+                      <a:pPr indent="0" marL="0">
+                        <a:buNone/>
+                      </a:pPr>
+                      <a:r>
+                        <a:rPr lang="en-US" sz="1250" b="1" dirty="0">
+                          <a:solidFill>
+                            <a:srgbClr val="1F3864"/>
+                          </a:solidFill>
+                          <a:latin typeface="Calibri" pitchFamily="34" charset="0"/>
+                          <a:ea typeface="Calibri" pitchFamily="34" charset="-122"/>
+                          <a:cs typeface="Calibri" pitchFamily="34" charset="-120"/>
+                        </a:rPr>
+                        <a:t>Agente</a:t>
+                      </a:r>
+                      <a:endParaRPr lang="en-US" sz="1250" dirty="0">
+                        <a:latin typeface="Calibri" charset="0"/>
+                        <a:ea typeface="Calibri" charset="0"/>
+                        <a:cs typeface="Calibri" charset="0"/>
+                      </a:endParaRPr>
+                    </a:p>
+                  </a:txBody>
+                  <a:tcPr marL="91440" marR="91440" marT="45720" marB="45720" anchor="ctr">
+                    <a:lnL w="9525" cap="flat" cmpd="sng" algn="ctr">
+                      <a:solidFill>
+                        <a:srgbClr val="BFBFBF"/>
+                      </a:solidFill>
+                      <a:prstDash val="solid"/>
+                      <a:round/>
+                      <a:headEnd type="none" w="med" len="med"/>
+                      <a:tailEnd type="none" w="med" len="med"/>
+                    </a:lnL>
+                    <a:lnR w="9525" cap="flat" cmpd="sng" algn="ctr">
+                      <a:solidFill>
+                        <a:srgbClr val="BFBFBF"/>
+                      </a:solidFill>
+                      <a:prstDash val="solid"/>
+                      <a:round/>
+                      <a:headEnd type="none" w="med" len="med"/>
+                      <a:tailEnd type="none" w="med" len="med"/>
+                    </a:lnR>
+                    <a:lnT w="9525" cap="flat" cmpd="sng" algn="ctr">
+                      <a:solidFill>
+                        <a:srgbClr val="BFBFBF"/>
+                      </a:solidFill>
+                      <a:prstDash val="solid"/>
+                      <a:round/>
+                      <a:headEnd type="none" w="med" len="med"/>
+                      <a:tailEnd type="none" w="med" len="med"/>
+                    </a:lnT>
+                    <a:lnB w="9525" cap="flat" cmpd="sng" algn="ctr">
+                      <a:solidFill>
+                        <a:srgbClr val="BFBFBF"/>
+                      </a:solidFill>
+                      <a:prstDash val="solid"/>
+                      <a:round/>
+                      <a:headEnd type="none" w="med" len="med"/>
+                      <a:tailEnd type="none" w="med" len="med"/>
+                    </a:lnB>
+                  </a:tcPr>
+                </a:tc>
+                <a:tc>
+                  <a:txBody>
+                    <a:bodyPr/>
+                    <a:lstStyle/>
+                    <a:p>
+                      <a:pPr indent="0" marL="0">
+                        <a:buNone/>
+                      </a:pPr>
+                      <a:r>
+                        <a:rPr lang="en-US" sz="1250" dirty="0">
+                          <a:solidFill>
+                            <a:srgbClr val="262626"/>
+                          </a:solidFill>
+                          <a:latin typeface="Calibri" pitchFamily="34" charset="0"/>
+                          <a:ea typeface="Calibri" pitchFamily="34" charset="-122"/>
+                          <a:cs typeface="Calibri" pitchFamily="34" charset="-120"/>
+                        </a:rPr>
+                        <a:t>Ministério da Saúde e escolas, em parceria com as prefeituras</a:t>
+                      </a:r>
+                      <a:endParaRPr lang="en-US" sz="1250" dirty="0">
+                        <a:latin typeface="Calibri" charset="0"/>
+                        <a:ea typeface="Calibri" charset="0"/>
+                        <a:cs typeface="Calibri" charset="0"/>
+                      </a:endParaRPr>
+                    </a:p>
+                  </a:txBody>
+                  <a:tcPr marL="91440" marR="91440" marT="45720" marB="45720" anchor="ctr">
+                    <a:lnL w="9525" cap="flat" cmpd="sng" algn="ctr">
+                      <a:solidFill>
+                        <a:srgbClr val="BFBFBF"/>
+                      </a:solidFill>
+                      <a:prstDash val="solid"/>
+                      <a:round/>
+                      <a:headEnd type="none" w="med" len="med"/>
+                      <a:tailEnd type="none" w="med" len="med"/>
+                    </a:lnL>
+                    <a:lnR w="9525" cap="flat" cmpd="sng" algn="ctr">
+                      <a:solidFill>
+                        <a:srgbClr val="BFBFBF"/>
+                      </a:solidFill>
+                      <a:prstDash val="solid"/>
+                      <a:round/>
+                      <a:headEnd type="none" w="med" len="med"/>
+                      <a:tailEnd type="none" w="med" len="med"/>
+                    </a:lnR>
+                    <a:lnT w="9525" cap="flat" cmpd="sng" algn="ctr">
+                      <a:solidFill>
+                        <a:srgbClr val="BFBFBF"/>
+                      </a:solidFill>
+                      <a:prstDash val="solid"/>
+                      <a:round/>
+                      <a:headEnd type="none" w="med" len="med"/>
+                      <a:tailEnd type="none" w="med" len="med"/>
+                    </a:lnT>
+                    <a:lnB w="9525" cap="flat" cmpd="sng" algn="ctr">
+                      <a:solidFill>
+                        <a:srgbClr val="BFBFBF"/>
+                      </a:solidFill>
+                      <a:prstDash val="solid"/>
+                      <a:round/>
+                      <a:headEnd type="none" w="med" len="med"/>
+                      <a:tailEnd type="none" w="med" len="med"/>
+                    </a:lnB>
+                  </a:tcPr>
+                </a:tc>
+              </a:tr>
+              <a:tr h="566928">
+                <a:tc>
+                  <a:txBody>
+                    <a:bodyPr/>
+                    <a:lstStyle/>
+                    <a:p>
+                      <a:pPr indent="0" marL="0">
+                        <a:buNone/>
+                      </a:pPr>
+                      <a:r>
+                        <a:rPr lang="en-US" sz="1250" b="1" dirty="0">
+                          <a:solidFill>
+                            <a:srgbClr val="1F3864"/>
+                          </a:solidFill>
+                          <a:latin typeface="Calibri" pitchFamily="34" charset="0"/>
+                          <a:ea typeface="Calibri" pitchFamily="34" charset="-122"/>
+                          <a:cs typeface="Calibri" pitchFamily="34" charset="-120"/>
+                        </a:rPr>
+                        <a:t>Ação</a:t>
+                      </a:r>
+                      <a:endParaRPr lang="en-US" sz="1250" dirty="0">
+                        <a:latin typeface="Calibri" charset="0"/>
+                        <a:ea typeface="Calibri" charset="0"/>
+                        <a:cs typeface="Calibri" charset="0"/>
+                      </a:endParaRPr>
+                    </a:p>
+                  </a:txBody>
+                  <a:tcPr marL="91440" marR="91440" marT="45720" marB="45720" anchor="ctr">
+                    <a:lnL w="9525" cap="flat" cmpd="sng" algn="ctr">
+                      <a:solidFill>
+                        <a:srgbClr val="BFBFBF"/>
+                      </a:solidFill>
+                      <a:prstDash val="solid"/>
+                      <a:round/>
+                      <a:headEnd type="none" w="med" len="med"/>
+                      <a:tailEnd type="none" w="med" len="med"/>
+                    </a:lnL>
+                    <a:lnR w="9525" cap="flat" cmpd="sng" algn="ctr">
+                      <a:solidFill>
+                        <a:srgbClr val="BFBFBF"/>
+                      </a:solidFill>
+                      <a:prstDash val="solid"/>
+                      <a:round/>
+                      <a:headEnd type="none" w="med" len="med"/>
+                      <a:tailEnd type="none" w="med" len="med"/>
+                    </a:lnR>
+                    <a:lnT w="9525" cap="flat" cmpd="sng" algn="ctr">
+                      <a:solidFill>
+                        <a:srgbClr val="BFBFBF"/>
+                      </a:solidFill>
+                      <a:prstDash val="solid"/>
+                      <a:round/>
+                      <a:headEnd type="none" w="med" len="med"/>
+                      <a:tailEnd type="none" w="med" len="med"/>
+                    </a:lnT>
+                    <a:lnB w="9525" cap="flat" cmpd="sng" algn="ctr">
+                      <a:solidFill>
+                        <a:srgbClr val="BFBFBF"/>
+                      </a:solidFill>
+                      <a:prstDash val="solid"/>
+                      <a:round/>
+                      <a:headEnd type="none" w="med" len="med"/>
+                      <a:tailEnd type="none" w="med" len="med"/>
+                    </a:lnB>
+                  </a:tcPr>
+                </a:tc>
+                <a:tc>
+                  <a:txBody>
+                    <a:bodyPr/>
+                    <a:lstStyle/>
+                    <a:p>
+                      <a:pPr indent="0" marL="0">
+                        <a:buNone/>
+                      </a:pPr>
+                      <a:r>
+                        <a:rPr lang="en-US" sz="1250" dirty="0">
+                          <a:solidFill>
+                            <a:srgbClr val="262626"/>
+                          </a:solidFill>
+                          <a:latin typeface="Calibri" pitchFamily="34" charset="0"/>
+                          <a:ea typeface="Calibri" pitchFamily="34" charset="-122"/>
+                          <a:cs typeface="Calibri" pitchFamily="34" charset="-120"/>
+                        </a:rPr>
+                        <a:t>Campanha nacional de conscientização + ampliação do tratamento gratuito nos CAPS/SUS</a:t>
+                      </a:r>
+                      <a:endParaRPr lang="en-US" sz="1250" dirty="0">
+                        <a:latin typeface="Calibri" charset="0"/>
+                        <a:ea typeface="Calibri" charset="0"/>
+                        <a:cs typeface="Calibri" charset="0"/>
+                      </a:endParaRPr>
+                    </a:p>
+                  </a:txBody>
+                  <a:tcPr marL="91440" marR="91440" marT="45720" marB="45720" anchor="ctr">
+                    <a:lnL w="9525" cap="flat" cmpd="sng" algn="ctr">
+                      <a:solidFill>
+                        <a:srgbClr val="BFBFBF"/>
+                      </a:solidFill>
+                      <a:prstDash val="solid"/>
+                      <a:round/>
+                      <a:headEnd type="none" w="med" len="med"/>
+                      <a:tailEnd type="none" w="med" len="med"/>
+                    </a:lnL>
+                    <a:lnR w="9525" cap="flat" cmpd="sng" algn="ctr">
+                      <a:solidFill>
+                        <a:srgbClr val="BFBFBF"/>
+                      </a:solidFill>
+                      <a:prstDash val="solid"/>
+                      <a:round/>
+                      <a:headEnd type="none" w="med" len="med"/>
+                      <a:tailEnd type="none" w="med" len="med"/>
+                    </a:lnR>
+                    <a:lnT w="9525" cap="flat" cmpd="sng" algn="ctr">
+                      <a:solidFill>
+                        <a:srgbClr val="BFBFBF"/>
+                      </a:solidFill>
+                      <a:prstDash val="solid"/>
+                      <a:round/>
+                      <a:headEnd type="none" w="med" len="med"/>
+                      <a:tailEnd type="none" w="med" len="med"/>
+                    </a:lnT>
+                    <a:lnB w="9525" cap="flat" cmpd="sng" algn="ctr">
+                      <a:solidFill>
+                        <a:srgbClr val="BFBFBF"/>
+                      </a:solidFill>
+                      <a:prstDash val="solid"/>
+                      <a:round/>
+                      <a:headEnd type="none" w="med" len="med"/>
+                      <a:tailEnd type="none" w="med" len="med"/>
+                    </a:lnB>
+                  </a:tcPr>
+                </a:tc>
+              </a:tr>
+              <a:tr h="566928">
+                <a:tc>
+                  <a:txBody>
+                    <a:bodyPr/>
+                    <a:lstStyle/>
+                    <a:p>
+                      <a:pPr indent="0" marL="0">
+                        <a:buNone/>
+                      </a:pPr>
+                      <a:r>
+                        <a:rPr lang="en-US" sz="1250" b="1" dirty="0">
+                          <a:solidFill>
+                            <a:srgbClr val="1F3864"/>
+                          </a:solidFill>
+                          <a:latin typeface="Calibri" pitchFamily="34" charset="0"/>
+                          <a:ea typeface="Calibri" pitchFamily="34" charset="-122"/>
+                          <a:cs typeface="Calibri" pitchFamily="34" charset="-120"/>
+                        </a:rPr>
+                        <a:t>Meio</a:t>
+                      </a:r>
+                      <a:endParaRPr lang="en-US" sz="1250" dirty="0">
+                        <a:latin typeface="Calibri" charset="0"/>
+                        <a:ea typeface="Calibri" charset="0"/>
+                        <a:cs typeface="Calibri" charset="0"/>
+                      </a:endParaRPr>
+                    </a:p>
+                  </a:txBody>
+                  <a:tcPr marL="91440" marR="91440" marT="45720" marB="45720" anchor="ctr">
+                    <a:lnL w="9525" cap="flat" cmpd="sng" algn="ctr">
+                      <a:solidFill>
+                        <a:srgbClr val="BFBFBF"/>
+                      </a:solidFill>
+                      <a:prstDash val="solid"/>
+                      <a:round/>
+                      <a:headEnd type="none" w="med" len="med"/>
+                      <a:tailEnd type="none" w="med" len="med"/>
+                    </a:lnL>
+                    <a:lnR w="9525" cap="flat" cmpd="sng" algn="ctr">
+                      <a:solidFill>
+                        <a:srgbClr val="BFBFBF"/>
+                      </a:solidFill>
+                      <a:prstDash val="solid"/>
+                      <a:round/>
+                      <a:headEnd type="none" w="med" len="med"/>
+                      <a:tailEnd type="none" w="med" len="med"/>
+                    </a:lnR>
+                    <a:lnT w="9525" cap="flat" cmpd="sng" algn="ctr">
+                      <a:solidFill>
+                        <a:srgbClr val="BFBFBF"/>
+                      </a:solidFill>
+                      <a:prstDash val="solid"/>
+                      <a:round/>
+                      <a:headEnd type="none" w="med" len="med"/>
+                      <a:tailEnd type="none" w="med" len="med"/>
+                    </a:lnT>
+                    <a:lnB w="9525" cap="flat" cmpd="sng" algn="ctr">
+                      <a:solidFill>
+                        <a:srgbClr val="BFBFBF"/>
+                      </a:solidFill>
+                      <a:prstDash val="solid"/>
+                      <a:round/>
+                      <a:headEnd type="none" w="med" len="med"/>
+                      <a:tailEnd type="none" w="med" len="med"/>
+                    </a:lnB>
+                  </a:tcPr>
+                </a:tc>
+                <a:tc>
+                  <a:txBody>
+                    <a:bodyPr/>
+                    <a:lstStyle/>
+                    <a:p>
+                      <a:pPr indent="0" marL="0">
+                        <a:buNone/>
+                      </a:pPr>
+                      <a:r>
+                        <a:rPr lang="en-US" sz="1250" dirty="0">
+                          <a:solidFill>
+                            <a:srgbClr val="262626"/>
+                          </a:solidFill>
+                          <a:latin typeface="Calibri" pitchFamily="34" charset="0"/>
+                          <a:ea typeface="Calibri" pitchFamily="34" charset="-122"/>
+                          <a:cs typeface="Calibri" pitchFamily="34" charset="-120"/>
+                        </a:rPr>
+                        <a:t>Vídeos informativos nas redes sociais, palestras nas escolas e divulgação dos canais de ajuda</a:t>
+                      </a:r>
+                      <a:endParaRPr lang="en-US" sz="1250" dirty="0">
+                        <a:latin typeface="Calibri" charset="0"/>
+                        <a:ea typeface="Calibri" charset="0"/>
+                        <a:cs typeface="Calibri" charset="0"/>
+                      </a:endParaRPr>
+                    </a:p>
+                  </a:txBody>
+                  <a:tcPr marL="91440" marR="91440" marT="45720" marB="45720" anchor="ctr">
+                    <a:lnL w="9525" cap="flat" cmpd="sng" algn="ctr">
+                      <a:solidFill>
+                        <a:srgbClr val="BFBFBF"/>
+                      </a:solidFill>
+                      <a:prstDash val="solid"/>
+                      <a:round/>
+                      <a:headEnd type="none" w="med" len="med"/>
+                      <a:tailEnd type="none" w="med" len="med"/>
+                    </a:lnL>
+                    <a:lnR w="9525" cap="flat" cmpd="sng" algn="ctr">
+                      <a:solidFill>
+                        <a:srgbClr val="BFBFBF"/>
+                      </a:solidFill>
+                      <a:prstDash val="solid"/>
+                      <a:round/>
+                      <a:headEnd type="none" w="med" len="med"/>
+                      <a:tailEnd type="none" w="med" len="med"/>
+                    </a:lnR>
+                    <a:lnT w="9525" cap="flat" cmpd="sng" algn="ctr">
+                      <a:solidFill>
+                        <a:srgbClr val="BFBFBF"/>
+                      </a:solidFill>
+                      <a:prstDash val="solid"/>
+                      <a:round/>
+                      <a:headEnd type="none" w="med" len="med"/>
+                      <a:tailEnd type="none" w="med" len="med"/>
+                    </a:lnT>
+                    <a:lnB w="9525" cap="flat" cmpd="sng" algn="ctr">
+                      <a:solidFill>
+                        <a:srgbClr val="BFBFBF"/>
+                      </a:solidFill>
+                      <a:prstDash val="solid"/>
+                      <a:round/>
+                      <a:headEnd type="none" w="med" len="med"/>
+                      <a:tailEnd type="none" w="med" len="med"/>
+                    </a:lnB>
+                  </a:tcPr>
+                </a:tc>
+              </a:tr>
+              <a:tr h="566928">
+                <a:tc>
+                  <a:txBody>
+                    <a:bodyPr/>
+                    <a:lstStyle/>
+                    <a:p>
+                      <a:pPr indent="0" marL="0">
+                        <a:buNone/>
+                      </a:pPr>
+                      <a:r>
+                        <a:rPr lang="en-US" sz="1250" b="1" dirty="0">
+                          <a:solidFill>
+                            <a:srgbClr val="1F3864"/>
+                          </a:solidFill>
+                          <a:latin typeface="Calibri" pitchFamily="34" charset="0"/>
+                          <a:ea typeface="Calibri" pitchFamily="34" charset="-122"/>
+                          <a:cs typeface="Calibri" pitchFamily="34" charset="-120"/>
+                        </a:rPr>
+                        <a:t>Finalidade</a:t>
+                      </a:r>
+                      <a:endParaRPr lang="en-US" sz="1250" dirty="0">
+                        <a:latin typeface="Calibri" charset="0"/>
+                        <a:ea typeface="Calibri" charset="0"/>
+                        <a:cs typeface="Calibri" charset="0"/>
+                      </a:endParaRPr>
+                    </a:p>
+                  </a:txBody>
+                  <a:tcPr marL="91440" marR="91440" marT="45720" marB="45720" anchor="ctr">
+                    <a:lnL w="9525" cap="flat" cmpd="sng" algn="ctr">
+                      <a:solidFill>
+                        <a:srgbClr val="BFBFBF"/>
+                      </a:solidFill>
+                      <a:prstDash val="solid"/>
+                      <a:round/>
+                      <a:headEnd type="none" w="med" len="med"/>
+                      <a:tailEnd type="none" w="med" len="med"/>
+                    </a:lnL>
+                    <a:lnR w="9525" cap="flat" cmpd="sng" algn="ctr">
+                      <a:solidFill>
+                        <a:srgbClr val="BFBFBF"/>
+                      </a:solidFill>
+                      <a:prstDash val="solid"/>
+                      <a:round/>
+                      <a:headEnd type="none" w="med" len="med"/>
+                      <a:tailEnd type="none" w="med" len="med"/>
+                    </a:lnR>
+                    <a:lnT w="9525" cap="flat" cmpd="sng" algn="ctr">
+                      <a:solidFill>
+                        <a:srgbClr val="BFBFBF"/>
+                      </a:solidFill>
+                      <a:prstDash val="solid"/>
+                      <a:round/>
+                      <a:headEnd type="none" w="med" len="med"/>
+                      <a:tailEnd type="none" w="med" len="med"/>
+                    </a:lnT>
+                    <a:lnB w="9525" cap="flat" cmpd="sng" algn="ctr">
+                      <a:solidFill>
+                        <a:srgbClr val="BFBFBF"/>
+                      </a:solidFill>
+                      <a:prstDash val="solid"/>
+                      <a:round/>
+                      <a:headEnd type="none" w="med" len="med"/>
+                      <a:tailEnd type="none" w="med" len="med"/>
+                    </a:lnB>
+                  </a:tcPr>
+                </a:tc>
+                <a:tc>
+                  <a:txBody>
+                    <a:bodyPr/>
+                    <a:lstStyle/>
+                    <a:p>
+                      <a:pPr indent="0" marL="0">
+                        <a:buNone/>
+                      </a:pPr>
+                      <a:r>
+                        <a:rPr lang="en-US" sz="1250" dirty="0">
+                          <a:solidFill>
+                            <a:srgbClr val="262626"/>
+                          </a:solidFill>
+                          <a:latin typeface="Calibri" pitchFamily="34" charset="0"/>
+                          <a:ea typeface="Calibri" pitchFamily="34" charset="-122"/>
+                          <a:cs typeface="Calibri" pitchFamily="34" charset="-120"/>
+                        </a:rPr>
+                        <a:t>Reduzir o número de viciados e proteger os jovens antes da primeira aposta</a:t>
+                      </a:r>
+                      <a:endParaRPr lang="en-US" sz="1250" dirty="0">
+                        <a:latin typeface="Calibri" charset="0"/>
+                        <a:ea typeface="Calibri" charset="0"/>
+                        <a:cs typeface="Calibri" charset="0"/>
+                      </a:endParaRPr>
+                    </a:p>
+                  </a:txBody>
+                  <a:tcPr marL="91440" marR="91440" marT="45720" marB="45720" anchor="ctr">
+                    <a:lnL w="9525" cap="flat" cmpd="sng" algn="ctr">
+                      <a:solidFill>
+                        <a:srgbClr val="BFBFBF"/>
+                      </a:solidFill>
+                      <a:prstDash val="solid"/>
+                      <a:round/>
+                      <a:headEnd type="none" w="med" len="med"/>
+                      <a:tailEnd type="none" w="med" len="med"/>
+                    </a:lnL>
+                    <a:lnR w="9525" cap="flat" cmpd="sng" algn="ctr">
+                      <a:solidFill>
+                        <a:srgbClr val="BFBFBF"/>
+                      </a:solidFill>
+                      <a:prstDash val="solid"/>
+                      <a:round/>
+                      <a:headEnd type="none" w="med" len="med"/>
+                      <a:tailEnd type="none" w="med" len="med"/>
+                    </a:lnR>
+                    <a:lnT w="9525" cap="flat" cmpd="sng" algn="ctr">
+                      <a:solidFill>
+                        <a:srgbClr val="BFBFBF"/>
+                      </a:solidFill>
+                      <a:prstDash val="solid"/>
+                      <a:round/>
+                      <a:headEnd type="none" w="med" len="med"/>
+                      <a:tailEnd type="none" w="med" len="med"/>
+                    </a:lnT>
+                    <a:lnB w="9525" cap="flat" cmpd="sng" algn="ctr">
+                      <a:solidFill>
+                        <a:srgbClr val="BFBFBF"/>
+                      </a:solidFill>
+                      <a:prstDash val="solid"/>
+                      <a:round/>
+                      <a:headEnd type="none" w="med" len="med"/>
+                      <a:tailEnd type="none" w="med" len="med"/>
+                    </a:lnB>
+                  </a:tcPr>
+                </a:tc>
+              </a:tr>
+              <a:tr h="566928">
+                <a:tc>
+                  <a:txBody>
+                    <a:bodyPr/>
+                    <a:lstStyle/>
+                    <a:p>
+                      <a:pPr indent="0" marL="0">
+                        <a:buNone/>
+                      </a:pPr>
+                      <a:r>
+                        <a:rPr lang="en-US" sz="1250" b="1" dirty="0">
+                          <a:solidFill>
+                            <a:srgbClr val="1F3864"/>
+                          </a:solidFill>
+                          <a:latin typeface="Calibri" pitchFamily="34" charset="0"/>
+                          <a:ea typeface="Calibri" pitchFamily="34" charset="-122"/>
+                          <a:cs typeface="Calibri" pitchFamily="34" charset="-120"/>
+                        </a:rPr>
+                        <a:t>Detalhamento</a:t>
+                      </a:r>
+                      <a:endParaRPr lang="en-US" sz="1250" dirty="0">
+                        <a:latin typeface="Calibri" charset="0"/>
+                        <a:ea typeface="Calibri" charset="0"/>
+                        <a:cs typeface="Calibri" charset="0"/>
+                      </a:endParaRPr>
+                    </a:p>
+                  </a:txBody>
+                  <a:tcPr marL="91440" marR="91440" marT="45720" marB="45720" anchor="ctr">
+                    <a:lnL w="9525" cap="flat" cmpd="sng" algn="ctr">
+                      <a:solidFill>
+                        <a:srgbClr val="BFBFBF"/>
+                      </a:solidFill>
+                      <a:prstDash val="solid"/>
+                      <a:round/>
+                      <a:headEnd type="none" w="med" len="med"/>
+                      <a:tailEnd type="none" w="med" len="med"/>
+                    </a:lnL>
+                    <a:lnR w="9525" cap="flat" cmpd="sng" algn="ctr">
+                      <a:solidFill>
+                        <a:srgbClr val="BFBFBF"/>
+                      </a:solidFill>
+                      <a:prstDash val="solid"/>
+                      <a:round/>
+                      <a:headEnd type="none" w="med" len="med"/>
+                      <a:tailEnd type="none" w="med" len="med"/>
+                    </a:lnR>
+                    <a:lnT w="9525" cap="flat" cmpd="sng" algn="ctr">
+                      <a:solidFill>
+                        <a:srgbClr val="BFBFBF"/>
+                      </a:solidFill>
+                      <a:prstDash val="solid"/>
+                      <a:round/>
+                      <a:headEnd type="none" w="med" len="med"/>
+                      <a:tailEnd type="none" w="med" len="med"/>
+                    </a:lnT>
+                    <a:lnB w="9525" cap="flat" cmpd="sng" algn="ctr">
+                      <a:solidFill>
+                        <a:srgbClr val="BFBFBF"/>
+                      </a:solidFill>
+                      <a:prstDash val="solid"/>
+                      <a:round/>
+                      <a:headEnd type="none" w="med" len="med"/>
+                      <a:tailEnd type="none" w="med" len="med"/>
+                    </a:lnB>
+                  </a:tcPr>
+                </a:tc>
+                <a:tc>
+                  <a:txBody>
+                    <a:bodyPr/>
+                    <a:lstStyle/>
+                    <a:p>
+                      <a:pPr indent="0" marL="0">
+                        <a:buNone/>
+                      </a:pPr>
+                      <a:r>
+                        <a:rPr lang="en-US" sz="1250" dirty="0">
+                          <a:solidFill>
+                            <a:srgbClr val="262626"/>
+                          </a:solidFill>
+                          <a:latin typeface="Calibri" pitchFamily="34" charset="0"/>
+                          <a:ea typeface="Calibri" pitchFamily="34" charset="-122"/>
+                          <a:cs typeface="Calibri" pitchFamily="34" charset="-120"/>
+                        </a:rPr>
+                        <a:t>Restringir a publicidade de bets (como foi feito com o cigarro), criar cadastro nacional de autoexclusão e verificação real de idade no cadastro</a:t>
+                      </a:r>
+                      <a:endParaRPr lang="en-US" sz="1250" dirty="0">
+                        <a:latin typeface="Calibri" charset="0"/>
+                        <a:ea typeface="Calibri" charset="0"/>
+                        <a:cs typeface="Calibri" charset="0"/>
+                      </a:endParaRPr>
+                    </a:p>
+                  </a:txBody>
+                  <a:tcPr marL="91440" marR="91440" marT="45720" marB="45720" anchor="ctr">
+                    <a:lnL w="9525" cap="flat" cmpd="sng" algn="ctr">
+                      <a:solidFill>
+                        <a:srgbClr val="BFBFBF"/>
+                      </a:solidFill>
+                      <a:prstDash val="solid"/>
+                      <a:round/>
+                      <a:headEnd type="none" w="med" len="med"/>
+                      <a:tailEnd type="none" w="med" len="med"/>
+                    </a:lnL>
+                    <a:lnR w="9525" cap="flat" cmpd="sng" algn="ctr">
+                      <a:solidFill>
+                        <a:srgbClr val="BFBFBF"/>
+                      </a:solidFill>
+                      <a:prstDash val="solid"/>
+                      <a:round/>
+                      <a:headEnd type="none" w="med" len="med"/>
+                      <a:tailEnd type="none" w="med" len="med"/>
+                    </a:lnR>
+                    <a:lnT w="9525" cap="flat" cmpd="sng" algn="ctr">
+                      <a:solidFill>
+                        <a:srgbClr val="BFBFBF"/>
+                      </a:solidFill>
+                      <a:prstDash val="solid"/>
+                      <a:round/>
+                      <a:headEnd type="none" w="med" len="med"/>
+                      <a:tailEnd type="none" w="med" len="med"/>
+                    </a:lnT>
+                    <a:lnB w="9525" cap="flat" cmpd="sng" algn="ctr">
+                      <a:solidFill>
+                        <a:srgbClr val="BFBFBF"/>
+                      </a:solidFill>
+                      <a:prstDash val="solid"/>
+                      <a:round/>
+                      <a:headEnd type="none" w="med" len="med"/>
+                      <a:tailEnd type="none" w="med" len="med"/>
+                    </a:lnB>
+                  </a:tcPr>
+                </a:tc>
+              </a:tr>
+            </a:tbl>
+          </a:graphicData>
+        </a:graphic>
+      </p:graphicFrame>
     </p:spTree>
   </p:cSld>
   <p:clrMapOvr>
@@ -3612,7 +3701,7 @@
     <p:bg>
       <p:bgPr>
         <a:solidFill>
-          <a:srgbClr val="0D1117"/>
+          <a:srgbClr val="FFFFFF"/>
         </a:solidFill>
       </p:bgPr>
     </p:bg>
@@ -3632,58 +3721,14 @@
       </p:grpSpPr>
       <p:sp>
         <p:nvSpPr>
-          <p:cNvPr id="2" name="Shape 0"/>
-          <p:cNvSpPr/>
+          <p:cNvPr id="2" name="Text 0"/>
+          <p:cNvSpPr txBox="1"/>
           <p:nvPr/>
         </p:nvSpPr>
         <p:spPr>
           <a:xfrm>
-            <a:off x="640080" y="457200"/>
-            <a:ext cx="777240" cy="777240"/>
-          </a:xfrm>
-          <a:prstGeom prst="ellipse">
-            <a:avLst/>
-          </a:prstGeom>
-          <a:solidFill>
-            <a:srgbClr val="1C2431"/>
-          </a:solidFill>
-          <a:ln/>
-        </p:spPr>
-      </p:sp>
-      <p:pic>
-        <p:nvPicPr>
-          <p:cNvPr id="3" name="Image 0" descr="preencoded.png">    </p:cNvPr>
-          <p:cNvPicPr>
-            <a:picLocks noChangeAspect="1"/>
-          </p:cNvPicPr>
-          <p:nvPr/>
-        </p:nvPicPr>
-        <p:blipFill>
-          <a:blip r:embed="rId1"/>
-          <a:stretch>
-            <a:fillRect/>
-          </a:stretch>
-        </p:blipFill>
-        <p:spPr>
-          <a:xfrm>
-            <a:off x="842162" y="659282"/>
-            <a:ext cx="373075" cy="373075"/>
-          </a:xfrm>
-          <a:prstGeom prst="rect">
-            <a:avLst/>
-          </a:prstGeom>
-        </p:spPr>
-      </p:pic>
-      <p:sp>
-        <p:nvSpPr>
-          <p:cNvPr id="4" name="Text 1"/>
-          <p:cNvSpPr txBox="1"/>
-          <p:nvPr/>
-        </p:nvSpPr>
-        <p:spPr>
-          <a:xfrm>
-            <a:off x="1645920" y="566928"/>
-            <a:ext cx="6858000" cy="594360"/>
+            <a:off x="548640" y="320040"/>
+            <a:ext cx="8046720" cy="685800"/>
           </a:xfrm>
           <a:prstGeom prst="rect">
             <a:avLst/>
@@ -3699,30 +3744,30 @@
               <a:buNone/>
             </a:pPr>
             <a:r>
-              <a:rPr lang="en-US" sz="2600" b="1" dirty="0">
-                <a:solidFill>
-                  <a:srgbClr val="F0F6FC"/>
+              <a:rPr lang="en-US" sz="3000" b="1" dirty="0">
+                <a:solidFill>
+                  <a:srgbClr val="1F3864"/>
                 </a:solidFill>
                 <a:latin typeface="Calibri" pitchFamily="34" charset="0"/>
                 <a:ea typeface="Calibri" pitchFamily="34" charset="-122"/>
                 <a:cs typeface="Calibri" pitchFamily="34" charset="-120"/>
               </a:rPr>
-              <a:t>A CASA NÃO PRECISA VENCER SEMPRE</a:t>
-            </a:r>
-            <a:endParaRPr lang="en-US" sz="2600" dirty="0"/>
+              <a:t>Conclusão</a:t>
+            </a:r>
+            <a:endParaRPr lang="en-US" sz="3000" dirty="0"/>
           </a:p>
         </p:txBody>
       </p:sp>
       <p:sp>
         <p:nvSpPr>
-          <p:cNvPr id="5" name="Text 2"/>
+          <p:cNvPr id="3" name="Text 1"/>
           <p:cNvSpPr txBox="1"/>
           <p:nvPr/>
         </p:nvSpPr>
         <p:spPr>
           <a:xfrm>
-            <a:off x="640080" y="1463040"/>
-            <a:ext cx="7863840" cy="1051560"/>
+            <a:off x="640080" y="1188720"/>
+            <a:ext cx="7863840" cy="1508760"/>
           </a:xfrm>
           <a:prstGeom prst="rect">
             <a:avLst/>
@@ -3731,25 +3776,42 @@
           <a:ln/>
         </p:spPr>
         <p:txBody>
-          <a:bodyPr wrap="square" lIns="0" tIns="0" rIns="0" bIns="0" rtlCol="0" anchor="ctr"/>
+          <a:bodyPr wrap="square" lIns="0" tIns="0" rIns="0" bIns="0" rtlCol="0" anchor="t"/>
           <a:lstStyle/>
           <a:p>
             <a:pPr indent="0" marL="0">
               <a:lnSpc>
-                <a:spcPct val="115000"/>
+                <a:spcPct val="112000"/>
               </a:lnSpc>
               <a:buNone/>
             </a:pPr>
             <a:r>
-              <a:rPr lang="en-US" sz="1600" dirty="0">
-                <a:solidFill>
-                  <a:srgbClr val="F0F6FC"/>
+              <a:rPr lang="en-US" sz="1600" b="1" dirty="0">
+                <a:solidFill>
+                  <a:srgbClr val="C00000"/>
                 </a:solidFill>
                 <a:latin typeface="Calibri" pitchFamily="34" charset="0"/>
                 <a:ea typeface="Calibri" pitchFamily="34" charset="-122"/>
                 <a:cs typeface="Calibri" pitchFamily="34" charset="-120"/>
               </a:rPr>
-              <a:t>Vício em aposta é doença, tem tratamento gratuito no SUS/CAPS e ninguém deve enfrentar isso sozinho. Informação é a melhor aposta: por isso nosso grupo também produziu um vídeo ensinando como identificar e combater o vício em bets.</a:t>
+              <a:t>A casa não precisa vencer sempre. </a:t>
+            </a:r>
+            <a:pPr indent="0" marL="0">
+              <a:lnSpc>
+                <a:spcPct val="112000"/>
+              </a:lnSpc>
+              <a:buNone/>
+            </a:pPr>
+            <a:r>
+              <a:rPr lang="en-US" sz="1600" dirty="0">
+                <a:solidFill>
+                  <a:srgbClr val="262626"/>
+                </a:solidFill>
+                <a:latin typeface="Calibri" pitchFamily="34" charset="0"/>
+                <a:ea typeface="Calibri" pitchFamily="34" charset="-122"/>
+                <a:cs typeface="Calibri" pitchFamily="34" charset="-120"/>
+              </a:rPr>
+              <a:t>Vício em aposta é doença, tem tratamento gratuito no SUS e ninguém deve enfrentar isso sozinho. Por isso, nosso grupo também produziu um vídeo ensinando a identificar e combater o vício em bets.</a:t>
             </a:r>
             <a:endParaRPr lang="en-US" sz="1600" dirty="0"/>
           </a:p>
@@ -3757,36 +3819,14 @@
       </p:sp>
       <p:sp>
         <p:nvSpPr>
-          <p:cNvPr id="6" name="Shape 3"/>
-          <p:cNvSpPr/>
+          <p:cNvPr id="4" name="Text 2"/>
+          <p:cNvSpPr txBox="1"/>
           <p:nvPr/>
         </p:nvSpPr>
         <p:spPr>
           <a:xfrm>
-            <a:off x="640080" y="2651760"/>
-            <a:ext cx="3840480" cy="1051560"/>
-          </a:xfrm>
-          <a:prstGeom prst="roundRect">
-            <a:avLst>
-              <a:gd name="adj" fmla="val 8696"/>
-            </a:avLst>
-          </a:prstGeom>
-          <a:solidFill>
-            <a:srgbClr val="161C26"/>
-          </a:solidFill>
-          <a:ln/>
-        </p:spPr>
-      </p:sp>
-      <p:sp>
-        <p:nvSpPr>
-          <p:cNvPr id="7" name="Text 4"/>
-          <p:cNvSpPr txBox="1"/>
-          <p:nvPr/>
-        </p:nvSpPr>
-        <p:spPr>
-          <a:xfrm>
-            <a:off x="822960" y="2743200"/>
-            <a:ext cx="3474720" cy="868680"/>
+            <a:off x="640080" y="2788920"/>
+            <a:ext cx="7863840" cy="1234440"/>
           </a:xfrm>
           <a:prstGeom prst="rect">
             <a:avLst/>
@@ -3795,139 +3835,67 @@
           <a:ln/>
         </p:spPr>
         <p:txBody>
-          <a:bodyPr wrap="square" lIns="0" tIns="0" rIns="0" bIns="0" rtlCol="0" anchor="ctr"/>
+          <a:bodyPr wrap="square" lIns="0" tIns="0" rIns="0" bIns="0" rtlCol="0" anchor="t"/>
           <a:lstStyle/>
           <a:p>
-            <a:pPr indent="0" marL="0">
+            <a:pPr algn="l" marL="342900" indent="-342900">
               <a:lnSpc>
                 <a:spcPct val="110000"/>
               </a:lnSpc>
-              <a:buNone/>
+              <a:spcAft>
+                <a:spcPts val="1000"/>
+              </a:spcAft>
+              <a:buSzPct val="100000"/>
+              <a:buChar char="•"/>
             </a:pPr>
             <a:r>
-              <a:rPr lang="en-US" sz="1300" b="1" dirty="0">
-                <a:solidFill>
-                  <a:srgbClr val="3FB950"/>
+              <a:rPr lang="en-US" sz="1500" b="1" dirty="0">
+                <a:solidFill>
+                  <a:srgbClr val="262626"/>
                 </a:solidFill>
                 <a:latin typeface="Calibri" pitchFamily="34" charset="0"/>
                 <a:ea typeface="Calibri" pitchFamily="34" charset="-122"/>
                 <a:cs typeface="Calibri" pitchFamily="34" charset="-120"/>
               </a:rPr>
-              <a:t>ONDE BUSCAR AJUDA
-</a:t>
-            </a:r>
-            <a:pPr indent="0" marL="0">
+              <a:t>Onde buscar ajuda: CAPS (SUS), Jogadores Anônimos e CVV — ligue 188 (24h, gratuito)</a:t>
+            </a:r>
+            <a:endParaRPr lang="en-US" sz="1500" dirty="0"/>
+          </a:p>
+          <a:p>
+            <a:pPr algn="l" marL="342900" indent="-342900">
               <a:lnSpc>
                 <a:spcPct val="110000"/>
               </a:lnSpc>
-              <a:buNone/>
+              <a:spcAft>
+                <a:spcPts val="1000"/>
+              </a:spcAft>
+              <a:buSzPct val="100000"/>
+              <a:buChar char="•"/>
             </a:pPr>
             <a:r>
-              <a:rPr lang="en-US" sz="1250" dirty="0">
-                <a:solidFill>
-                  <a:srgbClr val="F0F6FC"/>
+              <a:rPr lang="en-US" sz="1500" dirty="0">
+                <a:solidFill>
+                  <a:srgbClr val="262626"/>
                 </a:solidFill>
                 <a:latin typeface="Calibri" pitchFamily="34" charset="0"/>
                 <a:ea typeface="Calibri" pitchFamily="34" charset="-122"/>
                 <a:cs typeface="Calibri" pitchFamily="34" charset="-120"/>
               </a:rPr>
-              <a:t>CAPS (SUS) • Jogadores Anônimos • CVV: ligue 188 (24h, gratuito)</a:t>
-            </a:r>
-            <a:endParaRPr lang="en-US" sz="1300" dirty="0"/>
+              <a:t>Sinais de alerta: apostar escondido, apostar para recuperar perdas, usar dinheiro de contas, irritação ao tentar parar.</a:t>
+            </a:r>
+            <a:endParaRPr lang="en-US" sz="1500" dirty="0"/>
           </a:p>
         </p:txBody>
       </p:sp>
       <p:sp>
         <p:nvSpPr>
-          <p:cNvPr id="8" name="Shape 5"/>
-          <p:cNvSpPr/>
+          <p:cNvPr id="5" name="Text 3"/>
+          <p:cNvSpPr txBox="1"/>
           <p:nvPr/>
         </p:nvSpPr>
         <p:spPr>
           <a:xfrm>
-            <a:off x="4663440" y="2651760"/>
-            <a:ext cx="3840480" cy="1051560"/>
-          </a:xfrm>
-          <a:prstGeom prst="roundRect">
-            <a:avLst>
-              <a:gd name="adj" fmla="val 8696"/>
-            </a:avLst>
-          </a:prstGeom>
-          <a:solidFill>
-            <a:srgbClr val="161C26"/>
-          </a:solidFill>
-          <a:ln/>
-        </p:spPr>
-      </p:sp>
-      <p:sp>
-        <p:nvSpPr>
-          <p:cNvPr id="9" name="Text 6"/>
-          <p:cNvSpPr txBox="1"/>
-          <p:nvPr/>
-        </p:nvSpPr>
-        <p:spPr>
-          <a:xfrm>
-            <a:off x="4846320" y="2743200"/>
-            <a:ext cx="3474720" cy="868680"/>
-          </a:xfrm>
-          <a:prstGeom prst="rect">
-            <a:avLst/>
-          </a:prstGeom>
-          <a:noFill/>
-          <a:ln/>
-        </p:spPr>
-        <p:txBody>
-          <a:bodyPr wrap="square" lIns="0" tIns="0" rIns="0" bIns="0" rtlCol="0" anchor="ctr"/>
-          <a:lstStyle/>
-          <a:p>
-            <a:pPr indent="0" marL="0">
-              <a:lnSpc>
-                <a:spcPct val="110000"/>
-              </a:lnSpc>
-              <a:buNone/>
-            </a:pPr>
-            <a:r>
-              <a:rPr lang="en-US" sz="1300" b="1" dirty="0">
-                <a:solidFill>
-                  <a:srgbClr val="F85149"/>
-                </a:solidFill>
-                <a:latin typeface="Calibri" pitchFamily="34" charset="0"/>
-                <a:ea typeface="Calibri" pitchFamily="34" charset="-122"/>
-                <a:cs typeface="Calibri" pitchFamily="34" charset="-120"/>
-              </a:rPr>
-              <a:t>SINAIS DE ALERTA
-</a:t>
-            </a:r>
-            <a:pPr indent="0" marL="0">
-              <a:lnSpc>
-                <a:spcPct val="110000"/>
-              </a:lnSpc>
-              <a:buNone/>
-            </a:pPr>
-            <a:r>
-              <a:rPr lang="en-US" sz="1250" dirty="0">
-                <a:solidFill>
-                  <a:srgbClr val="F0F6FC"/>
-                </a:solidFill>
-                <a:latin typeface="Calibri" pitchFamily="34" charset="0"/>
-                <a:ea typeface="Calibri" pitchFamily="34" charset="-122"/>
-                <a:cs typeface="Calibri" pitchFamily="34" charset="-120"/>
-              </a:rPr>
-              <a:t>Apostar escondido • apostar para recuperar perdas • usar dinheiro de contas • irritação ao tentar parar</a:t>
-            </a:r>
-            <a:endParaRPr lang="en-US" sz="1300" dirty="0"/>
-          </a:p>
-        </p:txBody>
-      </p:sp>
-      <p:sp>
-        <p:nvSpPr>
-          <p:cNvPr id="10" name="Text 7"/>
-          <p:cNvSpPr txBox="1"/>
-          <p:nvPr/>
-        </p:nvSpPr>
-        <p:spPr>
-          <a:xfrm>
-            <a:off x="640080" y="4160520"/>
+            <a:off x="640080" y="4114800"/>
             <a:ext cx="7863840" cy="640080"/>
           </a:xfrm>
           <a:prstGeom prst="rect">
@@ -3949,7 +3917,7 @@
             <a:r>
               <a:rPr lang="en-US" sz="1050" dirty="0">
                 <a:solidFill>
-                  <a:srgbClr val="9BA7B4"/>
+                  <a:srgbClr val="595959"/>
                 </a:solidFill>
                 <a:latin typeface="Calibri" pitchFamily="34" charset="0"/>
                 <a:ea typeface="Calibri" pitchFamily="34" charset="-122"/>
@@ -3975,7 +3943,7 @@
     <p:bg>
       <p:bgPr>
         <a:solidFill>
-          <a:srgbClr val="0D1117"/>
+          <a:srgbClr val="FFFFFF"/>
         </a:solidFill>
       </p:bgPr>
     </p:bg>
@@ -4001,8 +3969,8 @@
         </p:nvSpPr>
         <p:spPr>
           <a:xfrm>
-            <a:off x="640080" y="411480"/>
-            <a:ext cx="4572000" cy="548640"/>
+            <a:off x="548640" y="320040"/>
+            <a:ext cx="8046720" cy="685800"/>
           </a:xfrm>
           <a:prstGeom prst="rect">
             <a:avLst/>
@@ -4018,52 +3986,30 @@
               <a:buNone/>
             </a:pPr>
             <a:r>
-              <a:rPr lang="en-US" sz="3200" b="1" dirty="0">
-                <a:solidFill>
-                  <a:srgbClr val="F0F6FC"/>
+              <a:rPr lang="en-US" sz="3000" b="1" dirty="0">
+                <a:solidFill>
+                  <a:srgbClr val="1F3864"/>
                 </a:solidFill>
                 <a:latin typeface="Calibri" pitchFamily="34" charset="0"/>
                 <a:ea typeface="Calibri" pitchFamily="34" charset="-122"/>
                 <a:cs typeface="Calibri" pitchFamily="34" charset="-120"/>
               </a:rPr>
-              <a:t>NOSSA TESE</a:t>
-            </a:r>
-            <a:endParaRPr lang="en-US" sz="3200" dirty="0"/>
+              <a:t>Nossa tese</a:t>
+            </a:r>
+            <a:endParaRPr lang="en-US" sz="3000" dirty="0"/>
           </a:p>
         </p:txBody>
       </p:sp>
       <p:sp>
         <p:nvSpPr>
-          <p:cNvPr id="3" name="Shape 1"/>
-          <p:cNvSpPr/>
+          <p:cNvPr id="3" name="Text 1"/>
+          <p:cNvSpPr txBox="1"/>
           <p:nvPr/>
         </p:nvSpPr>
         <p:spPr>
           <a:xfrm>
             <a:off x="640080" y="1188720"/>
-            <a:ext cx="4846320" cy="3474720"/>
-          </a:xfrm>
-          <a:prstGeom prst="roundRect">
-            <a:avLst>
-              <a:gd name="adj" fmla="val 3158"/>
-            </a:avLst>
-          </a:prstGeom>
-          <a:solidFill>
-            <a:srgbClr val="161C26"/>
-          </a:solidFill>
-          <a:ln/>
-        </p:spPr>
-      </p:sp>
-      <p:sp>
-        <p:nvSpPr>
-          <p:cNvPr id="4" name="Text 2"/>
-          <p:cNvSpPr txBox="1"/>
-          <p:nvPr/>
-        </p:nvSpPr>
-        <p:spPr>
-          <a:xfrm>
-            <a:off x="914400" y="1417320"/>
-            <a:ext cx="4297680" cy="3063240"/>
+            <a:ext cx="7863840" cy="1783080"/>
           </a:xfrm>
           <a:prstGeom prst="rect">
             <a:avLst/>
@@ -4075,7 +4021,7 @@
           <a:bodyPr wrap="square" lIns="0" tIns="0" rIns="0" bIns="0" rtlCol="0" anchor="t"/>
           <a:lstStyle/>
           <a:p>
-            <a:pPr algn="l" indent="0" marL="0">
+            <a:pPr indent="0" marL="0">
               <a:lnSpc>
                 <a:spcPct val="112000"/>
               </a:lnSpc>
@@ -4084,7 +4030,7 @@
             <a:r>
               <a:rPr lang="en-US" sz="1800" b="1" dirty="0">
                 <a:solidFill>
-                  <a:srgbClr val="F0F6FC"/>
+                  <a:srgbClr val="262626"/>
                 </a:solidFill>
                 <a:latin typeface="Calibri" pitchFamily="34" charset="0"/>
                 <a:ea typeface="Calibri" pitchFamily="34" charset="-122"/>
@@ -4092,7 +4038,7 @@
               </a:rPr>
               <a:t>O vício em apostas online tornou-se um problema de saúde pública no Brasil</a:t>
             </a:r>
-            <a:pPr algn="l" indent="0" marL="0">
+            <a:pPr indent="0" marL="0">
               <a:lnSpc>
                 <a:spcPct val="112000"/>
               </a:lnSpc>
@@ -4101,7 +4047,7 @@
             <a:r>
               <a:rPr lang="en-US" sz="1800" dirty="0">
                 <a:solidFill>
-                  <a:srgbClr val="F0F6FC"/>
+                  <a:srgbClr val="262626"/>
                 </a:solidFill>
                 <a:latin typeface="Calibri" pitchFamily="34" charset="0"/>
                 <a:ea typeface="Calibri" pitchFamily="34" charset="-122"/>
@@ -4109,7 +4055,7 @@
               </a:rPr>
               <a:t>, pois compromete a renda das famílias, adoece mentalmente os usuários e atinge principalmente jovens de baixa renda — </a:t>
             </a:r>
-            <a:pPr algn="l" indent="0" marL="0">
+            <a:pPr indent="0" marL="0">
               <a:lnSpc>
                 <a:spcPct val="112000"/>
               </a:lnSpc>
@@ -4118,13 +4064,13 @@
             <a:r>
               <a:rPr lang="en-US" sz="1800" b="1" dirty="0">
                 <a:solidFill>
-                  <a:srgbClr val="3FB950"/>
+                  <a:srgbClr val="C00000"/>
                 </a:solidFill>
                 <a:latin typeface="Calibri" pitchFamily="34" charset="0"/>
                 <a:ea typeface="Calibri" pitchFamily="34" charset="-122"/>
                 <a:cs typeface="Calibri" pitchFamily="34" charset="-120"/>
               </a:rPr>
-              <a:t>exigindo uma intervenção urgente do Estado e da sociedade.</a:t>
+              <a:t>por isso, é urgente uma intervenção do Estado e da sociedade.</a:t>
             </a:r>
             <a:endParaRPr lang="en-US" sz="1800" dirty="0"/>
           </a:p>
@@ -4132,53 +4078,14 @@
       </p:sp>
       <p:sp>
         <p:nvSpPr>
-          <p:cNvPr id="5" name="Text 3"/>
+          <p:cNvPr id="4" name="Text 2"/>
           <p:cNvSpPr txBox="1"/>
           <p:nvPr/>
         </p:nvSpPr>
         <p:spPr>
           <a:xfrm>
-            <a:off x="5669280" y="1325880"/>
-            <a:ext cx="3108960" cy="868680"/>
-          </a:xfrm>
-          <a:prstGeom prst="rect">
-            <a:avLst/>
-          </a:prstGeom>
-          <a:noFill/>
-          <a:ln/>
-        </p:spPr>
-        <p:txBody>
-          <a:bodyPr wrap="square" lIns="0" tIns="0" rIns="0" bIns="0" rtlCol="0" anchor="ctr"/>
-          <a:lstStyle/>
-          <a:p>
-            <a:pPr algn="ctr" indent="0" marL="0">
-              <a:buNone/>
-            </a:pPr>
-            <a:r>
-              <a:rPr lang="en-US" sz="5000" b="1" dirty="0">
-                <a:solidFill>
-                  <a:srgbClr val="F85149"/>
-                </a:solidFill>
-                <a:latin typeface="Calibri" pitchFamily="34" charset="0"/>
-                <a:ea typeface="Calibri" pitchFamily="34" charset="-122"/>
-                <a:cs typeface="Calibri" pitchFamily="34" charset="-120"/>
-              </a:rPr>
-              <a:t>1,4 mi</a:t>
-            </a:r>
-            <a:endParaRPr lang="en-US" sz="5000" dirty="0"/>
-          </a:p>
-        </p:txBody>
-      </p:sp>
-      <p:sp>
-        <p:nvSpPr>
-          <p:cNvPr id="6" name="Text 4"/>
-          <p:cNvSpPr txBox="1"/>
-          <p:nvPr/>
-        </p:nvSpPr>
-        <p:spPr>
-          <a:xfrm>
-            <a:off x="5760720" y="2212848"/>
-            <a:ext cx="2926080" cy="640080"/>
+            <a:off x="640080" y="3063240"/>
+            <a:ext cx="7863840" cy="1783080"/>
           </a:xfrm>
           <a:prstGeom prst="rect">
             <a:avLst/>
@@ -4190,99 +4097,76 @@
           <a:bodyPr wrap="square" lIns="0" tIns="0" rIns="0" bIns="0" rtlCol="0" anchor="t"/>
           <a:lstStyle/>
           <a:p>
-            <a:pPr algn="ctr" indent="0" marL="0">
-              <a:buNone/>
+            <a:pPr algn="l" marL="342900" indent="-342900">
+              <a:lnSpc>
+                <a:spcPct val="110000"/>
+              </a:lnSpc>
+              <a:spcAft>
+                <a:spcPts val="1000"/>
+              </a:spcAft>
+              <a:buSzPct val="100000"/>
+              <a:buChar char="•"/>
             </a:pPr>
             <a:r>
-              <a:rPr lang="en-US" sz="1350" dirty="0">
-                <a:solidFill>
-                  <a:srgbClr val="9BA7B4"/>
+              <a:rPr lang="en-US" sz="1500" b="1" dirty="0">
+                <a:solidFill>
+                  <a:srgbClr val="262626"/>
                 </a:solidFill>
                 <a:latin typeface="Calibri" pitchFamily="34" charset="0"/>
                 <a:ea typeface="Calibri" pitchFamily="34" charset="-122"/>
                 <a:cs typeface="Calibri" pitchFamily="34" charset="-120"/>
               </a:rPr>
-              <a:t>de brasileiros já têm transtorno do jogo diagnosticável</a:t>
-            </a:r>
-            <a:endParaRPr lang="en-US" sz="1350" dirty="0"/>
-          </a:p>
-        </p:txBody>
-      </p:sp>
-      <p:sp>
-        <p:nvSpPr>
-          <p:cNvPr id="7" name="Text 5"/>
-          <p:cNvSpPr txBox="1"/>
-          <p:nvPr/>
-        </p:nvSpPr>
-        <p:spPr>
-          <a:xfrm>
-            <a:off x="5669280" y="3063240"/>
-            <a:ext cx="3108960" cy="777240"/>
-          </a:xfrm>
-          <a:prstGeom prst="rect">
-            <a:avLst/>
-          </a:prstGeom>
-          <a:noFill/>
-          <a:ln/>
-        </p:spPr>
-        <p:txBody>
-          <a:bodyPr wrap="square" lIns="0" tIns="0" rIns="0" bIns="0" rtlCol="0" anchor="ctr"/>
-          <a:lstStyle/>
-          <a:p>
-            <a:pPr algn="ctr" indent="0" marL="0">
-              <a:buNone/>
+              <a:t>1,4 milhão de brasileiros já têm transtorno do jogo diagnosticável</a:t>
+            </a:r>
+            <a:endParaRPr lang="en-US" sz="1500" dirty="0"/>
+          </a:p>
+          <a:p>
+            <a:pPr algn="l" marL="342900" indent="-342900">
+              <a:lnSpc>
+                <a:spcPct val="110000"/>
+              </a:lnSpc>
+              <a:spcAft>
+                <a:spcPts val="1000"/>
+              </a:spcAft>
+              <a:buSzPct val="100000"/>
+              <a:buChar char="•"/>
             </a:pPr>
             <a:r>
-              <a:rPr lang="en-US" sz="4000" b="1" dirty="0">
-                <a:solidFill>
-                  <a:srgbClr val="E3B341"/>
+              <a:rPr lang="en-US" sz="1500" dirty="0">
+                <a:solidFill>
+                  <a:srgbClr val="262626"/>
                 </a:solidFill>
                 <a:latin typeface="Calibri" pitchFamily="34" charset="0"/>
                 <a:ea typeface="Calibri" pitchFamily="34" charset="-122"/>
                 <a:cs typeface="Calibri" pitchFamily="34" charset="-120"/>
               </a:rPr>
-              <a:t>11 mi</a:t>
-            </a:r>
-            <a:endParaRPr lang="en-US" sz="4000" dirty="0"/>
-          </a:p>
-        </p:txBody>
-      </p:sp>
-      <p:sp>
-        <p:nvSpPr>
-          <p:cNvPr id="8" name="Text 6"/>
-          <p:cNvSpPr txBox="1"/>
-          <p:nvPr/>
-        </p:nvSpPr>
-        <p:spPr>
-          <a:xfrm>
-            <a:off x="5760720" y="3858768"/>
-            <a:ext cx="2926080" cy="594360"/>
-          </a:xfrm>
-          <a:prstGeom prst="rect">
-            <a:avLst/>
-          </a:prstGeom>
-          <a:noFill/>
-          <a:ln/>
-        </p:spPr>
-        <p:txBody>
-          <a:bodyPr wrap="square" lIns="0" tIns="0" rIns="0" bIns="0" rtlCol="0" anchor="t"/>
-          <a:lstStyle/>
-          <a:p>
-            <a:pPr algn="ctr" indent="0" marL="0">
-              <a:buNone/>
+              <a:t>11 milhões apresentam comportamento de risco (Fiocruz)</a:t>
+            </a:r>
+            <a:endParaRPr lang="en-US" sz="1500" dirty="0"/>
+          </a:p>
+          <a:p>
+            <a:pPr algn="l" marL="342900" indent="-342900">
+              <a:lnSpc>
+                <a:spcPct val="110000"/>
+              </a:lnSpc>
+              <a:spcAft>
+                <a:spcPts val="1000"/>
+              </a:spcAft>
+              <a:buSzPct val="100000"/>
+              <a:buChar char="•"/>
             </a:pPr>
             <a:r>
-              <a:rPr lang="en-US" sz="1350" dirty="0">
-                <a:solidFill>
-                  <a:srgbClr val="9BA7B4"/>
+              <a:rPr lang="en-US" sz="1500" dirty="0">
+                <a:solidFill>
+                  <a:srgbClr val="262626"/>
                 </a:solidFill>
                 <a:latin typeface="Calibri" pitchFamily="34" charset="0"/>
                 <a:ea typeface="Calibri" pitchFamily="34" charset="-122"/>
                 <a:cs typeface="Calibri" pitchFamily="34" charset="-120"/>
               </a:rPr>
-              <a:t>apresentam comportamento de risco (Fiocruz)</a:t>
-            </a:r>
-            <a:endParaRPr lang="en-US" sz="1350" dirty="0"/>
+              <a:t>Nos próximos slides: quatro motivos que sustentam essa tese, a matemática e a biologia por trás do problema, e a nossa proposta de intervenção.</a:t>
+            </a:r>
+            <a:endParaRPr lang="en-US" sz="1500" dirty="0"/>
           </a:p>
         </p:txBody>
       </p:sp>
@@ -4300,7 +4184,7 @@
     <p:bg>
       <p:bgPr>
         <a:solidFill>
-          <a:srgbClr val="0D1117"/>
+          <a:srgbClr val="FFFFFF"/>
         </a:solidFill>
       </p:bgPr>
     </p:bg>
@@ -4326,8 +4210,8 @@
         </p:nvSpPr>
         <p:spPr>
           <a:xfrm>
-            <a:off x="640080" y="384048"/>
-            <a:ext cx="2377440" cy="411480"/>
+            <a:off x="548640" y="320040"/>
+            <a:ext cx="8046720" cy="685800"/>
           </a:xfrm>
           <a:prstGeom prst="rect">
             <a:avLst/>
@@ -4343,17 +4227,17 @@
               <a:buNone/>
             </a:pPr>
             <a:r>
-              <a:rPr lang="en-US" sz="1500" b="1" spc="400" kern="0" dirty="0">
-                <a:solidFill>
-                  <a:srgbClr val="9BA7B4"/>
+              <a:rPr lang="en-US" sz="3000" b="1" dirty="0">
+                <a:solidFill>
+                  <a:srgbClr val="1F3864"/>
                 </a:solidFill>
                 <a:latin typeface="Calibri" pitchFamily="34" charset="0"/>
                 <a:ea typeface="Calibri" pitchFamily="34" charset="-122"/>
                 <a:cs typeface="Calibri" pitchFamily="34" charset="-120"/>
               </a:rPr>
-              <a:t>POR QUÊ?</a:t>
-            </a:r>
-            <a:endParaRPr lang="en-US" sz="1500" dirty="0"/>
+              <a:t>Por quê 1 — Destrói a renda das famílias</a:t>
+            </a:r>
+            <a:endParaRPr lang="en-US" sz="3000" dirty="0"/>
           </a:p>
         </p:txBody>
       </p:sp>
@@ -4365,91 +4249,8 @@
         </p:nvSpPr>
         <p:spPr>
           <a:xfrm>
-            <a:off x="640080" y="777240"/>
-            <a:ext cx="7863840" cy="868680"/>
-          </a:xfrm>
-          <a:prstGeom prst="rect">
-            <a:avLst/>
-          </a:prstGeom>
-          <a:noFill/>
-          <a:ln/>
-        </p:spPr>
-        <p:txBody>
-          <a:bodyPr wrap="square" lIns="0" tIns="0" rIns="0" bIns="0" rtlCol="0" anchor="ctr"/>
-          <a:lstStyle/>
-          <a:p>
-            <a:pPr indent="0" marL="0">
-              <a:buNone/>
-            </a:pPr>
-            <a:r>
-              <a:rPr lang="en-US" sz="2900" b="1" dirty="0">
-                <a:solidFill>
-                  <a:srgbClr val="F0F6FC"/>
-                </a:solidFill>
-                <a:latin typeface="Calibri" pitchFamily="34" charset="0"/>
-                <a:ea typeface="Calibri" pitchFamily="34" charset="-122"/>
-                <a:cs typeface="Calibri" pitchFamily="34" charset="-120"/>
-              </a:rPr>
-              <a:t>Porque destrói a renda das famílias</a:t>
-            </a:r>
-            <a:endParaRPr lang="en-US" sz="2900" dirty="0"/>
-          </a:p>
-        </p:txBody>
-      </p:sp>
-      <p:sp>
-        <p:nvSpPr>
-          <p:cNvPr id="4" name="Shape 2"/>
-          <p:cNvSpPr/>
-          <p:nvPr/>
-        </p:nvSpPr>
-        <p:spPr>
-          <a:xfrm>
-            <a:off x="640080" y="1965960"/>
-            <a:ext cx="914400" cy="914400"/>
-          </a:xfrm>
-          <a:prstGeom prst="ellipse">
-            <a:avLst/>
-          </a:prstGeom>
-          <a:solidFill>
-            <a:srgbClr val="1C2431"/>
-          </a:solidFill>
-          <a:ln/>
-        </p:spPr>
-      </p:sp>
-      <p:pic>
-        <p:nvPicPr>
-          <p:cNvPr id="5" name="Image 0" descr="preencoded.png">    </p:cNvPr>
-          <p:cNvPicPr>
-            <a:picLocks noChangeAspect="1"/>
-          </p:cNvPicPr>
-          <p:nvPr/>
-        </p:nvPicPr>
-        <p:blipFill>
-          <a:blip r:embed="rId1"/>
-          <a:stretch>
-            <a:fillRect/>
-          </a:stretch>
-        </p:blipFill>
-        <p:spPr>
-          <a:xfrm>
-            <a:off x="877824" y="2203704"/>
-            <a:ext cx="438912" cy="438912"/>
-          </a:xfrm>
-          <a:prstGeom prst="rect">
-            <a:avLst/>
-          </a:prstGeom>
-        </p:spPr>
-      </p:pic>
-      <p:sp>
-        <p:nvSpPr>
-          <p:cNvPr id="6" name="Text 3"/>
-          <p:cNvSpPr txBox="1"/>
-          <p:nvPr/>
-        </p:nvSpPr>
-        <p:spPr>
-          <a:xfrm>
-            <a:off x="1828800" y="1874520"/>
-            <a:ext cx="4206240" cy="2834640"/>
+            <a:off x="640080" y="1371600"/>
+            <a:ext cx="7863840" cy="3474720"/>
           </a:xfrm>
           <a:prstGeom prst="rect">
             <a:avLst/>
@@ -4461,183 +4262,76 @@
           <a:bodyPr wrap="square" lIns="0" tIns="0" rIns="0" bIns="0" rtlCol="0" anchor="t"/>
           <a:lstStyle/>
           <a:p>
-            <a:pPr algn="l" indent="0" marL="0">
+            <a:pPr algn="l" marL="342900" indent="-342900">
               <a:lnSpc>
-                <a:spcPct val="118000"/>
+                <a:spcPct val="110000"/>
               </a:lnSpc>
-              <a:buNone/>
+              <a:spcAft>
+                <a:spcPts val="1400"/>
+              </a:spcAft>
+              <a:buSzPct val="100000"/>
+              <a:buChar char="•"/>
             </a:pPr>
             <a:r>
-              <a:rPr lang="en-US" sz="1550" dirty="0">
-                <a:solidFill>
-                  <a:srgbClr val="F0F6FC"/>
+              <a:rPr lang="en-US" sz="1800" dirty="0">
+                <a:solidFill>
+                  <a:srgbClr val="262626"/>
                 </a:solidFill>
                 <a:latin typeface="Calibri" pitchFamily="34" charset="0"/>
                 <a:ea typeface="Calibri" pitchFamily="34" charset="-122"/>
                 <a:cs typeface="Calibri" pitchFamily="34" charset="-120"/>
               </a:rPr>
-              <a:t>As bets retiraram R$ 62,5 bilhões do orçamento das famílias brasileiras só em 2025. Quase 40% dos apostadores se endividaram depois que começaram a apostar — e a maioria é de baixa renda.</a:t>
-            </a:r>
-            <a:endParaRPr lang="en-US" sz="1550" dirty="0"/>
-          </a:p>
-        </p:txBody>
-      </p:sp>
-      <p:sp>
-        <p:nvSpPr>
-          <p:cNvPr id="7" name="Shape 4"/>
-          <p:cNvSpPr/>
-          <p:nvPr/>
-        </p:nvSpPr>
-        <p:spPr>
-          <a:xfrm>
-            <a:off x="6309360" y="1874520"/>
-            <a:ext cx="2286000" cy="2651760"/>
-          </a:xfrm>
-          <a:prstGeom prst="roundRect">
-            <a:avLst>
-              <a:gd name="adj" fmla="val 4800"/>
-            </a:avLst>
-          </a:prstGeom>
-          <a:solidFill>
-            <a:srgbClr val="161C26"/>
-          </a:solidFill>
-          <a:ln/>
-        </p:spPr>
-      </p:sp>
-      <p:sp>
-        <p:nvSpPr>
-          <p:cNvPr id="8" name="Text 5"/>
-          <p:cNvSpPr txBox="1"/>
-          <p:nvPr/>
-        </p:nvSpPr>
-        <p:spPr>
-          <a:xfrm>
-            <a:off x="6355080" y="2331720"/>
-            <a:ext cx="2194560" cy="914400"/>
-          </a:xfrm>
-          <a:prstGeom prst="rect">
-            <a:avLst/>
-          </a:prstGeom>
-          <a:noFill/>
-          <a:ln/>
-        </p:spPr>
-        <p:txBody>
-          <a:bodyPr wrap="square" lIns="0" tIns="0" rIns="0" bIns="0" rtlCol="0" anchor="ctr"/>
-          <a:lstStyle/>
-          <a:p>
-            <a:pPr algn="ctr" indent="0" marL="0">
-              <a:buNone/>
+              <a:t>As bets retiraram R$ 62,5 bilhões do orçamento das famílias brasileiras só em 2025 (Banco Central).</a:t>
+            </a:r>
+            <a:endParaRPr lang="en-US" sz="1800" dirty="0"/>
+          </a:p>
+          <a:p>
+            <a:pPr algn="l" marL="342900" indent="-342900">
+              <a:lnSpc>
+                <a:spcPct val="110000"/>
+              </a:lnSpc>
+              <a:spcAft>
+                <a:spcPts val="1400"/>
+              </a:spcAft>
+              <a:buSzPct val="100000"/>
+              <a:buChar char="•"/>
             </a:pPr>
             <a:r>
-              <a:rPr lang="en-US" sz="3000" b="1" dirty="0">
-                <a:solidFill>
-                  <a:srgbClr val="F85149"/>
+              <a:rPr lang="en-US" sz="1800" dirty="0">
+                <a:solidFill>
+                  <a:srgbClr val="262626"/>
                 </a:solidFill>
                 <a:latin typeface="Calibri" pitchFamily="34" charset="0"/>
                 <a:ea typeface="Calibri" pitchFamily="34" charset="-122"/>
                 <a:cs typeface="Calibri" pitchFamily="34" charset="-120"/>
               </a:rPr>
-              <a:t>R$ 62,5 bi</a:t>
-            </a:r>
-            <a:endParaRPr lang="en-US" sz="3000" dirty="0"/>
-          </a:p>
-        </p:txBody>
-      </p:sp>
-      <p:sp>
-        <p:nvSpPr>
-          <p:cNvPr id="9" name="Text 6"/>
-          <p:cNvSpPr txBox="1"/>
-          <p:nvPr/>
-        </p:nvSpPr>
-        <p:spPr>
-          <a:xfrm>
-            <a:off x="6446520" y="3291840"/>
-            <a:ext cx="2011680" cy="1005840"/>
-          </a:xfrm>
-          <a:prstGeom prst="rect">
-            <a:avLst/>
-          </a:prstGeom>
-          <a:noFill/>
-          <a:ln/>
-        </p:spPr>
-        <p:txBody>
-          <a:bodyPr wrap="square" lIns="0" tIns="0" rIns="0" bIns="0" rtlCol="0" anchor="t"/>
-          <a:lstStyle/>
-          <a:p>
-            <a:pPr algn="ctr" indent="0" marL="0">
-              <a:buNone/>
+              <a:t>Quase 40% dos apostadores se endividaram depois que começaram a apostar.</a:t>
+            </a:r>
+            <a:endParaRPr lang="en-US" sz="1800" dirty="0"/>
+          </a:p>
+          <a:p>
+            <a:pPr algn="l" marL="342900" indent="-342900">
+              <a:lnSpc>
+                <a:spcPct val="110000"/>
+              </a:lnSpc>
+              <a:spcAft>
+                <a:spcPts val="1400"/>
+              </a:spcAft>
+              <a:buSzPct val="100000"/>
+              <a:buChar char="•"/>
             </a:pPr>
             <a:r>
-              <a:rPr lang="en-US" sz="1250" dirty="0">
-                <a:solidFill>
-                  <a:srgbClr val="9BA7B4"/>
+              <a:rPr lang="en-US" sz="1800" dirty="0">
+                <a:solidFill>
+                  <a:srgbClr val="262626"/>
                 </a:solidFill>
                 <a:latin typeface="Calibri" pitchFamily="34" charset="0"/>
                 <a:ea typeface="Calibri" pitchFamily="34" charset="-122"/>
                 <a:cs typeface="Calibri" pitchFamily="34" charset="-120"/>
               </a:rPr>
-              <a:t>drenados das famílias em 2025</a:t>
-            </a:r>
-            <a:endParaRPr lang="en-US" sz="1250" dirty="0"/>
-          </a:p>
-        </p:txBody>
-      </p:sp>
-      <p:sp>
-        <p:nvSpPr>
-          <p:cNvPr id="10" name="Shape 7"/>
-          <p:cNvSpPr/>
-          <p:nvPr/>
-        </p:nvSpPr>
-        <p:spPr>
-          <a:xfrm>
-            <a:off x="8138160" y="384048"/>
-            <a:ext cx="502920" cy="502920"/>
-          </a:xfrm>
-          <a:prstGeom prst="ellipse">
-            <a:avLst/>
-          </a:prstGeom>
-          <a:solidFill>
-            <a:srgbClr val="3FB950"/>
-          </a:solidFill>
-          <a:ln/>
-        </p:spPr>
-      </p:sp>
-      <p:sp>
-        <p:nvSpPr>
-          <p:cNvPr id="11" name="Text 8"/>
-          <p:cNvSpPr txBox="1"/>
-          <p:nvPr/>
-        </p:nvSpPr>
-        <p:spPr>
-          <a:xfrm>
-            <a:off x="8138160" y="384048"/>
-            <a:ext cx="502920" cy="502920"/>
-          </a:xfrm>
-          <a:prstGeom prst="rect">
-            <a:avLst/>
-          </a:prstGeom>
-          <a:noFill/>
-          <a:ln/>
-        </p:spPr>
-        <p:txBody>
-          <a:bodyPr wrap="square" lIns="0" tIns="0" rIns="0" bIns="0" rtlCol="0" anchor="ctr"/>
-          <a:lstStyle/>
-          <a:p>
-            <a:pPr algn="ctr" indent="0" marL="0">
-              <a:buNone/>
-            </a:pPr>
-            <a:r>
-              <a:rPr lang="en-US" sz="2000" b="1" dirty="0">
-                <a:solidFill>
-                  <a:srgbClr val="0D1117"/>
-                </a:solidFill>
-                <a:latin typeface="Calibri" pitchFamily="34" charset="0"/>
-                <a:ea typeface="Calibri" pitchFamily="34" charset="-122"/>
-                <a:cs typeface="Calibri" pitchFamily="34" charset="-120"/>
-              </a:rPr>
-              <a:t>1</a:t>
-            </a:r>
-            <a:endParaRPr lang="en-US" sz="2000" dirty="0"/>
+              <a:t>A maioria dos apostadores é de baixa renda: o dinheiro sai da comida, das contas e da escola.</a:t>
+            </a:r>
+            <a:endParaRPr lang="en-US" sz="1800" dirty="0"/>
           </a:p>
         </p:txBody>
       </p:sp>
@@ -4655,7 +4349,7 @@
     <p:bg>
       <p:bgPr>
         <a:solidFill>
-          <a:srgbClr val="0D1117"/>
+          <a:srgbClr val="FFFFFF"/>
         </a:solidFill>
       </p:bgPr>
     </p:bg>
@@ -4681,8 +4375,8 @@
         </p:nvSpPr>
         <p:spPr>
           <a:xfrm>
-            <a:off x="640080" y="384048"/>
-            <a:ext cx="2377440" cy="411480"/>
+            <a:off x="548640" y="320040"/>
+            <a:ext cx="8046720" cy="685800"/>
           </a:xfrm>
           <a:prstGeom prst="rect">
             <a:avLst/>
@@ -4698,17 +4392,17 @@
               <a:buNone/>
             </a:pPr>
             <a:r>
-              <a:rPr lang="en-US" sz="1500" b="1" spc="400" kern="0" dirty="0">
-                <a:solidFill>
-                  <a:srgbClr val="9BA7B4"/>
+              <a:rPr lang="en-US" sz="3000" b="1" dirty="0">
+                <a:solidFill>
+                  <a:srgbClr val="1F3864"/>
                 </a:solidFill>
                 <a:latin typeface="Calibri" pitchFamily="34" charset="0"/>
                 <a:ea typeface="Calibri" pitchFamily="34" charset="-122"/>
                 <a:cs typeface="Calibri" pitchFamily="34" charset="-120"/>
               </a:rPr>
-              <a:t>POR QUÊ?</a:t>
-            </a:r>
-            <a:endParaRPr lang="en-US" sz="1500" dirty="0"/>
+              <a:t>Por quê 2 — É uma doença, não falta de caráter</a:t>
+            </a:r>
+            <a:endParaRPr lang="en-US" sz="3000" dirty="0"/>
           </a:p>
         </p:txBody>
       </p:sp>
@@ -4720,91 +4414,8 @@
         </p:nvSpPr>
         <p:spPr>
           <a:xfrm>
-            <a:off x="640080" y="777240"/>
-            <a:ext cx="7863840" cy="868680"/>
-          </a:xfrm>
-          <a:prstGeom prst="rect">
-            <a:avLst/>
-          </a:prstGeom>
-          <a:noFill/>
-          <a:ln/>
-        </p:spPr>
-        <p:txBody>
-          <a:bodyPr wrap="square" lIns="0" tIns="0" rIns="0" bIns="0" rtlCol="0" anchor="ctr"/>
-          <a:lstStyle/>
-          <a:p>
-            <a:pPr indent="0" marL="0">
-              <a:buNone/>
-            </a:pPr>
-            <a:r>
-              <a:rPr lang="en-US" sz="2900" b="1" dirty="0">
-                <a:solidFill>
-                  <a:srgbClr val="F0F6FC"/>
-                </a:solidFill>
-                <a:latin typeface="Calibri" pitchFamily="34" charset="0"/>
-                <a:ea typeface="Calibri" pitchFamily="34" charset="-122"/>
-                <a:cs typeface="Calibri" pitchFamily="34" charset="-120"/>
-              </a:rPr>
-              <a:t>Porque é uma doença, não falta de caráter</a:t>
-            </a:r>
-            <a:endParaRPr lang="en-US" sz="2900" dirty="0"/>
-          </a:p>
-        </p:txBody>
-      </p:sp>
-      <p:sp>
-        <p:nvSpPr>
-          <p:cNvPr id="4" name="Shape 2"/>
-          <p:cNvSpPr/>
-          <p:nvPr/>
-        </p:nvSpPr>
-        <p:spPr>
-          <a:xfrm>
-            <a:off x="640080" y="1965960"/>
-            <a:ext cx="914400" cy="914400"/>
-          </a:xfrm>
-          <a:prstGeom prst="ellipse">
-            <a:avLst/>
-          </a:prstGeom>
-          <a:solidFill>
-            <a:srgbClr val="1C2431"/>
-          </a:solidFill>
-          <a:ln/>
-        </p:spPr>
-      </p:sp>
-      <p:pic>
-        <p:nvPicPr>
-          <p:cNvPr id="5" name="Image 0" descr="preencoded.png">    </p:cNvPr>
-          <p:cNvPicPr>
-            <a:picLocks noChangeAspect="1"/>
-          </p:cNvPicPr>
-          <p:nvPr/>
-        </p:nvPicPr>
-        <p:blipFill>
-          <a:blip r:embed="rId1"/>
-          <a:stretch>
-            <a:fillRect/>
-          </a:stretch>
-        </p:blipFill>
-        <p:spPr>
-          <a:xfrm>
-            <a:off x="877824" y="2203704"/>
-            <a:ext cx="438912" cy="438912"/>
-          </a:xfrm>
-          <a:prstGeom prst="rect">
-            <a:avLst/>
-          </a:prstGeom>
-        </p:spPr>
-      </p:pic>
-      <p:sp>
-        <p:nvSpPr>
-          <p:cNvPr id="6" name="Text 3"/>
-          <p:cNvSpPr txBox="1"/>
-          <p:nvPr/>
-        </p:nvSpPr>
-        <p:spPr>
-          <a:xfrm>
-            <a:off x="1828800" y="1874520"/>
-            <a:ext cx="4206240" cy="2834640"/>
+            <a:off x="640080" y="1371600"/>
+            <a:ext cx="7863840" cy="3474720"/>
           </a:xfrm>
           <a:prstGeom prst="rect">
             <a:avLst/>
@@ -4816,183 +4427,100 @@
           <a:bodyPr wrap="square" lIns="0" tIns="0" rIns="0" bIns="0" rtlCol="0" anchor="t"/>
           <a:lstStyle/>
           <a:p>
-            <a:pPr algn="l" indent="0" marL="0">
+            <a:pPr algn="l" marL="342900" indent="-342900">
               <a:lnSpc>
-                <a:spcPct val="118000"/>
+                <a:spcPct val="110000"/>
               </a:lnSpc>
-              <a:buNone/>
+              <a:spcAft>
+                <a:spcPts val="1400"/>
+              </a:spcAft>
+              <a:buSzPct val="100000"/>
+              <a:buChar char="•"/>
             </a:pPr>
             <a:r>
-              <a:rPr lang="en-US" sz="1550" dirty="0">
-                <a:solidFill>
-                  <a:srgbClr val="F0F6FC"/>
+              <a:rPr lang="en-US" sz="1800" dirty="0">
+                <a:solidFill>
+                  <a:srgbClr val="262626"/>
                 </a:solidFill>
                 <a:latin typeface="Calibri" pitchFamily="34" charset="0"/>
                 <a:ea typeface="Calibri" pitchFamily="34" charset="-122"/>
                 <a:cs typeface="Calibri" pitchFamily="34" charset="-120"/>
               </a:rPr>
-              <a:t>A OMS reconhece o transtorno do jogo (ludopatia) como doença. Ele causa ansiedade, depressão, isolamento e aumenta o risco de suicídio. Os atendimentos por vício em jogos cresceram mais de 300% em cinco anos no Brasil.</a:t>
-            </a:r>
-            <a:endParaRPr lang="en-US" sz="1550" dirty="0"/>
-          </a:p>
-        </p:txBody>
-      </p:sp>
-      <p:sp>
-        <p:nvSpPr>
-          <p:cNvPr id="7" name="Shape 4"/>
-          <p:cNvSpPr/>
-          <p:nvPr/>
-        </p:nvSpPr>
-        <p:spPr>
-          <a:xfrm>
-            <a:off x="6309360" y="1874520"/>
-            <a:ext cx="2286000" cy="2651760"/>
-          </a:xfrm>
-          <a:prstGeom prst="roundRect">
-            <a:avLst>
-              <a:gd name="adj" fmla="val 4800"/>
-            </a:avLst>
-          </a:prstGeom>
-          <a:solidFill>
-            <a:srgbClr val="161C26"/>
-          </a:solidFill>
-          <a:ln/>
-        </p:spPr>
-      </p:sp>
-      <p:sp>
-        <p:nvSpPr>
-          <p:cNvPr id="8" name="Text 5"/>
-          <p:cNvSpPr txBox="1"/>
-          <p:nvPr/>
-        </p:nvSpPr>
-        <p:spPr>
-          <a:xfrm>
-            <a:off x="6355080" y="2331720"/>
-            <a:ext cx="2194560" cy="914400"/>
-          </a:xfrm>
-          <a:prstGeom prst="rect">
-            <a:avLst/>
-          </a:prstGeom>
-          <a:noFill/>
-          <a:ln/>
-        </p:spPr>
-        <p:txBody>
-          <a:bodyPr wrap="square" lIns="0" tIns="0" rIns="0" bIns="0" rtlCol="0" anchor="ctr"/>
-          <a:lstStyle/>
-          <a:p>
-            <a:pPr algn="ctr" indent="0" marL="0">
-              <a:buNone/>
+              <a:t>A OMS reconhece o transtorno do jogo (ludopatia) como doença.</a:t>
+            </a:r>
+            <a:endParaRPr lang="en-US" sz="1800" dirty="0"/>
+          </a:p>
+          <a:p>
+            <a:pPr algn="l" marL="342900" indent="-342900">
+              <a:lnSpc>
+                <a:spcPct val="110000"/>
+              </a:lnSpc>
+              <a:spcAft>
+                <a:spcPts val="1400"/>
+              </a:spcAft>
+              <a:buSzPct val="100000"/>
+              <a:buChar char="•"/>
             </a:pPr>
             <a:r>
-              <a:rPr lang="en-US" sz="4000" b="1" dirty="0">
-                <a:solidFill>
-                  <a:srgbClr val="F85149"/>
+              <a:rPr lang="en-US" sz="1800" dirty="0">
+                <a:solidFill>
+                  <a:srgbClr val="262626"/>
                 </a:solidFill>
                 <a:latin typeface="Calibri" pitchFamily="34" charset="0"/>
                 <a:ea typeface="Calibri" pitchFamily="34" charset="-122"/>
                 <a:cs typeface="Calibri" pitchFamily="34" charset="-120"/>
               </a:rPr>
-              <a:t>+300%</a:t>
-            </a:r>
-            <a:endParaRPr lang="en-US" sz="4000" dirty="0"/>
-          </a:p>
-        </p:txBody>
-      </p:sp>
-      <p:sp>
-        <p:nvSpPr>
-          <p:cNvPr id="9" name="Text 6"/>
-          <p:cNvSpPr txBox="1"/>
-          <p:nvPr/>
-        </p:nvSpPr>
-        <p:spPr>
-          <a:xfrm>
-            <a:off x="6446520" y="3291840"/>
-            <a:ext cx="2011680" cy="1005840"/>
-          </a:xfrm>
-          <a:prstGeom prst="rect">
-            <a:avLst/>
-          </a:prstGeom>
-          <a:noFill/>
-          <a:ln/>
-        </p:spPr>
-        <p:txBody>
-          <a:bodyPr wrap="square" lIns="0" tIns="0" rIns="0" bIns="0" rtlCol="0" anchor="t"/>
-          <a:lstStyle/>
-          <a:p>
-            <a:pPr algn="ctr" indent="0" marL="0">
-              <a:buNone/>
+              <a:t>Causa ansiedade, depressão, isolamento e aumenta o risco de suicídio.</a:t>
+            </a:r>
+            <a:endParaRPr lang="en-US" sz="1800" dirty="0"/>
+          </a:p>
+          <a:p>
+            <a:pPr algn="l" marL="342900" indent="-342900">
+              <a:lnSpc>
+                <a:spcPct val="110000"/>
+              </a:lnSpc>
+              <a:spcAft>
+                <a:spcPts val="1400"/>
+              </a:spcAft>
+              <a:buSzPct val="100000"/>
+              <a:buChar char="•"/>
             </a:pPr>
             <a:r>
-              <a:rPr lang="en-US" sz="1250" dirty="0">
-                <a:solidFill>
-                  <a:srgbClr val="9BA7B4"/>
+              <a:rPr lang="en-US" sz="1800" dirty="0">
+                <a:solidFill>
+                  <a:srgbClr val="262626"/>
                 </a:solidFill>
                 <a:latin typeface="Calibri" pitchFamily="34" charset="0"/>
                 <a:ea typeface="Calibri" pitchFamily="34" charset="-122"/>
                 <a:cs typeface="Calibri" pitchFamily="34" charset="-120"/>
               </a:rPr>
-              <a:t>de atendimentos por vício em jogo em 5 anos (ABP)</a:t>
-            </a:r>
-            <a:endParaRPr lang="en-US" sz="1250" dirty="0"/>
-          </a:p>
-        </p:txBody>
-      </p:sp>
-      <p:sp>
-        <p:nvSpPr>
-          <p:cNvPr id="10" name="Shape 7"/>
-          <p:cNvSpPr/>
-          <p:nvPr/>
-        </p:nvSpPr>
-        <p:spPr>
-          <a:xfrm>
-            <a:off x="8138160" y="384048"/>
-            <a:ext cx="502920" cy="502920"/>
-          </a:xfrm>
-          <a:prstGeom prst="ellipse">
-            <a:avLst/>
-          </a:prstGeom>
-          <a:solidFill>
-            <a:srgbClr val="3FB950"/>
-          </a:solidFill>
-          <a:ln/>
-        </p:spPr>
-      </p:sp>
-      <p:sp>
-        <p:nvSpPr>
-          <p:cNvPr id="11" name="Text 8"/>
-          <p:cNvSpPr txBox="1"/>
-          <p:nvPr/>
-        </p:nvSpPr>
-        <p:spPr>
-          <a:xfrm>
-            <a:off x="8138160" y="384048"/>
-            <a:ext cx="502920" cy="502920"/>
-          </a:xfrm>
-          <a:prstGeom prst="rect">
-            <a:avLst/>
-          </a:prstGeom>
-          <a:noFill/>
-          <a:ln/>
-        </p:spPr>
-        <p:txBody>
-          <a:bodyPr wrap="square" lIns="0" tIns="0" rIns="0" bIns="0" rtlCol="0" anchor="ctr"/>
-          <a:lstStyle/>
-          <a:p>
-            <a:pPr algn="ctr" indent="0" marL="0">
-              <a:buNone/>
+              <a:t>Os atendimentos por vício em jogos cresceram mais de 300% em cinco anos no Brasil (Associação Brasileira de Psiquiatria).</a:t>
+            </a:r>
+            <a:endParaRPr lang="en-US" sz="1800" dirty="0"/>
+          </a:p>
+          <a:p>
+            <a:pPr algn="l" marL="342900" indent="-342900">
+              <a:lnSpc>
+                <a:spcPct val="110000"/>
+              </a:lnSpc>
+              <a:spcAft>
+                <a:spcPts val="1400"/>
+              </a:spcAft>
+              <a:buSzPct val="100000"/>
+              <a:buChar char="•"/>
             </a:pPr>
             <a:r>
-              <a:rPr lang="en-US" sz="2000" b="1" dirty="0">
-                <a:solidFill>
-                  <a:srgbClr val="0D1117"/>
+              <a:rPr lang="en-US" sz="1800" b="1" dirty="0">
+                <a:solidFill>
+                  <a:srgbClr val="262626"/>
                 </a:solidFill>
                 <a:latin typeface="Calibri" pitchFamily="34" charset="0"/>
                 <a:ea typeface="Calibri" pitchFamily="34" charset="-122"/>
                 <a:cs typeface="Calibri" pitchFamily="34" charset="-120"/>
               </a:rPr>
-              <a:t>2</a:t>
-            </a:r>
-            <a:endParaRPr lang="en-US" sz="2000" dirty="0"/>
+              <a:t>Se é doença, o tratamento é dever do SUS — isso vai aparecer na nossa proposta.</a:t>
+            </a:r>
+            <a:endParaRPr lang="en-US" sz="1800" dirty="0"/>
           </a:p>
         </p:txBody>
       </p:sp>
@@ -5010,7 +4538,7 @@
     <p:bg>
       <p:bgPr>
         <a:solidFill>
-          <a:srgbClr val="0D1117"/>
+          <a:srgbClr val="FFFFFF"/>
         </a:solidFill>
       </p:bgPr>
     </p:bg>
@@ -5036,8 +4564,8 @@
         </p:nvSpPr>
         <p:spPr>
           <a:xfrm>
-            <a:off x="640080" y="384048"/>
-            <a:ext cx="2377440" cy="411480"/>
+            <a:off x="548640" y="320040"/>
+            <a:ext cx="8046720" cy="685800"/>
           </a:xfrm>
           <a:prstGeom prst="rect">
             <a:avLst/>
@@ -5053,17 +4581,17 @@
               <a:buNone/>
             </a:pPr>
             <a:r>
-              <a:rPr lang="en-US" sz="1500" b="1" spc="400" kern="0" dirty="0">
-                <a:solidFill>
-                  <a:srgbClr val="9BA7B4"/>
+              <a:rPr lang="en-US" sz="3000" b="1" dirty="0">
+                <a:solidFill>
+                  <a:srgbClr val="1F3864"/>
                 </a:solidFill>
                 <a:latin typeface="Calibri" pitchFamily="34" charset="0"/>
                 <a:ea typeface="Calibri" pitchFamily="34" charset="-122"/>
                 <a:cs typeface="Calibri" pitchFamily="34" charset="-120"/>
               </a:rPr>
-              <a:t>POR QUÊ?</a:t>
-            </a:r>
-            <a:endParaRPr lang="en-US" sz="1500" dirty="0"/>
+              <a:t>Por quê 3 — Mira nos jovens</a:t>
+            </a:r>
+            <a:endParaRPr lang="en-US" sz="3000" dirty="0"/>
           </a:p>
         </p:txBody>
       </p:sp>
@@ -5075,91 +4603,8 @@
         </p:nvSpPr>
         <p:spPr>
           <a:xfrm>
-            <a:off x="640080" y="777240"/>
-            <a:ext cx="7863840" cy="868680"/>
-          </a:xfrm>
-          <a:prstGeom prst="rect">
-            <a:avLst/>
-          </a:prstGeom>
-          <a:noFill/>
-          <a:ln/>
-        </p:spPr>
-        <p:txBody>
-          <a:bodyPr wrap="square" lIns="0" tIns="0" rIns="0" bIns="0" rtlCol="0" anchor="ctr"/>
-          <a:lstStyle/>
-          <a:p>
-            <a:pPr indent="0" marL="0">
-              <a:buNone/>
-            </a:pPr>
-            <a:r>
-              <a:rPr lang="en-US" sz="2900" b="1" dirty="0">
-                <a:solidFill>
-                  <a:srgbClr val="F0F6FC"/>
-                </a:solidFill>
-                <a:latin typeface="Calibri" pitchFamily="34" charset="0"/>
-                <a:ea typeface="Calibri" pitchFamily="34" charset="-122"/>
-                <a:cs typeface="Calibri" pitchFamily="34" charset="-120"/>
-              </a:rPr>
-              <a:t>Porque mira nos jovens</a:t>
-            </a:r>
-            <a:endParaRPr lang="en-US" sz="2900" dirty="0"/>
-          </a:p>
-        </p:txBody>
-      </p:sp>
-      <p:sp>
-        <p:nvSpPr>
-          <p:cNvPr id="4" name="Shape 2"/>
-          <p:cNvSpPr/>
-          <p:nvPr/>
-        </p:nvSpPr>
-        <p:spPr>
-          <a:xfrm>
-            <a:off x="640080" y="1965960"/>
-            <a:ext cx="914400" cy="914400"/>
-          </a:xfrm>
-          <a:prstGeom prst="ellipse">
-            <a:avLst/>
-          </a:prstGeom>
-          <a:solidFill>
-            <a:srgbClr val="1C2431"/>
-          </a:solidFill>
-          <a:ln/>
-        </p:spPr>
-      </p:sp>
-      <p:pic>
-        <p:nvPicPr>
-          <p:cNvPr id="5" name="Image 0" descr="preencoded.png">    </p:cNvPr>
-          <p:cNvPicPr>
-            <a:picLocks noChangeAspect="1"/>
-          </p:cNvPicPr>
-          <p:nvPr/>
-        </p:nvPicPr>
-        <p:blipFill>
-          <a:blip r:embed="rId1"/>
-          <a:stretch>
-            <a:fillRect/>
-          </a:stretch>
-        </p:blipFill>
-        <p:spPr>
-          <a:xfrm>
-            <a:off x="877824" y="2203704"/>
-            <a:ext cx="438912" cy="438912"/>
-          </a:xfrm>
-          <a:prstGeom prst="rect">
-            <a:avLst/>
-          </a:prstGeom>
-        </p:spPr>
-      </p:pic>
-      <p:sp>
-        <p:nvSpPr>
-          <p:cNvPr id="6" name="Text 3"/>
-          <p:cNvSpPr txBox="1"/>
-          <p:nvPr/>
-        </p:nvSpPr>
-        <p:spPr>
-          <a:xfrm>
-            <a:off x="1828800" y="1874520"/>
-            <a:ext cx="4206240" cy="2834640"/>
+            <a:off x="640080" y="1371600"/>
+            <a:ext cx="7863840" cy="3474720"/>
           </a:xfrm>
           <a:prstGeom prst="rect">
             <a:avLst/>
@@ -5171,183 +4616,76 @@
           <a:bodyPr wrap="square" lIns="0" tIns="0" rIns="0" bIns="0" rtlCol="0" anchor="t"/>
           <a:lstStyle/>
           <a:p>
-            <a:pPr algn="l" indent="0" marL="0">
+            <a:pPr algn="l" marL="342900" indent="-342900">
               <a:lnSpc>
-                <a:spcPct val="118000"/>
+                <a:spcPct val="110000"/>
               </a:lnSpc>
-              <a:buNone/>
+              <a:spcAft>
+                <a:spcPts val="1400"/>
+              </a:spcAft>
+              <a:buSzPct val="100000"/>
+              <a:buChar char="•"/>
             </a:pPr>
             <a:r>
-              <a:rPr lang="en-US" sz="1550" dirty="0">
-                <a:solidFill>
-                  <a:srgbClr val="F0F6FC"/>
+              <a:rPr lang="en-US" sz="1800" dirty="0">
+                <a:solidFill>
+                  <a:srgbClr val="262626"/>
                 </a:solidFill>
                 <a:latin typeface="Calibri" pitchFamily="34" charset="0"/>
                 <a:ea typeface="Calibri" pitchFamily="34" charset="-122"/>
                 <a:cs typeface="Calibri" pitchFamily="34" charset="-120"/>
               </a:rPr>
-              <a:t>Apostar é proibido para menores de 18 anos — mesmo assim, cerca de 10% dos adolescentes de 14 a 17 anos apostaram no último ano. Influencers e patrocínios no futebol fazem a aposta parecer coisa normal, divertida e lucrativa.</a:t>
-            </a:r>
-            <a:endParaRPr lang="en-US" sz="1550" dirty="0"/>
-          </a:p>
-        </p:txBody>
-      </p:sp>
-      <p:sp>
-        <p:nvSpPr>
-          <p:cNvPr id="7" name="Shape 4"/>
-          <p:cNvSpPr/>
-          <p:nvPr/>
-        </p:nvSpPr>
-        <p:spPr>
-          <a:xfrm>
-            <a:off x="6309360" y="1874520"/>
-            <a:ext cx="2286000" cy="2651760"/>
-          </a:xfrm>
-          <a:prstGeom prst="roundRect">
-            <a:avLst>
-              <a:gd name="adj" fmla="val 4800"/>
-            </a:avLst>
-          </a:prstGeom>
-          <a:solidFill>
-            <a:srgbClr val="161C26"/>
-          </a:solidFill>
-          <a:ln/>
-        </p:spPr>
-      </p:sp>
-      <p:sp>
-        <p:nvSpPr>
-          <p:cNvPr id="8" name="Text 5"/>
-          <p:cNvSpPr txBox="1"/>
-          <p:nvPr/>
-        </p:nvSpPr>
-        <p:spPr>
-          <a:xfrm>
-            <a:off x="6355080" y="2331720"/>
-            <a:ext cx="2194560" cy="914400"/>
-          </a:xfrm>
-          <a:prstGeom prst="rect">
-            <a:avLst/>
-          </a:prstGeom>
-          <a:noFill/>
-          <a:ln/>
-        </p:spPr>
-        <p:txBody>
-          <a:bodyPr wrap="square" lIns="0" tIns="0" rIns="0" bIns="0" rtlCol="0" anchor="ctr"/>
-          <a:lstStyle/>
-          <a:p>
-            <a:pPr algn="ctr" indent="0" marL="0">
-              <a:buNone/>
+              <a:t>Apostar é proibido para menores de 18 anos.</a:t>
+            </a:r>
+            <a:endParaRPr lang="en-US" sz="1800" dirty="0"/>
+          </a:p>
+          <a:p>
+            <a:pPr algn="l" marL="342900" indent="-342900">
+              <a:lnSpc>
+                <a:spcPct val="110000"/>
+              </a:lnSpc>
+              <a:spcAft>
+                <a:spcPts val="1400"/>
+              </a:spcAft>
+              <a:buSzPct val="100000"/>
+              <a:buChar char="•"/>
             </a:pPr>
             <a:r>
-              <a:rPr lang="en-US" sz="3000" b="1" dirty="0">
-                <a:solidFill>
-                  <a:srgbClr val="E3B341"/>
+              <a:rPr lang="en-US" sz="1800" dirty="0">
+                <a:solidFill>
+                  <a:srgbClr val="262626"/>
                 </a:solidFill>
                 <a:latin typeface="Calibri" pitchFamily="34" charset="0"/>
                 <a:ea typeface="Calibri" pitchFamily="34" charset="-122"/>
                 <a:cs typeface="Calibri" pitchFamily="34" charset="-120"/>
               </a:rPr>
-              <a:t>1 em cada 10</a:t>
-            </a:r>
-            <a:endParaRPr lang="en-US" sz="3000" dirty="0"/>
-          </a:p>
-        </p:txBody>
-      </p:sp>
-      <p:sp>
-        <p:nvSpPr>
-          <p:cNvPr id="9" name="Text 6"/>
-          <p:cNvSpPr txBox="1"/>
-          <p:nvPr/>
-        </p:nvSpPr>
-        <p:spPr>
-          <a:xfrm>
-            <a:off x="6446520" y="3291840"/>
-            <a:ext cx="2011680" cy="1005840"/>
-          </a:xfrm>
-          <a:prstGeom prst="rect">
-            <a:avLst/>
-          </a:prstGeom>
-          <a:noFill/>
-          <a:ln/>
-        </p:spPr>
-        <p:txBody>
-          <a:bodyPr wrap="square" lIns="0" tIns="0" rIns="0" bIns="0" rtlCol="0" anchor="t"/>
-          <a:lstStyle/>
-          <a:p>
-            <a:pPr algn="ctr" indent="0" marL="0">
-              <a:buNone/>
+              <a:t>Mesmo assim, cerca de 1 em cada 10 adolescentes de 14 a 17 anos apostou no último ano (Fiocruz).</a:t>
+            </a:r>
+            <a:endParaRPr lang="en-US" sz="1800" dirty="0"/>
+          </a:p>
+          <a:p>
+            <a:pPr algn="l" marL="342900" indent="-342900">
+              <a:lnSpc>
+                <a:spcPct val="110000"/>
+              </a:lnSpc>
+              <a:spcAft>
+                <a:spcPts val="1400"/>
+              </a:spcAft>
+              <a:buSzPct val="100000"/>
+              <a:buChar char="•"/>
             </a:pPr>
             <a:r>
-              <a:rPr lang="en-US" sz="1250" dirty="0">
-                <a:solidFill>
-                  <a:srgbClr val="9BA7B4"/>
+              <a:rPr lang="en-US" sz="1800" dirty="0">
+                <a:solidFill>
+                  <a:srgbClr val="262626"/>
                 </a:solidFill>
                 <a:latin typeface="Calibri" pitchFamily="34" charset="0"/>
                 <a:ea typeface="Calibri" pitchFamily="34" charset="-122"/>
                 <a:cs typeface="Calibri" pitchFamily="34" charset="-120"/>
               </a:rPr>
-              <a:t>adolescentes já apostou, mesmo sendo proibido</a:t>
-            </a:r>
-            <a:endParaRPr lang="en-US" sz="1250" dirty="0"/>
-          </a:p>
-        </p:txBody>
-      </p:sp>
-      <p:sp>
-        <p:nvSpPr>
-          <p:cNvPr id="10" name="Shape 7"/>
-          <p:cNvSpPr/>
-          <p:nvPr/>
-        </p:nvSpPr>
-        <p:spPr>
-          <a:xfrm>
-            <a:off x="8138160" y="384048"/>
-            <a:ext cx="502920" cy="502920"/>
-          </a:xfrm>
-          <a:prstGeom prst="ellipse">
-            <a:avLst/>
-          </a:prstGeom>
-          <a:solidFill>
-            <a:srgbClr val="3FB950"/>
-          </a:solidFill>
-          <a:ln/>
-        </p:spPr>
-      </p:sp>
-      <p:sp>
-        <p:nvSpPr>
-          <p:cNvPr id="11" name="Text 8"/>
-          <p:cNvSpPr txBox="1"/>
-          <p:nvPr/>
-        </p:nvSpPr>
-        <p:spPr>
-          <a:xfrm>
-            <a:off x="8138160" y="384048"/>
-            <a:ext cx="502920" cy="502920"/>
-          </a:xfrm>
-          <a:prstGeom prst="rect">
-            <a:avLst/>
-          </a:prstGeom>
-          <a:noFill/>
-          <a:ln/>
-        </p:spPr>
-        <p:txBody>
-          <a:bodyPr wrap="square" lIns="0" tIns="0" rIns="0" bIns="0" rtlCol="0" anchor="ctr"/>
-          <a:lstStyle/>
-          <a:p>
-            <a:pPr algn="ctr" indent="0" marL="0">
-              <a:buNone/>
-            </a:pPr>
-            <a:r>
-              <a:rPr lang="en-US" sz="2000" b="1" dirty="0">
-                <a:solidFill>
-                  <a:srgbClr val="0D1117"/>
-                </a:solidFill>
-                <a:latin typeface="Calibri" pitchFamily="34" charset="0"/>
-                <a:ea typeface="Calibri" pitchFamily="34" charset="-122"/>
-                <a:cs typeface="Calibri" pitchFamily="34" charset="-120"/>
-              </a:rPr>
-              <a:t>3</a:t>
-            </a:r>
-            <a:endParaRPr lang="en-US" sz="2000" dirty="0"/>
+              <a:t>Influencers e patrocínios no futebol fazem a aposta parecer coisa normal, divertida e lucrativa.</a:t>
+            </a:r>
+            <a:endParaRPr lang="en-US" sz="1800" dirty="0"/>
           </a:p>
         </p:txBody>
       </p:sp>
@@ -5365,7 +4703,7 @@
     <p:bg>
       <p:bgPr>
         <a:solidFill>
-          <a:srgbClr val="0D1117"/>
+          <a:srgbClr val="FFFFFF"/>
         </a:solidFill>
       </p:bgPr>
     </p:bg>
@@ -5391,8 +4729,8 @@
         </p:nvSpPr>
         <p:spPr>
           <a:xfrm>
-            <a:off x="640080" y="384048"/>
-            <a:ext cx="2377440" cy="411480"/>
+            <a:off x="548640" y="320040"/>
+            <a:ext cx="8046720" cy="685800"/>
           </a:xfrm>
           <a:prstGeom prst="rect">
             <a:avLst/>
@@ -5408,17 +4746,17 @@
               <a:buNone/>
             </a:pPr>
             <a:r>
-              <a:rPr lang="en-US" sz="1500" b="1" spc="400" kern="0" dirty="0">
-                <a:solidFill>
-                  <a:srgbClr val="9BA7B4"/>
+              <a:rPr lang="en-US" sz="3000" b="1" dirty="0">
+                <a:solidFill>
+                  <a:srgbClr val="1F3864"/>
                 </a:solidFill>
                 <a:latin typeface="Calibri" pitchFamily="34" charset="0"/>
                 <a:ea typeface="Calibri" pitchFamily="34" charset="-122"/>
                 <a:cs typeface="Calibri" pitchFamily="34" charset="-120"/>
               </a:rPr>
-              <a:t>POR QUÊ?</a:t>
-            </a:r>
-            <a:endParaRPr lang="en-US" sz="1500" dirty="0"/>
+              <a:t>Por quê 4 — O cassino agora mora no bolso</a:t>
+            </a:r>
+            <a:endParaRPr lang="en-US" sz="3000" dirty="0"/>
           </a:p>
         </p:txBody>
       </p:sp>
@@ -5430,91 +4768,8 @@
         </p:nvSpPr>
         <p:spPr>
           <a:xfrm>
-            <a:off x="640080" y="777240"/>
-            <a:ext cx="7863840" cy="868680"/>
-          </a:xfrm>
-          <a:prstGeom prst="rect">
-            <a:avLst/>
-          </a:prstGeom>
-          <a:noFill/>
-          <a:ln/>
-        </p:spPr>
-        <p:txBody>
-          <a:bodyPr wrap="square" lIns="0" tIns="0" rIns="0" bIns="0" rtlCol="0" anchor="ctr"/>
-          <a:lstStyle/>
-          <a:p>
-            <a:pPr indent="0" marL="0">
-              <a:buNone/>
-            </a:pPr>
-            <a:r>
-              <a:rPr lang="en-US" sz="2900" b="1" dirty="0">
-                <a:solidFill>
-                  <a:srgbClr val="F0F6FC"/>
-                </a:solidFill>
-                <a:latin typeface="Calibri" pitchFamily="34" charset="0"/>
-                <a:ea typeface="Calibri" pitchFamily="34" charset="-122"/>
-                <a:cs typeface="Calibri" pitchFamily="34" charset="-120"/>
-              </a:rPr>
-              <a:t>Porque o cassino agora mora no bolso</a:t>
-            </a:r>
-            <a:endParaRPr lang="en-US" sz="2900" dirty="0"/>
-          </a:p>
-        </p:txBody>
-      </p:sp>
-      <p:sp>
-        <p:nvSpPr>
-          <p:cNvPr id="4" name="Shape 2"/>
-          <p:cNvSpPr/>
-          <p:nvPr/>
-        </p:nvSpPr>
-        <p:spPr>
-          <a:xfrm>
-            <a:off x="640080" y="1965960"/>
-            <a:ext cx="914400" cy="914400"/>
-          </a:xfrm>
-          <a:prstGeom prst="ellipse">
-            <a:avLst/>
-          </a:prstGeom>
-          <a:solidFill>
-            <a:srgbClr val="1C2431"/>
-          </a:solidFill>
-          <a:ln/>
-        </p:spPr>
-      </p:sp>
-      <p:pic>
-        <p:nvPicPr>
-          <p:cNvPr id="5" name="Image 0" descr="preencoded.png">    </p:cNvPr>
-          <p:cNvPicPr>
-            <a:picLocks noChangeAspect="1"/>
-          </p:cNvPicPr>
-          <p:nvPr/>
-        </p:nvPicPr>
-        <p:blipFill>
-          <a:blip r:embed="rId1"/>
-          <a:stretch>
-            <a:fillRect/>
-          </a:stretch>
-        </p:blipFill>
-        <p:spPr>
-          <a:xfrm>
-            <a:off x="877824" y="2203704"/>
-            <a:ext cx="438912" cy="438912"/>
-          </a:xfrm>
-          <a:prstGeom prst="rect">
-            <a:avLst/>
-          </a:prstGeom>
-        </p:spPr>
-      </p:pic>
-      <p:sp>
-        <p:nvSpPr>
-          <p:cNvPr id="6" name="Text 3"/>
-          <p:cNvSpPr txBox="1"/>
-          <p:nvPr/>
-        </p:nvSpPr>
-        <p:spPr>
-          <a:xfrm>
-            <a:off x="1828800" y="1874520"/>
-            <a:ext cx="4206240" cy="2834640"/>
+            <a:off x="640080" y="1371600"/>
+            <a:ext cx="7863840" cy="3474720"/>
           </a:xfrm>
           <a:prstGeom prst="rect">
             <a:avLst/>
@@ -5526,183 +4781,76 @@
           <a:bodyPr wrap="square" lIns="0" tIns="0" rIns="0" bIns="0" rtlCol="0" anchor="t"/>
           <a:lstStyle/>
           <a:p>
-            <a:pPr algn="l" indent="0" marL="0">
+            <a:pPr algn="l" marL="342900" indent="-342900">
               <a:lnSpc>
-                <a:spcPct val="118000"/>
+                <a:spcPct val="110000"/>
               </a:lnSpc>
-              <a:buNone/>
+              <a:spcAft>
+                <a:spcPts val="1400"/>
+              </a:spcAft>
+              <a:buSzPct val="100000"/>
+              <a:buChar char="•"/>
             </a:pPr>
             <a:r>
-              <a:rPr lang="en-US" sz="1550" dirty="0">
-                <a:solidFill>
-                  <a:srgbClr val="F0F6FC"/>
+              <a:rPr lang="en-US" sz="1800" dirty="0">
+                <a:solidFill>
+                  <a:srgbClr val="262626"/>
                 </a:solidFill>
                 <a:latin typeface="Calibri" pitchFamily="34" charset="0"/>
                 <a:ea typeface="Calibri" pitchFamily="34" charset="-122"/>
                 <a:cs typeface="Calibri" pitchFamily="34" charset="-120"/>
               </a:rPr>
-              <a:t>As plataformas funcionam 24 horas por dia no celular, com Pix instantâneo, bônus e joguinhos de recompensa rápida (como o 'jogo do tigrinho') desenhados para prender o cérebro — o mesmo mecanismo de outras dependências.</a:t>
-            </a:r>
-            <a:endParaRPr lang="en-US" sz="1550" dirty="0"/>
-          </a:p>
-        </p:txBody>
-      </p:sp>
-      <p:sp>
-        <p:nvSpPr>
-          <p:cNvPr id="7" name="Shape 4"/>
-          <p:cNvSpPr/>
-          <p:nvPr/>
-        </p:nvSpPr>
-        <p:spPr>
-          <a:xfrm>
-            <a:off x="6309360" y="1874520"/>
-            <a:ext cx="2286000" cy="2651760"/>
-          </a:xfrm>
-          <a:prstGeom prst="roundRect">
-            <a:avLst>
-              <a:gd name="adj" fmla="val 4800"/>
-            </a:avLst>
-          </a:prstGeom>
-          <a:solidFill>
-            <a:srgbClr val="161C26"/>
-          </a:solidFill>
-          <a:ln/>
-        </p:spPr>
-      </p:sp>
-      <p:sp>
-        <p:nvSpPr>
-          <p:cNvPr id="8" name="Text 5"/>
-          <p:cNvSpPr txBox="1"/>
-          <p:nvPr/>
-        </p:nvSpPr>
-        <p:spPr>
-          <a:xfrm>
-            <a:off x="6355080" y="2331720"/>
-            <a:ext cx="2194560" cy="914400"/>
-          </a:xfrm>
-          <a:prstGeom prst="rect">
-            <a:avLst/>
-          </a:prstGeom>
-          <a:noFill/>
-          <a:ln/>
-        </p:spPr>
-        <p:txBody>
-          <a:bodyPr wrap="square" lIns="0" tIns="0" rIns="0" bIns="0" rtlCol="0" anchor="ctr"/>
-          <a:lstStyle/>
-          <a:p>
-            <a:pPr algn="ctr" indent="0" marL="0">
-              <a:buNone/>
+              <a:t>As plataformas funcionam 24 horas por dia no celular, com Pix instantâneo e bônus.</a:t>
+            </a:r>
+            <a:endParaRPr lang="en-US" sz="1800" dirty="0"/>
+          </a:p>
+          <a:p>
+            <a:pPr algn="l" marL="342900" indent="-342900">
+              <a:lnSpc>
+                <a:spcPct val="110000"/>
+              </a:lnSpc>
+              <a:spcAft>
+                <a:spcPts val="1400"/>
+              </a:spcAft>
+              <a:buSzPct val="100000"/>
+              <a:buChar char="•"/>
             </a:pPr>
             <a:r>
-              <a:rPr lang="en-US" sz="4000" b="1" dirty="0">
-                <a:solidFill>
-                  <a:srgbClr val="3FB950"/>
+              <a:rPr lang="en-US" sz="1800" dirty="0">
+                <a:solidFill>
+                  <a:srgbClr val="262626"/>
                 </a:solidFill>
                 <a:latin typeface="Calibri" pitchFamily="34" charset="0"/>
                 <a:ea typeface="Calibri" pitchFamily="34" charset="-122"/>
                 <a:cs typeface="Calibri" pitchFamily="34" charset="-120"/>
               </a:rPr>
-              <a:t>24h</a:t>
-            </a:r>
-            <a:endParaRPr lang="en-US" sz="4000" dirty="0"/>
-          </a:p>
-        </p:txBody>
-      </p:sp>
-      <p:sp>
-        <p:nvSpPr>
-          <p:cNvPr id="9" name="Text 6"/>
-          <p:cNvSpPr txBox="1"/>
-          <p:nvPr/>
-        </p:nvSpPr>
-        <p:spPr>
-          <a:xfrm>
-            <a:off x="6446520" y="3291840"/>
-            <a:ext cx="2011680" cy="1005840"/>
-          </a:xfrm>
-          <a:prstGeom prst="rect">
-            <a:avLst/>
-          </a:prstGeom>
-          <a:noFill/>
-          <a:ln/>
-        </p:spPr>
-        <p:txBody>
-          <a:bodyPr wrap="square" lIns="0" tIns="0" rIns="0" bIns="0" rtlCol="0" anchor="t"/>
-          <a:lstStyle/>
-          <a:p>
-            <a:pPr algn="ctr" indent="0" marL="0">
-              <a:buNone/>
+              <a:t>Joguinhos de recompensa rápida (como o 'jogo do tigrinho') são desenhados para prender o cérebro.</a:t>
+            </a:r>
+            <a:endParaRPr lang="en-US" sz="1800" dirty="0"/>
+          </a:p>
+          <a:p>
+            <a:pPr algn="l" marL="342900" indent="-342900">
+              <a:lnSpc>
+                <a:spcPct val="110000"/>
+              </a:lnSpc>
+              <a:spcAft>
+                <a:spcPts val="1400"/>
+              </a:spcAft>
+              <a:buSzPct val="100000"/>
+              <a:buChar char="•"/>
             </a:pPr>
             <a:r>
-              <a:rPr lang="en-US" sz="1250" dirty="0">
-                <a:solidFill>
-                  <a:srgbClr val="9BA7B4"/>
+              <a:rPr lang="en-US" sz="1800" dirty="0">
+                <a:solidFill>
+                  <a:srgbClr val="262626"/>
                 </a:solidFill>
                 <a:latin typeface="Calibri" pitchFamily="34" charset="0"/>
                 <a:ea typeface="Calibri" pitchFamily="34" charset="-122"/>
                 <a:cs typeface="Calibri" pitchFamily="34" charset="-120"/>
               </a:rPr>
-              <a:t>de acesso ilimitado, sem sair de casa</a:t>
-            </a:r>
-            <a:endParaRPr lang="en-US" sz="1250" dirty="0"/>
-          </a:p>
-        </p:txBody>
-      </p:sp>
-      <p:sp>
-        <p:nvSpPr>
-          <p:cNvPr id="10" name="Shape 7"/>
-          <p:cNvSpPr/>
-          <p:nvPr/>
-        </p:nvSpPr>
-        <p:spPr>
-          <a:xfrm>
-            <a:off x="8138160" y="384048"/>
-            <a:ext cx="502920" cy="502920"/>
-          </a:xfrm>
-          <a:prstGeom prst="ellipse">
-            <a:avLst/>
-          </a:prstGeom>
-          <a:solidFill>
-            <a:srgbClr val="3FB950"/>
-          </a:solidFill>
-          <a:ln/>
-        </p:spPr>
-      </p:sp>
-      <p:sp>
-        <p:nvSpPr>
-          <p:cNvPr id="11" name="Text 8"/>
-          <p:cNvSpPr txBox="1"/>
-          <p:nvPr/>
-        </p:nvSpPr>
-        <p:spPr>
-          <a:xfrm>
-            <a:off x="8138160" y="384048"/>
-            <a:ext cx="502920" cy="502920"/>
-          </a:xfrm>
-          <a:prstGeom prst="rect">
-            <a:avLst/>
-          </a:prstGeom>
-          <a:noFill/>
-          <a:ln/>
-        </p:spPr>
-        <p:txBody>
-          <a:bodyPr wrap="square" lIns="0" tIns="0" rIns="0" bIns="0" rtlCol="0" anchor="ctr"/>
-          <a:lstStyle/>
-          <a:p>
-            <a:pPr algn="ctr" indent="0" marL="0">
-              <a:buNone/>
-            </a:pPr>
-            <a:r>
-              <a:rPr lang="en-US" sz="2000" b="1" dirty="0">
-                <a:solidFill>
-                  <a:srgbClr val="0D1117"/>
-                </a:solidFill>
-                <a:latin typeface="Calibri" pitchFamily="34" charset="0"/>
-                <a:ea typeface="Calibri" pitchFamily="34" charset="-122"/>
-                <a:cs typeface="Calibri" pitchFamily="34" charset="-120"/>
-              </a:rPr>
-              <a:t>4</a:t>
-            </a:r>
-            <a:endParaRPr lang="en-US" sz="2000" dirty="0"/>
+              <a:t>Diferente do cassino antigo: não tem porta, não tem horário e ninguém vê você perder.</a:t>
+            </a:r>
+            <a:endParaRPr lang="en-US" sz="1800" dirty="0"/>
           </a:p>
         </p:txBody>
       </p:sp>
@@ -5720,7 +4868,7 @@
     <p:bg>
       <p:bgPr>
         <a:solidFill>
-          <a:srgbClr val="0D1117"/>
+          <a:srgbClr val="FFFFFF"/>
         </a:solidFill>
       </p:bgPr>
     </p:bg>
@@ -5746,8 +4894,8 @@
         </p:nvSpPr>
         <p:spPr>
           <a:xfrm>
-            <a:off x="640080" y="384048"/>
-            <a:ext cx="2743200" cy="365760"/>
+            <a:off x="548640" y="320040"/>
+            <a:ext cx="8046720" cy="685800"/>
           </a:xfrm>
           <a:prstGeom prst="rect">
             <a:avLst/>
@@ -5763,17 +4911,17 @@
               <a:buNone/>
             </a:pPr>
             <a:r>
-              <a:rPr lang="en-US" sz="1500" b="1" spc="400" kern="0" dirty="0">
-                <a:solidFill>
-                  <a:srgbClr val="E3B341"/>
+              <a:rPr lang="en-US" sz="3000" b="1" dirty="0">
+                <a:solidFill>
+                  <a:srgbClr val="1F3864"/>
                 </a:solidFill>
                 <a:latin typeface="Calibri" pitchFamily="34" charset="0"/>
                 <a:ea typeface="Calibri" pitchFamily="34" charset="-122"/>
                 <a:cs typeface="Calibri" pitchFamily="34" charset="-120"/>
               </a:rPr>
-              <a:t>MATEMÁTICA</a:t>
-            </a:r>
-            <a:endParaRPr lang="en-US" sz="1500" dirty="0"/>
+              <a:t>Matemática: por que a casa sempre vence</a:t>
+            </a:r>
+            <a:endParaRPr lang="en-US" sz="3000" dirty="0"/>
           </a:p>
         </p:txBody>
       </p:sp>
@@ -5785,69 +4933,8 @@
         </p:nvSpPr>
         <p:spPr>
           <a:xfrm>
-            <a:off x="640080" y="749808"/>
-            <a:ext cx="7863840" cy="548640"/>
-          </a:xfrm>
-          <a:prstGeom prst="rect">
-            <a:avLst/>
-          </a:prstGeom>
-          <a:noFill/>
-          <a:ln/>
-        </p:spPr>
-        <p:txBody>
-          <a:bodyPr wrap="square" lIns="0" tIns="0" rIns="0" bIns="0" rtlCol="0" anchor="ctr"/>
-          <a:lstStyle/>
-          <a:p>
-            <a:pPr indent="0" marL="0">
-              <a:buNone/>
-            </a:pPr>
-            <a:r>
-              <a:rPr lang="en-US" sz="2900" b="1" dirty="0">
-                <a:solidFill>
-                  <a:srgbClr val="F0F6FC"/>
-                </a:solidFill>
-                <a:latin typeface="Calibri" pitchFamily="34" charset="0"/>
-                <a:ea typeface="Calibri" pitchFamily="34" charset="-122"/>
-                <a:cs typeface="Calibri" pitchFamily="34" charset="-120"/>
-              </a:rPr>
-              <a:t>Por que a casa sempre vence</a:t>
-            </a:r>
-            <a:endParaRPr lang="en-US" sz="2900" dirty="0"/>
-          </a:p>
-        </p:txBody>
-      </p:sp>
-      <p:sp>
-        <p:nvSpPr>
-          <p:cNvPr id="4" name="Shape 2"/>
-          <p:cNvSpPr/>
-          <p:nvPr/>
-        </p:nvSpPr>
-        <p:spPr>
-          <a:xfrm>
-            <a:off x="640080" y="1463040"/>
-            <a:ext cx="3246120" cy="3200400"/>
-          </a:xfrm>
-          <a:prstGeom prst="roundRect">
-            <a:avLst>
-              <a:gd name="adj" fmla="val 3429"/>
-            </a:avLst>
-          </a:prstGeom>
-          <a:solidFill>
-            <a:srgbClr val="161C26"/>
-          </a:solidFill>
-          <a:ln/>
-        </p:spPr>
-      </p:sp>
-      <p:sp>
-        <p:nvSpPr>
-          <p:cNvPr id="5" name="Text 3"/>
-          <p:cNvSpPr txBox="1"/>
-          <p:nvPr/>
-        </p:nvSpPr>
-        <p:spPr>
-          <a:xfrm>
-            <a:off x="868680" y="1691640"/>
-            <a:ext cx="2788920" cy="2788920"/>
+            <a:off x="548640" y="1280160"/>
+            <a:ext cx="3749040" cy="3474720"/>
           </a:xfrm>
           <a:prstGeom prst="rect">
             <a:avLst/>
@@ -5859,144 +4946,136 @@
           <a:bodyPr wrap="square" lIns="0" tIns="0" rIns="0" bIns="0" rtlCol="0" anchor="t"/>
           <a:lstStyle/>
           <a:p>
-            <a:pPr indent="0" marL="0">
+            <a:pPr algn="l" marL="342900" indent="-342900">
               <a:lnSpc>
-                <a:spcPct val="112000"/>
+                <a:spcPct val="110000"/>
               </a:lnSpc>
-              <a:buNone/>
+              <a:spcAft>
+                <a:spcPts val="1000"/>
+              </a:spcAft>
+              <a:buSzPct val="100000"/>
+              <a:buChar char="•"/>
             </a:pPr>
             <a:r>
-              <a:rPr lang="en-US" sz="1300" b="1" dirty="0">
-                <a:solidFill>
-                  <a:srgbClr val="E3B341"/>
+              <a:rPr lang="en-US" sz="1450" dirty="0">
+                <a:solidFill>
+                  <a:srgbClr val="262626"/>
                 </a:solidFill>
                 <a:latin typeface="Calibri" pitchFamily="34" charset="0"/>
                 <a:ea typeface="Calibri" pitchFamily="34" charset="-122"/>
                 <a:cs typeface="Calibri" pitchFamily="34" charset="-120"/>
               </a:rPr>
-              <a:t>VALOR ESPERADO
-</a:t>
-            </a:r>
-            <a:pPr indent="0" marL="0">
+              <a:t>O 'jogo do tigrinho' devolve, em média, 96,8% do que recebe (RTP divulgado).</a:t>
+            </a:r>
+            <a:endParaRPr lang="en-US" sz="1450" dirty="0"/>
+          </a:p>
+          <a:p>
+            <a:pPr algn="l" marL="342900" indent="-342900">
               <a:lnSpc>
-                <a:spcPct val="112000"/>
+                <a:spcPct val="110000"/>
               </a:lnSpc>
-              <a:buNone/>
+              <a:spcAft>
+                <a:spcPts val="1000"/>
+              </a:spcAft>
+              <a:buSzPct val="100000"/>
+              <a:buChar char="•"/>
             </a:pPr>
             <a:r>
-              <a:rPr lang="en-US" sz="1300" dirty="0">
-                <a:solidFill>
-                  <a:srgbClr val="F0F6FC"/>
+              <a:rPr lang="en-US" sz="1450" b="1" dirty="0">
+                <a:solidFill>
+                  <a:srgbClr val="262626"/>
                 </a:solidFill>
                 <a:latin typeface="Calibri" pitchFamily="34" charset="0"/>
                 <a:ea typeface="Calibri" pitchFamily="34" charset="-122"/>
                 <a:cs typeface="Calibri" pitchFamily="34" charset="-120"/>
               </a:rPr>
-              <a:t>O 'jogo do tigrinho' devolve, em média, 96,8% do que recebe (RTP divulgado).
-</a:t>
-            </a:r>
-            <a:pPr indent="0" marL="0">
+              <a:t>Valor esperado: E = 100 × 0,968 = R$ 96,80</a:t>
+            </a:r>
+            <a:endParaRPr lang="en-US" sz="1450" dirty="0"/>
+          </a:p>
+          <a:p>
+            <a:pPr algn="l" marL="342900" indent="-342900">
               <a:lnSpc>
-                <a:spcPct val="112000"/>
+                <a:spcPct val="110000"/>
               </a:lnSpc>
-              <a:buNone/>
+              <a:spcAft>
+                <a:spcPts val="1000"/>
+              </a:spcAft>
+              <a:buSzPct val="100000"/>
+              <a:buChar char="•"/>
             </a:pPr>
             <a:r>
-              <a:rPr lang="en-US" sz="1300" dirty="0">
-                <a:solidFill>
-                  <a:srgbClr val="F0F6FC"/>
+              <a:rPr lang="en-US" sz="1450" b="1" dirty="0">
+                <a:solidFill>
+                  <a:srgbClr val="C00000"/>
                 </a:solidFill>
                 <a:latin typeface="Calibri" pitchFamily="34" charset="0"/>
                 <a:ea typeface="Calibri" pitchFamily="34" charset="-122"/>
                 <a:cs typeface="Calibri" pitchFamily="34" charset="-120"/>
               </a:rPr>
-              <a:t>A cada R$ 100 apostados:
-</a:t>
-            </a:r>
-            <a:pPr indent="0" marL="0">
+              <a:t>Perda média: R$ 3,20 a cada R$ 100 apostados</a:t>
+            </a:r>
+            <a:endParaRPr lang="en-US" sz="1450" dirty="0"/>
+          </a:p>
+          <a:p>
+            <a:pPr algn="l" marL="342900" indent="-342900">
               <a:lnSpc>
-                <a:spcPct val="112000"/>
+                <a:spcPct val="110000"/>
               </a:lnSpc>
-              <a:buNone/>
+              <a:spcAft>
+                <a:spcPts val="1000"/>
+              </a:spcAft>
+              <a:buSzPct val="100000"/>
+              <a:buChar char="•"/>
             </a:pPr>
             <a:r>
-              <a:rPr lang="en-US" sz="1350" b="1" dirty="0">
-                <a:solidFill>
-                  <a:srgbClr val="F0F6FC"/>
+              <a:rPr lang="en-US" sz="1450" dirty="0">
+                <a:solidFill>
+                  <a:srgbClr val="262626"/>
                 </a:solidFill>
                 <a:latin typeface="Calibri" pitchFamily="34" charset="0"/>
                 <a:ea typeface="Calibri" pitchFamily="34" charset="-122"/>
                 <a:cs typeface="Calibri" pitchFamily="34" charset="-120"/>
               </a:rPr>
-              <a:t>E = 100 × 0,968 = R$ 96,80
-</a:t>
-            </a:r>
-            <a:pPr indent="0" marL="0">
+              <a:t>Reapostando tudo n vezes: E(n) = 100 × 0,968ⁿ (função exponencial decrescente).</a:t>
+            </a:r>
+            <a:endParaRPr lang="en-US" sz="1450" dirty="0"/>
+          </a:p>
+          <a:p>
+            <a:pPr algn="l" marL="342900" indent="-342900">
               <a:lnSpc>
-                <a:spcPct val="112000"/>
+                <a:spcPct val="110000"/>
               </a:lnSpc>
-              <a:buNone/>
+              <a:spcAft>
+                <a:spcPts val="1000"/>
+              </a:spcAft>
+              <a:buSzPct val="100000"/>
+              <a:buChar char="•"/>
             </a:pPr>
             <a:r>
-              <a:rPr lang="en-US" sz="1300" b="1" dirty="0">
-                <a:solidFill>
-                  <a:srgbClr val="F85149"/>
+              <a:rPr lang="en-US" sz="1450" dirty="0">
+                <a:solidFill>
+                  <a:srgbClr val="262626"/>
                 </a:solidFill>
                 <a:latin typeface="Calibri" pitchFamily="34" charset="0"/>
                 <a:ea typeface="Calibri" pitchFamily="34" charset="-122"/>
                 <a:cs typeface="Calibri" pitchFamily="34" charset="-120"/>
               </a:rPr>
-              <a:t>Perda média: R$ 3,20 por rodada
-</a:t>
-            </a:r>
-            <a:pPr indent="0" marL="0">
-              <a:lnSpc>
-                <a:spcPct val="112000"/>
-              </a:lnSpc>
-              <a:buNone/>
-            </a:pPr>
-            <a:r>
-              <a:rPr lang="en-US" sz="1300" dirty="0">
-                <a:solidFill>
-                  <a:srgbClr val="F0F6FC"/>
-                </a:solidFill>
-                <a:latin typeface="Calibri" pitchFamily="34" charset="0"/>
-                <a:ea typeface="Calibri" pitchFamily="34" charset="-122"/>
-                <a:cs typeface="Calibri" pitchFamily="34" charset="-120"/>
-              </a:rPr>
-              <a:t>Reapostando tudo n vezes:
-</a:t>
-            </a:r>
-            <a:pPr indent="0" marL="0">
-              <a:lnSpc>
-                <a:spcPct val="112000"/>
-              </a:lnSpc>
-              <a:buNone/>
-            </a:pPr>
-            <a:r>
-              <a:rPr lang="en-US" sz="1500" b="1" dirty="0">
-                <a:solidFill>
-                  <a:srgbClr val="F0F6FC"/>
-                </a:solidFill>
-                <a:latin typeface="Calibri" pitchFamily="34" charset="0"/>
-                <a:ea typeface="Calibri" pitchFamily="34" charset="-122"/>
-                <a:cs typeface="Calibri" pitchFamily="34" charset="-120"/>
-              </a:rPr>
-              <a:t>E(n) = 100 × 0,968ⁿ</a:t>
-            </a:r>
-            <a:endParaRPr lang="en-US" sz="1300" dirty="0"/>
+              <a:t>Não é azar — jogando o suficiente, a perda é matemática.</a:t>
+            </a:r>
+            <a:endParaRPr lang="en-US" sz="1450" dirty="0"/>
           </a:p>
         </p:txBody>
       </p:sp>
       <p:graphicFrame>
         <p:nvGraphicFramePr>
-          <p:cNvPr id="6" name="Chart 0" descr=""/>
+          <p:cNvPr id="4" name="Chart 0" descr=""/>
           <p:cNvGraphicFramePr/>
           <p:nvPr/>
         </p:nvGraphicFramePr>
         <p:xfrm>
-          <a:off x="4114800" y="1417320"/>
-          <a:ext cx="4480560" cy="3063240"/>
+          <a:off x="4480560" y="1234440"/>
+          <a:ext cx="4206240" cy="3291840"/>
         </p:xfrm>
         <a:graphic xmlns:a="http://schemas.openxmlformats.org/drawingml/2006/main">
           <a:graphicData uri="http://schemas.openxmlformats.org/drawingml/2006/chart">
@@ -6004,45 +5083,6 @@
           </a:graphicData>
         </a:graphic>
       </p:graphicFrame>
-      <p:sp>
-        <p:nvSpPr>
-          <p:cNvPr id="7" name="Text 4"/>
-          <p:cNvSpPr txBox="1"/>
-          <p:nvPr/>
-        </p:nvSpPr>
-        <p:spPr>
-          <a:xfrm>
-            <a:off x="4114800" y="4480560"/>
-            <a:ext cx="4480560" cy="365760"/>
-          </a:xfrm>
-          <a:prstGeom prst="rect">
-            <a:avLst/>
-          </a:prstGeom>
-          <a:noFill/>
-          <a:ln/>
-        </p:spPr>
-        <p:txBody>
-          <a:bodyPr wrap="square" lIns="0" tIns="0" rIns="0" bIns="0" rtlCol="0" anchor="ctr"/>
-          <a:lstStyle/>
-          <a:p>
-            <a:pPr indent="0" marL="0">
-              <a:buNone/>
-            </a:pPr>
-            <a:r>
-              <a:rPr lang="en-US" sz="1150" i="1" dirty="0">
-                <a:solidFill>
-                  <a:srgbClr val="9BA7B4"/>
-                </a:solidFill>
-                <a:latin typeface="Calibri" pitchFamily="34" charset="0"/>
-                <a:ea typeface="Calibri" pitchFamily="34" charset="-122"/>
-                <a:cs typeface="Calibri" pitchFamily="34" charset="-120"/>
-              </a:rPr>
-              <a:t>Não é azar: é uma função exponencial decrescente. Jogando o suficiente, a perda é matemática.</a:t>
-            </a:r>
-            <a:endParaRPr lang="en-US" sz="1150" dirty="0"/>
-          </a:p>
-        </p:txBody>
-      </p:sp>
     </p:spTree>
   </p:cSld>
   <p:clrMapOvr>
@@ -6057,7 +5097,7 @@
     <p:bg>
       <p:bgPr>
         <a:solidFill>
-          <a:srgbClr val="0D1117"/>
+          <a:srgbClr val="FFFFFF"/>
         </a:solidFill>
       </p:bgPr>
     </p:bg>
@@ -6083,8 +5123,8 @@
         </p:nvSpPr>
         <p:spPr>
           <a:xfrm>
-            <a:off x="640080" y="384048"/>
-            <a:ext cx="2743200" cy="365760"/>
+            <a:off x="548640" y="320040"/>
+            <a:ext cx="8046720" cy="685800"/>
           </a:xfrm>
           <a:prstGeom prst="rect">
             <a:avLst/>
@@ -6100,48 +5140,9 @@
               <a:buNone/>
             </a:pPr>
             <a:r>
-              <a:rPr lang="en-US" sz="1500" b="1" spc="400" kern="0" dirty="0">
-                <a:solidFill>
-                  <a:srgbClr val="E3B341"/>
-                </a:solidFill>
-                <a:latin typeface="Calibri" pitchFamily="34" charset="0"/>
-                <a:ea typeface="Calibri" pitchFamily="34" charset="-122"/>
-                <a:cs typeface="Calibri" pitchFamily="34" charset="-120"/>
-              </a:rPr>
-              <a:t>MATEMÁTICA</a:t>
-            </a:r>
-            <a:endParaRPr lang="en-US" sz="1500" dirty="0"/>
-          </a:p>
-        </p:txBody>
-      </p:sp>
-      <p:sp>
-        <p:nvSpPr>
-          <p:cNvPr id="3" name="Text 1"/>
-          <p:cNvSpPr txBox="1"/>
-          <p:nvPr/>
-        </p:nvSpPr>
-        <p:spPr>
-          <a:xfrm>
-            <a:off x="640080" y="749808"/>
-            <a:ext cx="7863840" cy="548640"/>
-          </a:xfrm>
-          <a:prstGeom prst="rect">
-            <a:avLst/>
-          </a:prstGeom>
-          <a:noFill/>
-          <a:ln/>
-        </p:spPr>
-        <p:txBody>
-          <a:bodyPr wrap="square" lIns="0" tIns="0" rIns="0" bIns="0" rtlCol="0" anchor="ctr"/>
-          <a:lstStyle/>
-          <a:p>
-            <a:pPr indent="0" marL="0">
-              <a:buNone/>
-            </a:pPr>
-            <a:r>
-              <a:rPr lang="en-US" sz="2900" b="1" dirty="0">
-                <a:solidFill>
-                  <a:srgbClr val="F0F6FC"/>
+              <a:rPr lang="en-US" sz="3000" b="1" dirty="0">
+                <a:solidFill>
+                  <a:srgbClr val="1F3864"/>
                 </a:solidFill>
                 <a:latin typeface="Calibri" pitchFamily="34" charset="0"/>
                 <a:ea typeface="Calibri" pitchFamily="34" charset="-122"/>
@@ -6149,19 +5150,19 @@
               </a:rPr>
               <a:t>O vício em números</a:t>
             </a:r>
-            <a:endParaRPr lang="en-US" sz="2900" dirty="0"/>
+            <a:endParaRPr lang="en-US" sz="3000" dirty="0"/>
           </a:p>
         </p:txBody>
       </p:sp>
       <p:graphicFrame>
         <p:nvGraphicFramePr>
-          <p:cNvPr id="4" name="Chart 0" descr=""/>
+          <p:cNvPr id="3" name="Chart 0" descr=""/>
           <p:cNvGraphicFramePr/>
           <p:nvPr/>
         </p:nvGraphicFramePr>
         <p:xfrm>
-          <a:off x="502920" y="1463040"/>
-          <a:ext cx="5212080" cy="2834640"/>
+          <a:off x="365760" y="1280160"/>
+          <a:ext cx="5303520" cy="2926080"/>
         </p:xfrm>
         <a:graphic xmlns:a="http://schemas.openxmlformats.org/drawingml/2006/main">
           <a:graphicData uri="http://schemas.openxmlformats.org/drawingml/2006/chart">
@@ -6171,13 +5172,13 @@
       </p:graphicFrame>
       <p:sp>
         <p:nvSpPr>
-          <p:cNvPr id="5" name="Text 2"/>
+          <p:cNvPr id="4" name="Text 1"/>
           <p:cNvSpPr txBox="1"/>
           <p:nvPr/>
         </p:nvSpPr>
         <p:spPr>
           <a:xfrm>
-            <a:off x="640080" y="4343400"/>
+            <a:off x="548640" y="4251960"/>
             <a:ext cx="5029200" cy="320040"/>
           </a:xfrm>
           <a:prstGeom prst="rect">
@@ -6196,13 +5197,13 @@
             <a:r>
               <a:rPr lang="en-US" sz="1000" dirty="0">
                 <a:solidFill>
-                  <a:srgbClr val="9BA7B4"/>
+                  <a:srgbClr val="595959"/>
                 </a:solidFill>
                 <a:latin typeface="Calibri" pitchFamily="34" charset="0"/>
                 <a:ea typeface="Calibri" pitchFamily="34" charset="-122"/>
                 <a:cs typeface="Calibri" pitchFamily="34" charset="-120"/>
               </a:rPr>
-              <a:t>Fontes: FIA Business School / Ibevar (2025)</a:t>
+              <a:t>Fonte: FIA Business School / Ibevar (2025)</a:t>
             </a:r>
             <a:endParaRPr lang="en-US" sz="1000" dirty="0"/>
           </a:p>
@@ -6210,13 +5211,13 @@
       </p:sp>
       <p:graphicFrame>
         <p:nvGraphicFramePr>
-          <p:cNvPr id="6" name="Chart 1" descr=""/>
+          <p:cNvPr id="5" name="Chart 1" descr=""/>
           <p:cNvGraphicFramePr/>
           <p:nvPr/>
         </p:nvGraphicFramePr>
         <p:xfrm>
-          <a:off x="5943600" y="1417320"/>
-          <a:ext cx="2651760" cy="2651760"/>
+          <a:off x="5989320" y="1325880"/>
+          <a:ext cx="2468880" cy="2468880"/>
         </p:xfrm>
         <a:graphic xmlns:a="http://schemas.openxmlformats.org/drawingml/2006/main">
           <a:graphicData uri="http://schemas.openxmlformats.org/drawingml/2006/chart">
@@ -6226,14 +5227,14 @@
       </p:graphicFrame>
       <p:sp>
         <p:nvSpPr>
-          <p:cNvPr id="7" name="Text 3"/>
+          <p:cNvPr id="6" name="Text 2"/>
           <p:cNvSpPr txBox="1"/>
           <p:nvPr/>
         </p:nvSpPr>
         <p:spPr>
           <a:xfrm>
-            <a:off x="5943600" y="2377440"/>
-            <a:ext cx="2651760" cy="640080"/>
+            <a:off x="5989320" y="2212848"/>
+            <a:ext cx="2468880" cy="594360"/>
           </a:xfrm>
           <a:prstGeom prst="rect">
             <a:avLst/>
@@ -6249,9 +5250,9 @@
               <a:buNone/>
             </a:pPr>
             <a:r>
-              <a:rPr lang="en-US" sz="3000" b="1" dirty="0">
-                <a:solidFill>
-                  <a:srgbClr val="F85149"/>
+              <a:rPr lang="en-US" sz="2600" b="1" dirty="0">
+                <a:solidFill>
+                  <a:srgbClr val="ED7D31"/>
                 </a:solidFill>
                 <a:latin typeface="Calibri" pitchFamily="34" charset="0"/>
                 <a:ea typeface="Calibri" pitchFamily="34" charset="-122"/>
@@ -6259,20 +5260,20 @@
               </a:rPr>
               <a:t>10,5%</a:t>
             </a:r>
-            <a:endParaRPr lang="en-US" sz="3000" dirty="0"/>
+            <a:endParaRPr lang="en-US" sz="2600" dirty="0"/>
           </a:p>
         </p:txBody>
       </p:sp>
       <p:sp>
         <p:nvSpPr>
-          <p:cNvPr id="8" name="Text 4"/>
+          <p:cNvPr id="7" name="Text 3"/>
           <p:cNvSpPr txBox="1"/>
           <p:nvPr/>
         </p:nvSpPr>
         <p:spPr>
           <a:xfrm>
-            <a:off x="5806440" y="4114800"/>
-            <a:ext cx="2926080" cy="777240"/>
+            <a:off x="5760720" y="3886200"/>
+            <a:ext cx="2926080" cy="868680"/>
           </a:xfrm>
           <a:prstGeom prst="rect">
             <a:avLst/>
@@ -6290,13 +5291,13 @@
             <a:r>
               <a:rPr lang="en-US" sz="1100" dirty="0">
                 <a:solidFill>
-                  <a:srgbClr val="9BA7B4"/>
+                  <a:srgbClr val="595959"/>
                 </a:solidFill>
                 <a:latin typeface="Calibri" pitchFamily="34" charset="0"/>
                 <a:ea typeface="Calibri" pitchFamily="34" charset="-122"/>
                 <a:cs typeface="Calibri" pitchFamily="34" charset="-120"/>
               </a:rPr>
-              <a:t>dos adolescentes de 14 a 17 anos apostaram no último ano — mesmo sendo proibido (Fiocruz)</a:t>
+              <a:t>dos adolescentes de 14 a 17 anos apostaram no último ano, mesmo sendo proibido (Fiocruz)</a:t>
             </a:r>
             <a:endParaRPr lang="en-US" sz="1100" dirty="0"/>
           </a:p>
@@ -6316,7 +5317,7 @@
     <p:bg>
       <p:bgPr>
         <a:solidFill>
-          <a:srgbClr val="0D1117"/>
+          <a:srgbClr val="FFFFFF"/>
         </a:solidFill>
       </p:bgPr>
     </p:bg>
@@ -6342,8 +5343,8 @@
         </p:nvSpPr>
         <p:spPr>
           <a:xfrm>
-            <a:off x="640080" y="384048"/>
-            <a:ext cx="2743200" cy="365760"/>
+            <a:off x="548640" y="320040"/>
+            <a:ext cx="8046720" cy="685800"/>
           </a:xfrm>
           <a:prstGeom prst="rect">
             <a:avLst/>
@@ -6359,17 +5360,17 @@
               <a:buNone/>
             </a:pPr>
             <a:r>
-              <a:rPr lang="en-US" sz="1500" b="1" spc="400" kern="0" dirty="0">
-                <a:solidFill>
-                  <a:srgbClr val="F85149"/>
+              <a:rPr lang="en-US" sz="3000" b="1" dirty="0">
+                <a:solidFill>
+                  <a:srgbClr val="1F3864"/>
                 </a:solidFill>
                 <a:latin typeface="Calibri" pitchFamily="34" charset="0"/>
                 <a:ea typeface="Calibri" pitchFamily="34" charset="-122"/>
                 <a:cs typeface="Calibri" pitchFamily="34" charset="-120"/>
               </a:rPr>
-              <a:t>BIOLOGIA</a:t>
-            </a:r>
-            <a:endParaRPr lang="en-US" sz="1500" dirty="0"/>
+              <a:t>Biologia: o que a aposta faz no cérebro</a:t>
+            </a:r>
+            <a:endParaRPr lang="en-US" sz="3000" dirty="0"/>
           </a:p>
         </p:txBody>
       </p:sp>
@@ -6381,8 +5382,8 @@
         </p:nvSpPr>
         <p:spPr>
           <a:xfrm>
-            <a:off x="640080" y="749808"/>
-            <a:ext cx="7863840" cy="548640"/>
+            <a:off x="640080" y="1325880"/>
+            <a:ext cx="7863840" cy="3474720"/>
           </a:xfrm>
           <a:prstGeom prst="rect">
             <a:avLst/>
@@ -6391,402 +5392,151 @@
           <a:ln/>
         </p:spPr>
         <p:txBody>
-          <a:bodyPr wrap="square" lIns="0" tIns="0" rIns="0" bIns="0" rtlCol="0" anchor="ctr"/>
+          <a:bodyPr wrap="square" lIns="0" tIns="0" rIns="0" bIns="0" rtlCol="0" anchor="t"/>
           <a:lstStyle/>
           <a:p>
-            <a:pPr indent="0" marL="0">
-              <a:buNone/>
+            <a:pPr algn="l" marL="342900" indent="-342900">
+              <a:lnSpc>
+                <a:spcPct val="110000"/>
+              </a:lnSpc>
+              <a:spcAft>
+                <a:spcPts val="800"/>
+              </a:spcAft>
+              <a:buSzPct val="100000"/>
+              <a:buChar char="•"/>
             </a:pPr>
             <a:r>
-              <a:rPr lang="en-US" sz="2900" b="1" dirty="0">
-                <a:solidFill>
-                  <a:srgbClr val="F0F6FC"/>
+              <a:rPr lang="en-US" sz="1700" b="1" dirty="0">
+                <a:solidFill>
+                  <a:srgbClr val="262626"/>
                 </a:solidFill>
                 <a:latin typeface="Calibri" pitchFamily="34" charset="0"/>
                 <a:ea typeface="Calibri" pitchFamily="34" charset="-122"/>
                 <a:cs typeface="Calibri" pitchFamily="34" charset="-120"/>
               </a:rPr>
-              <a:t>O que a aposta faz no cérebro</a:t>
-            </a:r>
-            <a:endParaRPr lang="en-US" sz="2900" dirty="0"/>
-          </a:p>
-        </p:txBody>
-      </p:sp>
-      <p:sp>
-        <p:nvSpPr>
-          <p:cNvPr id="4" name="Shape 2"/>
-          <p:cNvSpPr/>
-          <p:nvPr/>
-        </p:nvSpPr>
-        <p:spPr>
-          <a:xfrm>
-            <a:off x="640080" y="1463040"/>
-            <a:ext cx="7863840" cy="987552"/>
-          </a:xfrm>
-          <a:prstGeom prst="roundRect">
-            <a:avLst>
-              <a:gd name="adj" fmla="val 9259"/>
-            </a:avLst>
-          </a:prstGeom>
-          <a:solidFill>
-            <a:srgbClr val="161C26"/>
-          </a:solidFill>
-          <a:ln/>
-        </p:spPr>
-      </p:sp>
-      <p:sp>
-        <p:nvSpPr>
-          <p:cNvPr id="5" name="Shape 3"/>
-          <p:cNvSpPr/>
-          <p:nvPr/>
-        </p:nvSpPr>
-        <p:spPr>
-          <a:xfrm>
-            <a:off x="804672" y="1700784"/>
-            <a:ext cx="512064" cy="512064"/>
-          </a:xfrm>
-          <a:prstGeom prst="ellipse">
-            <a:avLst/>
-          </a:prstGeom>
-          <a:solidFill>
-            <a:srgbClr val="1C2431"/>
-          </a:solidFill>
-          <a:ln/>
-        </p:spPr>
-      </p:sp>
-      <p:pic>
-        <p:nvPicPr>
-          <p:cNvPr id="6" name="Image 0" descr="preencoded.png">    </p:cNvPr>
-          <p:cNvPicPr>
-            <a:picLocks noChangeAspect="1"/>
-          </p:cNvPicPr>
-          <p:nvPr/>
-        </p:nvPicPr>
-        <p:blipFill>
-          <a:blip r:embed="rId1"/>
-          <a:stretch>
-            <a:fillRect/>
-          </a:stretch>
-        </p:blipFill>
-        <p:spPr>
-          <a:xfrm>
-            <a:off x="937809" y="1833921"/>
-            <a:ext cx="245791" cy="245791"/>
-          </a:xfrm>
-          <a:prstGeom prst="rect">
-            <a:avLst/>
-          </a:prstGeom>
-        </p:spPr>
-      </p:pic>
-      <p:sp>
-        <p:nvSpPr>
-          <p:cNvPr id="7" name="Text 4"/>
-          <p:cNvSpPr txBox="1"/>
-          <p:nvPr/>
-        </p:nvSpPr>
-        <p:spPr>
-          <a:xfrm>
-            <a:off x="1481328" y="1536192"/>
-            <a:ext cx="6858000" cy="868680"/>
-          </a:xfrm>
-          <a:prstGeom prst="rect">
-            <a:avLst/>
-          </a:prstGeom>
-          <a:noFill/>
-          <a:ln/>
-        </p:spPr>
-        <p:txBody>
-          <a:bodyPr wrap="square" lIns="0" tIns="0" rIns="0" bIns="0" rtlCol="0" anchor="ctr"/>
-          <a:lstStyle/>
-          <a:p>
-            <a:pPr indent="0" marL="0">
+              <a:t>Dopamina e recompensa: </a:t>
+            </a:r>
+            <a:endParaRPr lang="en-US" sz="1700" dirty="0"/>
+          </a:p>
+          <a:p>
+            <a:pPr algn="l" marL="342900" indent="-342900">
               <a:lnSpc>
-                <a:spcPct val="105000"/>
+                <a:spcPct val="110000"/>
               </a:lnSpc>
-              <a:buNone/>
+              <a:spcAft>
+                <a:spcPts val="800"/>
+              </a:spcAft>
+              <a:buSzPct val="100000"/>
+              <a:buChar char="•"/>
             </a:pPr>
             <a:r>
-              <a:rPr lang="en-US" sz="1250" b="1" dirty="0">
-                <a:solidFill>
-                  <a:srgbClr val="F85149"/>
+              <a:rPr lang="en-US" sz="1500" dirty="0">
+                <a:solidFill>
+                  <a:srgbClr val="262626"/>
                 </a:solidFill>
                 <a:latin typeface="Calibri" pitchFamily="34" charset="0"/>
                 <a:ea typeface="Calibri" pitchFamily="34" charset="-122"/>
                 <a:cs typeface="Calibri" pitchFamily="34" charset="-120"/>
               </a:rPr>
-              <a:t>Dopamina e o circuito de recompensa
-</a:t>
-            </a:r>
-            <a:pPr indent="0" marL="0">
+              <a:t>Cada aposta libera dopamina no circuito de recompensa (núcleo accumbens). Recompensa imprevisível libera MAIS dopamina que recompensa certa — por isso o 'quase ganhei' vicia tanto quanto ganhar.</a:t>
+            </a:r>
+            <a:endParaRPr lang="en-US" sz="1700" dirty="0"/>
+          </a:p>
+          <a:p>
+            <a:pPr algn="l" marL="342900" indent="-342900">
               <a:lnSpc>
-                <a:spcPct val="105000"/>
+                <a:spcPct val="110000"/>
               </a:lnSpc>
-              <a:buNone/>
+              <a:spcAft>
+                <a:spcPts val="800"/>
+              </a:spcAft>
+              <a:buSzPct val="100000"/>
+              <a:buChar char="•"/>
             </a:pPr>
             <a:r>
-              <a:rPr lang="en-US" sz="1100" dirty="0">
-                <a:solidFill>
-                  <a:srgbClr val="F0F6FC"/>
+              <a:rPr lang="en-US" sz="1700" b="1" dirty="0">
+                <a:solidFill>
+                  <a:srgbClr val="262626"/>
                 </a:solidFill>
                 <a:latin typeface="Calibri" pitchFamily="34" charset="0"/>
                 <a:ea typeface="Calibri" pitchFamily="34" charset="-122"/>
                 <a:cs typeface="Calibri" pitchFamily="34" charset="-120"/>
               </a:rPr>
-              <a:t>Cada aposta libera dopamina no sistema de recompensa (núcleo accumbens). Recompensa IMPREVISÍVEL libera mais dopamina do que recompensa certa — por isso o 'quase ganhei' vicia tanto quanto ganhar.</a:t>
-            </a:r>
-            <a:endParaRPr lang="en-US" sz="1250" dirty="0"/>
-          </a:p>
-        </p:txBody>
-      </p:sp>
-      <p:sp>
-        <p:nvSpPr>
-          <p:cNvPr id="8" name="Shape 5"/>
-          <p:cNvSpPr/>
-          <p:nvPr/>
-        </p:nvSpPr>
-        <p:spPr>
-          <a:xfrm>
-            <a:off x="640080" y="2578608"/>
-            <a:ext cx="7863840" cy="987552"/>
-          </a:xfrm>
-          <a:prstGeom prst="roundRect">
-            <a:avLst>
-              <a:gd name="adj" fmla="val 9259"/>
-            </a:avLst>
-          </a:prstGeom>
-          <a:solidFill>
-            <a:srgbClr val="161C26"/>
-          </a:solidFill>
-          <a:ln/>
-        </p:spPr>
-      </p:sp>
-      <p:sp>
-        <p:nvSpPr>
-          <p:cNvPr id="9" name="Shape 6"/>
-          <p:cNvSpPr/>
-          <p:nvPr/>
-        </p:nvSpPr>
-        <p:spPr>
-          <a:xfrm>
-            <a:off x="804672" y="2816352"/>
-            <a:ext cx="512064" cy="512064"/>
-          </a:xfrm>
-          <a:prstGeom prst="ellipse">
-            <a:avLst/>
-          </a:prstGeom>
-          <a:solidFill>
-            <a:srgbClr val="1C2431"/>
-          </a:solidFill>
-          <a:ln/>
-        </p:spPr>
-      </p:sp>
-      <p:pic>
-        <p:nvPicPr>
-          <p:cNvPr id="10" name="Image 1" descr="preencoded.png">    </p:cNvPr>
-          <p:cNvPicPr>
-            <a:picLocks noChangeAspect="1"/>
-          </p:cNvPicPr>
-          <p:nvPr/>
-        </p:nvPicPr>
-        <p:blipFill>
-          <a:blip r:embed="rId2"/>
-          <a:stretch>
-            <a:fillRect/>
-          </a:stretch>
-        </p:blipFill>
-        <p:spPr>
-          <a:xfrm>
-            <a:off x="937809" y="2949489"/>
-            <a:ext cx="245791" cy="245791"/>
-          </a:xfrm>
-          <a:prstGeom prst="rect">
-            <a:avLst/>
-          </a:prstGeom>
-        </p:spPr>
-      </p:pic>
-      <p:sp>
-        <p:nvSpPr>
-          <p:cNvPr id="11" name="Text 7"/>
-          <p:cNvSpPr txBox="1"/>
-          <p:nvPr/>
-        </p:nvSpPr>
-        <p:spPr>
-          <a:xfrm>
-            <a:off x="1481328" y="2651760"/>
-            <a:ext cx="6858000" cy="868680"/>
-          </a:xfrm>
-          <a:prstGeom prst="rect">
-            <a:avLst/>
-          </a:prstGeom>
-          <a:noFill/>
-          <a:ln/>
-        </p:spPr>
-        <p:txBody>
-          <a:bodyPr wrap="square" lIns="0" tIns="0" rIns="0" bIns="0" rtlCol="0" anchor="ctr"/>
-          <a:lstStyle/>
-          <a:p>
-            <a:pPr indent="0" marL="0">
+              <a:t>Tolerância — o mesmo mecanismo das drogas: </a:t>
+            </a:r>
+            <a:endParaRPr lang="en-US" sz="1700" dirty="0"/>
+          </a:p>
+          <a:p>
+            <a:pPr algn="l" marL="342900" indent="-342900">
               <a:lnSpc>
-                <a:spcPct val="105000"/>
+                <a:spcPct val="110000"/>
               </a:lnSpc>
-              <a:buNone/>
+              <a:spcAft>
+                <a:spcPts val="800"/>
+              </a:spcAft>
+              <a:buSzPct val="100000"/>
+              <a:buChar char="•"/>
             </a:pPr>
             <a:r>
-              <a:rPr lang="en-US" sz="1250" b="1" dirty="0">
-                <a:solidFill>
-                  <a:srgbClr val="F85149"/>
+              <a:rPr lang="en-US" sz="1500" dirty="0">
+                <a:solidFill>
+                  <a:srgbClr val="262626"/>
                 </a:solidFill>
                 <a:latin typeface="Calibri" pitchFamily="34" charset="0"/>
                 <a:ea typeface="Calibri" pitchFamily="34" charset="-122"/>
                 <a:cs typeface="Calibri" pitchFamily="34" charset="-120"/>
               </a:rPr>
-              <a:t>Tolerância: o mesmo mecanismo das drogas
-</a:t>
-            </a:r>
-            <a:pPr indent="0" marL="0">
+              <a:t>Com a repetição, o cérebro reduz a sensibilidade dos receptores de dopamina: é preciso apostar mais para sentir o mesmo prazer (CID-11, OMS).</a:t>
+            </a:r>
+            <a:endParaRPr lang="en-US" sz="1700" dirty="0"/>
+          </a:p>
+          <a:p>
+            <a:pPr algn="l" marL="342900" indent="-342900">
               <a:lnSpc>
-                <a:spcPct val="105000"/>
+                <a:spcPct val="110000"/>
               </a:lnSpc>
-              <a:buNone/>
+              <a:spcAft>
+                <a:spcPts val="800"/>
+              </a:spcAft>
+              <a:buSzPct val="100000"/>
+              <a:buChar char="•"/>
             </a:pPr>
             <a:r>
-              <a:rPr lang="en-US" sz="1100" dirty="0">
-                <a:solidFill>
-                  <a:srgbClr val="F0F6FC"/>
+              <a:rPr lang="en-US" sz="1700" b="1" dirty="0">
+                <a:solidFill>
+                  <a:srgbClr val="262626"/>
                 </a:solidFill>
                 <a:latin typeface="Calibri" pitchFamily="34" charset="0"/>
                 <a:ea typeface="Calibri" pitchFamily="34" charset="-122"/>
                 <a:cs typeface="Calibri" pitchFamily="34" charset="-120"/>
               </a:rPr>
-              <a:t>Com a repetição, o cérebro reduz a sensibilidade dos receptores de dopamina. Resultado: é preciso apostar mais, e mais alto, para sentir o mesmo prazer — a definição biológica de dependência (CID-11, OMS).</a:t>
-            </a:r>
-            <a:endParaRPr lang="en-US" sz="1250" dirty="0"/>
-          </a:p>
-        </p:txBody>
-      </p:sp>
-      <p:sp>
-        <p:nvSpPr>
-          <p:cNvPr id="12" name="Shape 8"/>
-          <p:cNvSpPr/>
-          <p:nvPr/>
-        </p:nvSpPr>
-        <p:spPr>
-          <a:xfrm>
-            <a:off x="640080" y="3694176"/>
-            <a:ext cx="7863840" cy="987552"/>
-          </a:xfrm>
-          <a:prstGeom prst="roundRect">
-            <a:avLst>
-              <a:gd name="adj" fmla="val 9259"/>
-            </a:avLst>
-          </a:prstGeom>
-          <a:solidFill>
-            <a:srgbClr val="161C26"/>
-          </a:solidFill>
-          <a:ln/>
-        </p:spPr>
-      </p:sp>
-      <p:sp>
-        <p:nvSpPr>
-          <p:cNvPr id="13" name="Shape 9"/>
-          <p:cNvSpPr/>
-          <p:nvPr/>
-        </p:nvSpPr>
-        <p:spPr>
-          <a:xfrm>
-            <a:off x="804672" y="3931920"/>
-            <a:ext cx="512064" cy="512064"/>
-          </a:xfrm>
-          <a:prstGeom prst="ellipse">
-            <a:avLst/>
-          </a:prstGeom>
-          <a:solidFill>
-            <a:srgbClr val="1C2431"/>
-          </a:solidFill>
-          <a:ln/>
-        </p:spPr>
-      </p:sp>
-      <p:pic>
-        <p:nvPicPr>
-          <p:cNvPr id="14" name="Image 2" descr="preencoded.png">    </p:cNvPr>
-          <p:cNvPicPr>
-            <a:picLocks noChangeAspect="1"/>
-          </p:cNvPicPr>
-          <p:nvPr/>
-        </p:nvPicPr>
-        <p:blipFill>
-          <a:blip r:embed="rId3"/>
-          <a:stretch>
-            <a:fillRect/>
-          </a:stretch>
-        </p:blipFill>
-        <p:spPr>
-          <a:xfrm>
-            <a:off x="937809" y="4065057"/>
-            <a:ext cx="245791" cy="245791"/>
-          </a:xfrm>
-          <a:prstGeom prst="rect">
-            <a:avLst/>
-          </a:prstGeom>
-        </p:spPr>
-      </p:pic>
-      <p:sp>
-        <p:nvSpPr>
-          <p:cNvPr id="15" name="Text 10"/>
-          <p:cNvSpPr txBox="1"/>
-          <p:nvPr/>
-        </p:nvSpPr>
-        <p:spPr>
-          <a:xfrm>
-            <a:off x="1481328" y="3767328"/>
-            <a:ext cx="6858000" cy="868680"/>
-          </a:xfrm>
-          <a:prstGeom prst="rect">
-            <a:avLst/>
-          </a:prstGeom>
-          <a:noFill/>
-          <a:ln/>
-        </p:spPr>
-        <p:txBody>
-          <a:bodyPr wrap="square" lIns="0" tIns="0" rIns="0" bIns="0" rtlCol="0" anchor="ctr"/>
-          <a:lstStyle/>
-          <a:p>
-            <a:pPr indent="0" marL="0">
+              <a:t>Por que o adolescente é mais vulnerável: </a:t>
+            </a:r>
+            <a:endParaRPr lang="en-US" sz="1700" dirty="0"/>
+          </a:p>
+          <a:p>
+            <a:pPr algn="l" marL="342900" indent="-342900">
               <a:lnSpc>
-                <a:spcPct val="105000"/>
+                <a:spcPct val="110000"/>
               </a:lnSpc>
-              <a:buNone/>
+              <a:spcAft>
+                <a:spcPts val="800"/>
+              </a:spcAft>
+              <a:buSzPct val="100000"/>
+              <a:buChar char="•"/>
             </a:pPr>
             <a:r>
-              <a:rPr lang="en-US" sz="1250" b="1" dirty="0">
-                <a:solidFill>
-                  <a:srgbClr val="F85149"/>
+              <a:rPr lang="en-US" sz="1500" dirty="0">
+                <a:solidFill>
+                  <a:srgbClr val="262626"/>
                 </a:solidFill>
                 <a:latin typeface="Calibri" pitchFamily="34" charset="0"/>
                 <a:ea typeface="Calibri" pitchFamily="34" charset="-122"/>
                 <a:cs typeface="Calibri" pitchFamily="34" charset="-120"/>
               </a:rPr>
-              <a:t>Por que o adolescente é mais vulnerável
-</a:t>
-            </a:r>
-            <a:pPr indent="0" marL="0">
-              <a:lnSpc>
-                <a:spcPct val="105000"/>
-              </a:lnSpc>
-              <a:buNone/>
-            </a:pPr>
-            <a:r>
-              <a:rPr lang="en-US" sz="1100" dirty="0">
-                <a:solidFill>
-                  <a:srgbClr val="F0F6FC"/>
-                </a:solidFill>
-                <a:latin typeface="Calibri" pitchFamily="34" charset="0"/>
-                <a:ea typeface="Calibri" pitchFamily="34" charset="-122"/>
-                <a:cs typeface="Calibri" pitchFamily="34" charset="-120"/>
-              </a:rPr>
-              <a:t>O córtex pré-frontal — a área que freia impulsos e avalia riscos — só termina de amadurecer por volta dos 25 anos. Cérebro em formação + app desenhado para viciar é uma disputa desleal.</a:t>
-            </a:r>
-            <a:endParaRPr lang="en-US" sz="1250" dirty="0"/>
+              <a:t>O córtex pré-frontal, que freia impulsos e avalia riscos, só amadurece por volta dos 25 anos.</a:t>
+            </a:r>
+            <a:endParaRPr lang="en-US" sz="1700" dirty="0"/>
           </a:p>
         </p:txBody>
       </p:sp>

--- a/trabalho-vicio-em-bets/vicio-em-bets.pptx
+++ b/trabalho-vicio-em-bets/vicio-em-bets.pptx
@@ -2601,8 +2601,8 @@
         </p:nvSpPr>
         <p:spPr>
           <a:xfrm>
-            <a:off x="548640" y="1234440"/>
-            <a:ext cx="8046720" cy="868680"/>
+            <a:off x="548640" y="1051560"/>
+            <a:ext cx="8046720" cy="1234440"/>
           </a:xfrm>
           <a:prstGeom prst="rect">
             <a:avLst/>
@@ -2618,7 +2618,7 @@
               <a:buNone/>
             </a:pPr>
             <a:r>
-              <a:rPr lang="en-US" sz="4400" b="1" dirty="0">
+              <a:rPr lang="en-US" sz="3600" b="1" dirty="0">
                 <a:solidFill>
                   <a:srgbClr val="1F3864"/>
                 </a:solidFill>
@@ -2626,9 +2626,9 @@
                 <a:ea typeface="Calibri" pitchFamily="34" charset="-122"/>
                 <a:cs typeface="Calibri" pitchFamily="34" charset="-120"/>
               </a:rPr>
-              <a:t>O vício em bets no Brasil</a:t>
-            </a:r>
-            <a:endParaRPr lang="en-US" sz="4400" dirty="0"/>
+              <a:t>Desafios para combater o vício em bets no Brasil</a:t>
+            </a:r>
+            <a:endParaRPr lang="en-US" sz="3600" dirty="0"/>
           </a:p>
         </p:txBody>
       </p:sp>
@@ -2640,7 +2640,7 @@
         </p:nvSpPr>
         <p:spPr>
           <a:xfrm>
-            <a:off x="548640" y="2148840"/>
+            <a:off x="548640" y="2331720"/>
             <a:ext cx="8046720" cy="457200"/>
           </a:xfrm>
           <a:prstGeom prst="rect">

--- a/trabalho-vicio-em-bets/vicio-em-bets.pptx
+++ b/trabalho-vicio-em-bets/vicio-em-bets.pptx
@@ -4518,7 +4518,7 @@
                 <a:ea typeface="Calibri" pitchFamily="34" charset="-122"/>
                 <a:cs typeface="Calibri" pitchFamily="34" charset="-120"/>
               </a:rPr>
-              <a:t>Se é doença, o tratamento é dever do SUS — isso vai aparecer na nossa proposta.</a:t>
+              <a:t>Se é doença, o tratamento é dever do SUS.</a:t>
             </a:r>
             <a:endParaRPr lang="en-US" sz="1800" dirty="0"/>
           </a:p>
